--- a/templates/Template_Business_Clean_Navy.pptx
+++ b/templates/Template_Business_Clean_Navy.pptx
@@ -7,9 +7,13 @@
   <p:sldIdLst>
     <p:sldId id="256" r:id="rId2"/>
     <p:sldId id="257" r:id="rId3"/>
+    <p:sldId id="258" r:id="rId4"/>
+    <p:sldId id="259" r:id="rId5"/>
+    <p:sldId id="260" r:id="rId6"/>
+    <p:sldId id="261" r:id="rId7"/>
   </p:sldIdLst>
   <p:notesMasterIdLst>
-    <p:notesMasterId r:id="rId4"/>
+    <p:notesMasterId r:id="rId8"/>
   </p:notesMasterIdLst>
   <p:sldSz cx="12192000" cy="6858000"/>
   <p:notesSz cx="6858000" cy="12192000"/>
@@ -504,7 +508,7 @@
             <a:r>
               <a:rPr lang="en-US" dirty="0"/>
               <a:t>1. Business Strategy Cover
-note: [전략 보고 오프닝] 2026년 글로벌 B2B 시장 진출을 위한 AI 솔루션 사업화 전략과 실행 계획을 보고드립니다.</a:t>
+note: [전략 보고 오프닝] 2026년 글로벌 B2B 시장 확대를 위한 사업화 전략과 실행 계획을 보고드립니다.</a:t>
             </a:r>
             <a:endParaRPr lang="en-US" dirty="0"/>
           </a:p>
@@ -592,8 +596,8 @@
           <a:p>
             <a:r>
               <a:rPr lang="en-US" dirty="0"/>
-              <a:t>2. Business KPI Big Stats
-note: [성과 지표 설명] ARR 1,250만 달러, NRR 142%, 영업이익률 28.4% 달성을 핵심 KPI로 설정하였습니다.</a:t>
+              <a:t>2. Business Agenda
+note: [목차 보고] 시장 기회 분석부터 재무적 실행 계획까지 4개 핵심 파트로 나누어 보고드립니다.</a:t>
             </a:r>
             <a:endParaRPr lang="en-US" dirty="0"/>
           </a:p>
@@ -617,6 +621,362 @@
             <a:fld id="{F7021451-1387-4CA6-816F-3879F97B5CBC}" type="slidenum">
               <a:rPr lang="en-US"/>
               <a:t>2</a:t>
+            </a:fld>
+            <a:endParaRPr lang="en-US"/>
+          </a:p>
+        </p:txBody>
+      </p:sp>
+    </p:spTree>
+    <p:extLst>
+      <p:ext uri="{BB962C8B-B14F-4D97-AF65-F5344CB8AC3E}">
+        <p14:creationId xmlns:p14="http://schemas.microsoft.com/office/powerpoint/2010/main" val="1024086991"/>
+      </p:ext>
+    </p:extLst>
+  </p:cSld>
+  <p:clrMapOvr>
+    <a:masterClrMapping/>
+  </p:clrMapOvr>
+</p:notes>
+</file>
+
+<file path=ppt/notesSlides/notesSlide3.xml><?xml version="1.0" encoding="utf-8"?>
+<p:notes xmlns:a="http://schemas.openxmlformats.org/drawingml/2006/main" xmlns:r="http://schemas.openxmlformats.org/officeDocument/2006/relationships" xmlns:p="http://schemas.openxmlformats.org/presentationml/2006/main">
+  <p:cSld>
+    <p:spTree>
+      <p:nvGrpSpPr>
+        <p:cNvPr id="1" name=""/>
+        <p:cNvGrpSpPr/>
+        <p:nvPr/>
+      </p:nvGrpSpPr>
+      <p:grpSpPr>
+        <a:xfrm>
+          <a:off x="0" y="0"/>
+          <a:ext cx="0" cy="0"/>
+          <a:chOff x="0" y="0"/>
+          <a:chExt cx="0" cy="0"/>
+        </a:xfrm>
+      </p:grpSpPr>
+      <p:sp>
+        <p:nvSpPr>
+          <p:cNvPr id="2" name="Slide Image Placeholder 1"/>
+          <p:cNvSpPr>
+            <a:spLocks noGrp="1" noRot="1" noChangeAspect="1"/>
+          </p:cNvSpPr>
+          <p:nvPr>
+            <p:ph type="sldImg"/>
+          </p:nvPr>
+        </p:nvSpPr>
+        <p:spPr/>
+      </p:sp>
+      <p:sp>
+        <p:nvSpPr>
+          <p:cNvPr id="3" name="Notes Placeholder 2"/>
+          <p:cNvSpPr>
+            <a:spLocks noGrp="1"/>
+          </p:cNvSpPr>
+          <p:nvPr>
+            <p:ph type="body" idx="1"/>
+          </p:nvPr>
+        </p:nvSpPr>
+        <p:spPr/>
+        <p:txBody>
+          <a:bodyPr/>
+          <a:lstStyle/>
+          <a:p>
+            <a:r>
+              <a:rPr lang="en-US" dirty="0"/>
+              <a:t>3. Business KPI Big Stats
+note: [핵심 지표] ARR 1,250만 달러, NRR 142%, 영업이익률 28.4% 달성을 핵심 목표로 설정하였습니다.</a:t>
+            </a:r>
+            <a:endParaRPr lang="en-US" dirty="0"/>
+          </a:p>
+        </p:txBody>
+      </p:sp>
+      <p:sp>
+        <p:nvSpPr>
+          <p:cNvPr id="4" name="Slide Number Placeholder 3"/>
+          <p:cNvSpPr>
+            <a:spLocks noGrp="1"/>
+          </p:cNvSpPr>
+          <p:nvPr>
+            <p:ph type="sldNum" sz="quarter" idx="10"/>
+          </p:nvPr>
+        </p:nvSpPr>
+        <p:spPr/>
+        <p:txBody>
+          <a:bodyPr/>
+          <a:lstStyle/>
+          <a:p>
+            <a:fld id="{F7021451-1387-4CA6-816F-3879F97B5CBC}" type="slidenum">
+              <a:rPr lang="en-US"/>
+              <a:t>3</a:t>
+            </a:fld>
+            <a:endParaRPr lang="en-US"/>
+          </a:p>
+        </p:txBody>
+      </p:sp>
+    </p:spTree>
+    <p:extLst>
+      <p:ext uri="{BB962C8B-B14F-4D97-AF65-F5344CB8AC3E}">
+        <p14:creationId xmlns:p14="http://schemas.microsoft.com/office/powerpoint/2010/main" val="1024086991"/>
+      </p:ext>
+    </p:extLst>
+  </p:cSld>
+  <p:clrMapOvr>
+    <a:masterClrMapping/>
+  </p:clrMapOvr>
+</p:notes>
+</file>
+
+<file path=ppt/notesSlides/notesSlide4.xml><?xml version="1.0" encoding="utf-8"?>
+<p:notes xmlns:a="http://schemas.openxmlformats.org/drawingml/2006/main" xmlns:r="http://schemas.openxmlformats.org/officeDocument/2006/relationships" xmlns:p="http://schemas.openxmlformats.org/presentationml/2006/main">
+  <p:cSld>
+    <p:spTree>
+      <p:nvGrpSpPr>
+        <p:cNvPr id="1" name=""/>
+        <p:cNvGrpSpPr/>
+        <p:nvPr/>
+      </p:nvGrpSpPr>
+      <p:grpSpPr>
+        <a:xfrm>
+          <a:off x="0" y="0"/>
+          <a:ext cx="0" cy="0"/>
+          <a:chOff x="0" y="0"/>
+          <a:chExt cx="0" cy="0"/>
+        </a:xfrm>
+      </p:grpSpPr>
+      <p:sp>
+        <p:nvSpPr>
+          <p:cNvPr id="2" name="Slide Image Placeholder 1"/>
+          <p:cNvSpPr>
+            <a:spLocks noGrp="1" noRot="1" noChangeAspect="1"/>
+          </p:cNvSpPr>
+          <p:nvPr>
+            <p:ph type="sldImg"/>
+          </p:nvPr>
+        </p:nvSpPr>
+        <p:spPr/>
+      </p:sp>
+      <p:sp>
+        <p:nvSpPr>
+          <p:cNvPr id="3" name="Notes Placeholder 2"/>
+          <p:cNvSpPr>
+            <a:spLocks noGrp="1"/>
+          </p:cNvSpPr>
+          <p:nvPr>
+            <p:ph type="body" idx="1"/>
+          </p:nvPr>
+        </p:nvSpPr>
+        <p:spPr/>
+        <p:txBody>
+          <a:bodyPr/>
+          <a:lstStyle/>
+          <a:p>
+            <a:r>
+              <a:rPr lang="en-US" dirty="0"/>
+              <a:t>4. GTM Funnel Strategy
+note: [GTM 전략] 3단계 퍼널을 통해 PoC 전환율 65%와 계정 확장을 가속화합니다.</a:t>
+            </a:r>
+            <a:endParaRPr lang="en-US" dirty="0"/>
+          </a:p>
+        </p:txBody>
+      </p:sp>
+      <p:sp>
+        <p:nvSpPr>
+          <p:cNvPr id="4" name="Slide Number Placeholder 3"/>
+          <p:cNvSpPr>
+            <a:spLocks noGrp="1"/>
+          </p:cNvSpPr>
+          <p:nvPr>
+            <p:ph type="sldNum" sz="quarter" idx="10"/>
+          </p:nvPr>
+        </p:nvSpPr>
+        <p:spPr/>
+        <p:txBody>
+          <a:bodyPr/>
+          <a:lstStyle/>
+          <a:p>
+            <a:fld id="{F7021451-1387-4CA6-816F-3879F97B5CBC}" type="slidenum">
+              <a:rPr lang="en-US"/>
+              <a:t>4</a:t>
+            </a:fld>
+            <a:endParaRPr lang="en-US"/>
+          </a:p>
+        </p:txBody>
+      </p:sp>
+    </p:spTree>
+    <p:extLst>
+      <p:ext uri="{BB962C8B-B14F-4D97-AF65-F5344CB8AC3E}">
+        <p14:creationId xmlns:p14="http://schemas.microsoft.com/office/powerpoint/2010/main" val="1024086991"/>
+      </p:ext>
+    </p:extLst>
+  </p:cSld>
+  <p:clrMapOvr>
+    <a:masterClrMapping/>
+  </p:clrMapOvr>
+</p:notes>
+</file>
+
+<file path=ppt/notesSlides/notesSlide5.xml><?xml version="1.0" encoding="utf-8"?>
+<p:notes xmlns:a="http://schemas.openxmlformats.org/drawingml/2006/main" xmlns:r="http://schemas.openxmlformats.org/officeDocument/2006/relationships" xmlns:p="http://schemas.openxmlformats.org/presentationml/2006/main">
+  <p:cSld>
+    <p:spTree>
+      <p:nvGrpSpPr>
+        <p:cNvPr id="1" name=""/>
+        <p:cNvGrpSpPr/>
+        <p:nvPr/>
+      </p:nvGrpSpPr>
+      <p:grpSpPr>
+        <a:xfrm>
+          <a:off x="0" y="0"/>
+          <a:ext cx="0" cy="0"/>
+          <a:chOff x="0" y="0"/>
+          <a:chExt cx="0" cy="0"/>
+        </a:xfrm>
+      </p:grpSpPr>
+      <p:sp>
+        <p:nvSpPr>
+          <p:cNvPr id="2" name="Slide Image Placeholder 1"/>
+          <p:cNvSpPr>
+            <a:spLocks noGrp="1" noRot="1" noChangeAspect="1"/>
+          </p:cNvSpPr>
+          <p:nvPr>
+            <p:ph type="sldImg"/>
+          </p:nvPr>
+        </p:nvSpPr>
+        <p:spPr/>
+      </p:sp>
+      <p:sp>
+        <p:nvSpPr>
+          <p:cNvPr id="3" name="Notes Placeholder 2"/>
+          <p:cNvSpPr>
+            <a:spLocks noGrp="1"/>
+          </p:cNvSpPr>
+          <p:nvPr>
+            <p:ph type="body" idx="1"/>
+          </p:nvPr>
+        </p:nvSpPr>
+        <p:spPr/>
+        <p:txBody>
+          <a:bodyPr/>
+          <a:lstStyle/>
+          <a:p>
+            <a:r>
+              <a:rPr lang="en-US" dirty="0"/>
+              <a:t>5. Unit Economics &amp; ROI
+note: [유닛 이코노믹스] CAC 회수 기간 6.5개월과 LTV/CAC 4.8배 달성으로 높은 수익성을 확보했습니다.</a:t>
+            </a:r>
+            <a:endParaRPr lang="en-US" dirty="0"/>
+          </a:p>
+        </p:txBody>
+      </p:sp>
+      <p:sp>
+        <p:nvSpPr>
+          <p:cNvPr id="4" name="Slide Number Placeholder 3"/>
+          <p:cNvSpPr>
+            <a:spLocks noGrp="1"/>
+          </p:cNvSpPr>
+          <p:nvPr>
+            <p:ph type="sldNum" sz="quarter" idx="10"/>
+          </p:nvPr>
+        </p:nvSpPr>
+        <p:spPr/>
+        <p:txBody>
+          <a:bodyPr/>
+          <a:lstStyle/>
+          <a:p>
+            <a:fld id="{F7021451-1387-4CA6-816F-3879F97B5CBC}" type="slidenum">
+              <a:rPr lang="en-US"/>
+              <a:t>5</a:t>
+            </a:fld>
+            <a:endParaRPr lang="en-US"/>
+          </a:p>
+        </p:txBody>
+      </p:sp>
+    </p:spTree>
+    <p:extLst>
+      <p:ext uri="{BB962C8B-B14F-4D97-AF65-F5344CB8AC3E}">
+        <p14:creationId xmlns:p14="http://schemas.microsoft.com/office/powerpoint/2010/main" val="1024086991"/>
+      </p:ext>
+    </p:extLst>
+  </p:cSld>
+  <p:clrMapOvr>
+    <a:masterClrMapping/>
+  </p:clrMapOvr>
+</p:notes>
+</file>
+
+<file path=ppt/notesSlides/notesSlide6.xml><?xml version="1.0" encoding="utf-8"?>
+<p:notes xmlns:a="http://schemas.openxmlformats.org/drawingml/2006/main" xmlns:r="http://schemas.openxmlformats.org/officeDocument/2006/relationships" xmlns:p="http://schemas.openxmlformats.org/presentationml/2006/main">
+  <p:cSld>
+    <p:spTree>
+      <p:nvGrpSpPr>
+        <p:cNvPr id="1" name=""/>
+        <p:cNvGrpSpPr/>
+        <p:nvPr/>
+      </p:nvGrpSpPr>
+      <p:grpSpPr>
+        <a:xfrm>
+          <a:off x="0" y="0"/>
+          <a:ext cx="0" cy="0"/>
+          <a:chOff x="0" y="0"/>
+          <a:chExt cx="0" cy="0"/>
+        </a:xfrm>
+      </p:grpSpPr>
+      <p:sp>
+        <p:nvSpPr>
+          <p:cNvPr id="2" name="Slide Image Placeholder 1"/>
+          <p:cNvSpPr>
+            <a:spLocks noGrp="1" noRot="1" noChangeAspect="1"/>
+          </p:cNvSpPr>
+          <p:nvPr>
+            <p:ph type="sldImg"/>
+          </p:nvPr>
+        </p:nvSpPr>
+        <p:spPr/>
+      </p:sp>
+      <p:sp>
+        <p:nvSpPr>
+          <p:cNvPr id="3" name="Notes Placeholder 2"/>
+          <p:cNvSpPr>
+            <a:spLocks noGrp="1"/>
+          </p:cNvSpPr>
+          <p:nvPr>
+            <p:ph type="body" idx="1"/>
+          </p:nvPr>
+        </p:nvSpPr>
+        <p:spPr/>
+        <p:txBody>
+          <a:bodyPr/>
+          <a:lstStyle/>
+          <a:p>
+            <a:r>
+              <a:rPr lang="en-US" dirty="0"/>
+              <a:t>6. Executive Closing &amp; Action Hub
+note: [마무리 보고] 3대 핵심 실행 과제를 요약하며 보고를 마칩니다. 질문해 주시면 답변드리겠습니다. 경청해 주셔서 감사합니다.</a:t>
+            </a:r>
+            <a:endParaRPr lang="en-US" dirty="0"/>
+          </a:p>
+        </p:txBody>
+      </p:sp>
+      <p:sp>
+        <p:nvSpPr>
+          <p:cNvPr id="4" name="Slide Number Placeholder 3"/>
+          <p:cNvSpPr>
+            <a:spLocks noGrp="1"/>
+          </p:cNvSpPr>
+          <p:nvPr>
+            <p:ph type="sldNum" sz="quarter" idx="10"/>
+          </p:nvPr>
+        </p:nvSpPr>
+        <p:spPr/>
+        <p:txBody>
+          <a:bodyPr/>
+          <a:lstStyle/>
+          <a:p>
+            <a:fld id="{F7021451-1387-4CA6-816F-3879F97B5CBC}" type="slidenum">
+              <a:rPr lang="en-US"/>
+              <a:t>6</a:t>
             </a:fld>
             <a:endParaRPr lang="en-US"/>
           </a:p>
@@ -984,6 +1344,162 @@
 <file path=ppt/slides/slide2.xml><?xml version="1.0" encoding="utf-8"?>
 <p:sld xmlns:a="http://schemas.openxmlformats.org/drawingml/2006/main" xmlns:r="http://schemas.openxmlformats.org/officeDocument/2006/relationships" xmlns:p="http://schemas.openxmlformats.org/presentationml/2006/main">
   <p:cSld name="Slide 2">
+    <p:bg>
+      <p:bgPr>
+        <a:blipFill dpi="0" rotWithShape="1">
+          <a:blip r:embed="rId1">
+            <a:lum/>
+          </a:blip>
+          <a:srcRect/>
+          <a:stretch>
+            <a:fillRect/>
+          </a:stretch>
+        </a:blipFill>
+        <a:effectLst/>
+      </p:bgPr>
+    </p:bg>
+    <p:spTree>
+      <p:nvGrpSpPr>
+        <p:cNvPr id="1" name=""/>
+        <p:cNvGrpSpPr/>
+        <p:nvPr/>
+      </p:nvGrpSpPr>
+      <p:grpSpPr>
+        <a:xfrm>
+          <a:off x="0" y="0"/>
+          <a:ext cx="0" cy="0"/>
+          <a:chOff x="0" y="0"/>
+          <a:chExt cx="0" cy="0"/>
+        </a:xfrm>
+      </p:grpSpPr>
+    </p:spTree>
+  </p:cSld>
+  <p:clrMapOvr>
+    <a:masterClrMapping/>
+  </p:clrMapOvr>
+</p:sld>
+</file>
+
+<file path=ppt/slides/slide3.xml><?xml version="1.0" encoding="utf-8"?>
+<p:sld xmlns:a="http://schemas.openxmlformats.org/drawingml/2006/main" xmlns:r="http://schemas.openxmlformats.org/officeDocument/2006/relationships" xmlns:p="http://schemas.openxmlformats.org/presentationml/2006/main">
+  <p:cSld name="Slide 3">
+    <p:bg>
+      <p:bgPr>
+        <a:blipFill dpi="0" rotWithShape="1">
+          <a:blip r:embed="rId1">
+            <a:lum/>
+          </a:blip>
+          <a:srcRect/>
+          <a:stretch>
+            <a:fillRect/>
+          </a:stretch>
+        </a:blipFill>
+        <a:effectLst/>
+      </p:bgPr>
+    </p:bg>
+    <p:spTree>
+      <p:nvGrpSpPr>
+        <p:cNvPr id="1" name=""/>
+        <p:cNvGrpSpPr/>
+        <p:nvPr/>
+      </p:nvGrpSpPr>
+      <p:grpSpPr>
+        <a:xfrm>
+          <a:off x="0" y="0"/>
+          <a:ext cx="0" cy="0"/>
+          <a:chOff x="0" y="0"/>
+          <a:chExt cx="0" cy="0"/>
+        </a:xfrm>
+      </p:grpSpPr>
+    </p:spTree>
+  </p:cSld>
+  <p:clrMapOvr>
+    <a:masterClrMapping/>
+  </p:clrMapOvr>
+</p:sld>
+</file>
+
+<file path=ppt/slides/slide4.xml><?xml version="1.0" encoding="utf-8"?>
+<p:sld xmlns:a="http://schemas.openxmlformats.org/drawingml/2006/main" xmlns:r="http://schemas.openxmlformats.org/officeDocument/2006/relationships" xmlns:p="http://schemas.openxmlformats.org/presentationml/2006/main">
+  <p:cSld name="Slide 4">
+    <p:bg>
+      <p:bgPr>
+        <a:blipFill dpi="0" rotWithShape="1">
+          <a:blip r:embed="rId1">
+            <a:lum/>
+          </a:blip>
+          <a:srcRect/>
+          <a:stretch>
+            <a:fillRect/>
+          </a:stretch>
+        </a:blipFill>
+        <a:effectLst/>
+      </p:bgPr>
+    </p:bg>
+    <p:spTree>
+      <p:nvGrpSpPr>
+        <p:cNvPr id="1" name=""/>
+        <p:cNvGrpSpPr/>
+        <p:nvPr/>
+      </p:nvGrpSpPr>
+      <p:grpSpPr>
+        <a:xfrm>
+          <a:off x="0" y="0"/>
+          <a:ext cx="0" cy="0"/>
+          <a:chOff x="0" y="0"/>
+          <a:chExt cx="0" cy="0"/>
+        </a:xfrm>
+      </p:grpSpPr>
+    </p:spTree>
+  </p:cSld>
+  <p:clrMapOvr>
+    <a:masterClrMapping/>
+  </p:clrMapOvr>
+</p:sld>
+</file>
+
+<file path=ppt/slides/slide5.xml><?xml version="1.0" encoding="utf-8"?>
+<p:sld xmlns:a="http://schemas.openxmlformats.org/drawingml/2006/main" xmlns:r="http://schemas.openxmlformats.org/officeDocument/2006/relationships" xmlns:p="http://schemas.openxmlformats.org/presentationml/2006/main">
+  <p:cSld name="Slide 5">
+    <p:bg>
+      <p:bgPr>
+        <a:blipFill dpi="0" rotWithShape="1">
+          <a:blip r:embed="rId1">
+            <a:lum/>
+          </a:blip>
+          <a:srcRect/>
+          <a:stretch>
+            <a:fillRect/>
+          </a:stretch>
+        </a:blipFill>
+        <a:effectLst/>
+      </p:bgPr>
+    </p:bg>
+    <p:spTree>
+      <p:nvGrpSpPr>
+        <p:cNvPr id="1" name=""/>
+        <p:cNvGrpSpPr/>
+        <p:nvPr/>
+      </p:nvGrpSpPr>
+      <p:grpSpPr>
+        <a:xfrm>
+          <a:off x="0" y="0"/>
+          <a:ext cx="0" cy="0"/>
+          <a:chOff x="0" y="0"/>
+          <a:chExt cx="0" cy="0"/>
+        </a:xfrm>
+      </p:grpSpPr>
+    </p:spTree>
+  </p:cSld>
+  <p:clrMapOvr>
+    <a:masterClrMapping/>
+  </p:clrMapOvr>
+</p:sld>
+</file>
+
+<file path=ppt/slides/slide6.xml><?xml version="1.0" encoding="utf-8"?>
+<p:sld xmlns:a="http://schemas.openxmlformats.org/drawingml/2006/main" xmlns:r="http://schemas.openxmlformats.org/officeDocument/2006/relationships" xmlns:p="http://schemas.openxmlformats.org/presentationml/2006/main">
+  <p:cSld name="Slide 6">
     <p:bg>
       <p:bgPr>
         <a:blipFill dpi="0" rotWithShape="1">

--- a/templates/Template_Business_Clean_Navy.pptx
+++ b/templates/Template_Business_Clean_Navy.pptx
@@ -507,8 +507,7 @@
           <a:p>
             <a:r>
               <a:rPr lang="en-US" dirty="0"/>
-              <a:t>1. Business Strategy Cover
-note: [전략 보고 오프닝] 2026년 글로벌 B2B 시장 확대를 위한 사업화 전략과 실행 계획을 보고드립니다.</a:t>
+              <a:t>[전략 보고 오프닝] 2026년 글로벌 B2B 시장 확대를 위한 사업화 전략과 실행 계획을 보고드립니다.</a:t>
             </a:r>
             <a:endParaRPr lang="en-US" dirty="0"/>
           </a:p>
@@ -596,8 +595,7 @@
           <a:p>
             <a:r>
               <a:rPr lang="en-US" dirty="0"/>
-              <a:t>2. Business Agenda
-note: [목차 보고] 시장 기회 분석부터 재무적 실행 계획까지 4개 핵심 파트로 나누어 보고드립니다.</a:t>
+              <a:t>[목차 보고] 시장 기회 분석부터 재무적 실행 계획까지 4개 핵심 파트로 나누어 보고드립니다.</a:t>
             </a:r>
             <a:endParaRPr lang="en-US" dirty="0"/>
           </a:p>
@@ -685,8 +683,7 @@
           <a:p>
             <a:r>
               <a:rPr lang="en-US" dirty="0"/>
-              <a:t>3. Business KPI Big Stats
-note: [핵심 지표] ARR 1,250만 달러, NRR 142%, 영업이익률 28.4% 달성을 핵심 목표로 설정하였습니다.</a:t>
+              <a:t>[핵심 지표] ARR 1,250만 달러, NRR 142%, 영업이익률 28.4% 달성을 핵심 목표로 설정하였습니다.</a:t>
             </a:r>
             <a:endParaRPr lang="en-US" dirty="0"/>
           </a:p>
@@ -774,8 +771,7 @@
           <a:p>
             <a:r>
               <a:rPr lang="en-US" dirty="0"/>
-              <a:t>4. GTM Funnel Strategy
-note: [GTM 전략] 3단계 퍼널을 통해 PoC 전환율 65%와 계정 확장을 가속화합니다.</a:t>
+              <a:t>[GTM 전략] 3단계 퍼널을 통해 PoC 전환율 65%와 계정 확장을 가속화합니다.</a:t>
             </a:r>
             <a:endParaRPr lang="en-US" dirty="0"/>
           </a:p>
@@ -863,8 +859,7 @@
           <a:p>
             <a:r>
               <a:rPr lang="en-US" dirty="0"/>
-              <a:t>5. Unit Economics &amp; ROI
-note: [유닛 이코노믹스] CAC 회수 기간 6.5개월과 LTV/CAC 4.8배 달성으로 높은 수익성을 확보했습니다.</a:t>
+              <a:t>[유닛 이코노믹스] CAC 회수 기간 6.5개월과 LTV/CAC 4.8배 달성으로 높은 수익성을 확보했습니다.</a:t>
             </a:r>
             <a:endParaRPr lang="en-US" dirty="0"/>
           </a:p>
@@ -952,8 +947,7 @@
           <a:p>
             <a:r>
               <a:rPr lang="en-US" dirty="0"/>
-              <a:t>6. Executive Closing &amp; Action Hub
-note: [마무리 보고] 3대 핵심 실행 과제를 요약하며 보고를 마칩니다. 질문해 주시면 답변드리겠습니다. 경청해 주셔서 감사합니다.</a:t>
+              <a:t>[마무리 보고] 3대 핵심 실행 과제를 요약하며 보고를 마칩니다. 질문해 주시면 답변드리겠습니다. 경청해 주셔서 감사합니다.</a:t>
             </a:r>
             <a:endParaRPr lang="en-US" dirty="0"/>
           </a:p>
@@ -1307,16 +1301,9 @@
   <p:cSld name="Slide 1">
     <p:bg>
       <p:bgPr>
-        <a:blipFill dpi="0" rotWithShape="1">
-          <a:blip r:embed="rId1">
-            <a:lum/>
-          </a:blip>
-          <a:srcRect/>
-          <a:stretch>
-            <a:fillRect/>
-          </a:stretch>
-        </a:blipFill>
-        <a:effectLst/>
+        <a:solidFill>
+          <a:srgbClr val="38BDF8"/>
+        </a:solidFill>
       </p:bgPr>
     </p:bg>
     <p:spTree>
@@ -1333,6 +1320,548 @@
           <a:chExt cx="0" cy="0"/>
         </a:xfrm>
       </p:grpSpPr>
+      <p:sp>
+        <p:nvSpPr>
+          <p:cNvPr id="2" name="Shape 0"/>
+          <p:cNvSpPr/>
+          <p:nvPr/>
+        </p:nvSpPr>
+        <p:spPr>
+          <a:xfrm>
+            <a:off x="552480" y="438180"/>
+            <a:ext cx="3345424" cy="418521"/>
+          </a:xfrm>
+          <a:prstGeom prst="roundRect">
+            <a:avLst>
+              <a:gd name="adj" fmla="val 50011"/>
+            </a:avLst>
+          </a:prstGeom>
+          <a:solidFill>
+            <a:srgbClr val="F59E0B">
+              <a:alpha val="15000"/>
+            </a:srgbClr>
+          </a:solidFill>
+          <a:ln w="9525">
+            <a:solidFill>
+              <a:srgbClr val="F59E0B">
+                <a:alpha val="35000"/>
+              </a:srgbClr>
+            </a:solidFill>
+            <a:prstDash val="solid"/>
+          </a:ln>
+        </p:spPr>
+      </p:sp>
+      <p:sp>
+        <p:nvSpPr>
+          <p:cNvPr id="3" name="Text 1"/>
+          <p:cNvSpPr txBox="1"/>
+          <p:nvPr/>
+        </p:nvSpPr>
+        <p:spPr>
+          <a:xfrm>
+            <a:off x="676290" y="481432"/>
+            <a:ext cx="3323570" cy="323149"/>
+          </a:xfrm>
+          <a:prstGeom prst="rect">
+            <a:avLst/>
+          </a:prstGeom>
+          <a:noFill/>
+          <a:ln/>
+        </p:spPr>
+        <p:txBody>
+          <a:bodyPr wrap="none" lIns="0" tIns="0" rIns="0" bIns="0" rtlCol="0" anchor="t"/>
+          <a:lstStyle/>
+          <a:p>
+            <a:pPr algn="l" indent="0" marL="0">
+              <a:lnSpc>
+                <a:spcPts val="2545"/>
+              </a:lnSpc>
+              <a:buNone/>
+            </a:pPr>
+            <a:r>
+              <a:rPr lang="en-US" sz="1697" b="1" spc="34" kern="0" dirty="0">
+                <a:solidFill>
+                  <a:srgbClr val="F59E0B"/>
+                </a:solidFill>
+                <a:latin typeface="Malgun Gothic" pitchFamily="34" charset="0"/>
+                <a:ea typeface="Malgun Gothic" pitchFamily="34" charset="-122"/>
+                <a:cs typeface="Malgun Gothic" pitchFamily="34" charset="-120"/>
+              </a:rPr>
+              <a:t>2026 STRATEGIC INITIATIVE</a:t>
+            </a:r>
+            <a:endParaRPr lang="en-US" sz="1697" dirty="0"/>
+          </a:p>
+        </p:txBody>
+      </p:sp>
+      <p:sp>
+        <p:nvSpPr>
+          <p:cNvPr id="4" name="Text 2"/>
+          <p:cNvSpPr txBox="1"/>
+          <p:nvPr/>
+        </p:nvSpPr>
+        <p:spPr>
+          <a:xfrm>
+            <a:off x="533370" y="1040679"/>
+            <a:ext cx="11125230" cy="1682953"/>
+          </a:xfrm>
+          <a:prstGeom prst="rect">
+            <a:avLst/>
+          </a:prstGeom>
+          <a:noFill/>
+          <a:ln/>
+        </p:spPr>
+        <p:txBody>
+          <a:bodyPr wrap="square" lIns="0" tIns="0" rIns="0" bIns="0" rtlCol="0" anchor="t"/>
+          <a:lstStyle/>
+          <a:p>
+            <a:pPr algn="l" indent="0" marL="0">
+              <a:lnSpc>
+                <a:spcPts val="6626"/>
+              </a:lnSpc>
+              <a:buNone/>
+            </a:pPr>
+            <a:r>
+              <a:rPr lang="en-US" sz="5177" b="1" spc="-155" kern="0" dirty="0">
+                <a:solidFill>
+                  <a:srgbClr val="FFFFFF"/>
+                </a:solidFill>
+                <a:latin typeface="Malgun Gothic" pitchFamily="34" charset="0"/>
+                <a:ea typeface="Malgun Gothic" pitchFamily="34" charset="-122"/>
+                <a:cs typeface="Malgun Gothic" pitchFamily="34" charset="-120"/>
+              </a:rPr>
+              <a:t>글로벌 엔터프라이즈 B2B 시장 확대를 위한</a:t>
+            </a:r>
+            <a:pPr algn="l" indent="0" marL="0">
+              <a:lnSpc>
+                <a:spcPts val="6626"/>
+              </a:lnSpc>
+              <a:buNone/>
+            </a:pPr>
+            <a:endParaRPr lang="en-US" sz="5177" dirty="0"/>
+          </a:p>
+          <a:p>
+            <a:pPr algn="l" indent="0" marL="0">
+              <a:lnSpc>
+                <a:spcPts val="6626"/>
+              </a:lnSpc>
+              <a:buNone/>
+            </a:pPr>
+            <a:r>
+              <a:rPr lang="en-US" sz="5177" b="1" spc="-155" kern="0" dirty="0">
+                <a:solidFill>
+                  <a:srgbClr val="FFFFFF"/>
+                </a:solidFill>
+                <a:latin typeface="Malgun Gothic" pitchFamily="34" charset="0"/>
+                <a:ea typeface="Malgun Gothic" pitchFamily="34" charset="-122"/>
+                <a:cs typeface="Malgun Gothic" pitchFamily="34" charset="-120"/>
+              </a:rPr>
+              <a:t> </a:t>
+            </a:r>
+            <a:endParaRPr lang="en-US" sz="5177" dirty="0"/>
+          </a:p>
+          <a:p>
+            <a:pPr algn="l" indent="0" marL="0">
+              <a:lnSpc>
+                <a:spcPts val="6626"/>
+              </a:lnSpc>
+              <a:buNone/>
+            </a:pPr>
+            <a:r>
+              <a:rPr lang="en-US" sz="5177" b="1" spc="-155" kern="0" dirty="0">
+                <a:solidFill>
+                  <a:srgbClr val="F59E0B"/>
+                </a:solidFill>
+                <a:latin typeface="Malgun Gothic" pitchFamily="34" charset="0"/>
+                <a:ea typeface="Malgun Gothic" pitchFamily="34" charset="-122"/>
+                <a:cs typeface="Malgun Gothic" pitchFamily="34" charset="-120"/>
+              </a:rPr>
+              <a:t>AI 솔루션 사업화 및 성장 전략</a:t>
+            </a:r>
+            <a:endParaRPr lang="en-US" sz="5177" dirty="0"/>
+          </a:p>
+        </p:txBody>
+      </p:sp>
+      <p:sp>
+        <p:nvSpPr>
+          <p:cNvPr id="5" name="Text 3"/>
+          <p:cNvSpPr txBox="1"/>
+          <p:nvPr/>
+        </p:nvSpPr>
+        <p:spPr>
+          <a:xfrm>
+            <a:off x="533370" y="3032425"/>
+            <a:ext cx="11993088" cy="256032"/>
+          </a:xfrm>
+          <a:prstGeom prst="rect">
+            <a:avLst/>
+          </a:prstGeom>
+          <a:noFill/>
+          <a:ln/>
+        </p:spPr>
+        <p:txBody>
+          <a:bodyPr wrap="none" lIns="0" tIns="0" rIns="0" bIns="0" rtlCol="0" anchor="t"/>
+          <a:lstStyle/>
+          <a:p>
+            <a:pPr algn="l" indent="0" marL="0">
+              <a:lnSpc>
+                <a:spcPts val="2016"/>
+              </a:lnSpc>
+              <a:buNone/>
+            </a:pPr>
+            <a:r>
+              <a:rPr lang="en-US" sz="1344" spc="-54" kern="0" dirty="0">
+                <a:solidFill>
+                  <a:srgbClr val="94A3B8"/>
+                </a:solidFill>
+                <a:latin typeface="Malgun Gothic" pitchFamily="34" charset="0"/>
+                <a:ea typeface="Malgun Gothic" pitchFamily="34" charset="-122"/>
+                <a:cs typeface="Malgun Gothic" pitchFamily="34" charset="-120"/>
+              </a:rPr>
+              <a:t>수익성 극대화와 리텐션 강화를 위한 3대 핵심 로드맵 및 재무적 실행 계획</a:t>
+            </a:r>
+            <a:endParaRPr lang="en-US" sz="1344" dirty="0"/>
+          </a:p>
+        </p:txBody>
+      </p:sp>
+      <p:sp>
+        <p:nvSpPr>
+          <p:cNvPr id="6" name="Shape 4"/>
+          <p:cNvSpPr/>
+          <p:nvPr/>
+        </p:nvSpPr>
+        <p:spPr>
+          <a:xfrm>
+            <a:off x="552480" y="5153284"/>
+            <a:ext cx="3818992" cy="1285555"/>
+          </a:xfrm>
+          <a:prstGeom prst="roundRect">
+            <a:avLst>
+              <a:gd name="adj" fmla="val 8891"/>
+            </a:avLst>
+          </a:prstGeom>
+          <a:solidFill>
+            <a:srgbClr val="111A2E"/>
+          </a:solidFill>
+          <a:ln w="9525">
+            <a:solidFill>
+              <a:srgbClr val="FFFFFF">
+                <a:alpha val="10000"/>
+              </a:srgbClr>
+            </a:solidFill>
+            <a:prstDash val="solid"/>
+          </a:ln>
+        </p:spPr>
+      </p:sp>
+      <p:sp>
+        <p:nvSpPr>
+          <p:cNvPr id="7" name="Text 5"/>
+          <p:cNvSpPr txBox="1"/>
+          <p:nvPr/>
+        </p:nvSpPr>
+        <p:spPr>
+          <a:xfrm>
+            <a:off x="714421" y="5457139"/>
+            <a:ext cx="3752606" cy="290048"/>
+          </a:xfrm>
+          <a:prstGeom prst="rect">
+            <a:avLst/>
+          </a:prstGeom>
+          <a:noFill/>
+          <a:ln/>
+        </p:spPr>
+        <p:txBody>
+          <a:bodyPr wrap="none" lIns="0" tIns="0" rIns="0" bIns="0" rtlCol="0" anchor="t"/>
+          <a:lstStyle/>
+          <a:p>
+            <a:pPr algn="l" indent="0" marL="0">
+              <a:lnSpc>
+                <a:spcPts val="2284"/>
+              </a:lnSpc>
+              <a:buNone/>
+            </a:pPr>
+            <a:r>
+              <a:rPr lang="en-US" sz="1523" b="1" spc="76" kern="0" dirty="0">
+                <a:solidFill>
+                  <a:srgbClr val="F59E0B"/>
+                </a:solidFill>
+                <a:latin typeface="Malgun Gothic" pitchFamily="34" charset="0"/>
+                <a:ea typeface="Malgun Gothic" pitchFamily="34" charset="-122"/>
+                <a:cs typeface="Malgun Gothic" pitchFamily="34" charset="-120"/>
+              </a:rPr>
+              <a:t>DIVISION &amp; OWNER</a:t>
+            </a:r>
+            <a:endParaRPr lang="en-US" sz="1523" dirty="0"/>
+          </a:p>
+        </p:txBody>
+      </p:sp>
+      <p:sp>
+        <p:nvSpPr>
+          <p:cNvPr id="8" name="Text 6"/>
+          <p:cNvSpPr txBox="1"/>
+          <p:nvPr/>
+        </p:nvSpPr>
+        <p:spPr>
+          <a:xfrm>
+            <a:off x="714421" y="5766938"/>
+            <a:ext cx="3752606" cy="364663"/>
+          </a:xfrm>
+          <a:prstGeom prst="rect">
+            <a:avLst/>
+          </a:prstGeom>
+          <a:noFill/>
+          <a:ln/>
+        </p:spPr>
+        <p:txBody>
+          <a:bodyPr wrap="none" lIns="0" tIns="0" rIns="0" bIns="0" rtlCol="0" anchor="t"/>
+          <a:lstStyle/>
+          <a:p>
+            <a:pPr algn="l" indent="0" marL="0">
+              <a:lnSpc>
+                <a:spcPts val="2871"/>
+              </a:lnSpc>
+              <a:buNone/>
+            </a:pPr>
+            <a:r>
+              <a:rPr lang="en-US" sz="1914" b="1" spc="-54" kern="0" dirty="0">
+                <a:solidFill>
+                  <a:srgbClr val="FFFFFF"/>
+                </a:solidFill>
+                <a:latin typeface="Malgun Gothic" pitchFamily="34" charset="0"/>
+                <a:ea typeface="Malgun Gothic" pitchFamily="34" charset="-122"/>
+                <a:cs typeface="Malgun Gothic" pitchFamily="34" charset="-120"/>
+              </a:rPr>
+              <a:t>경영전략본부 / 전략기획실</a:t>
+            </a:r>
+            <a:endParaRPr lang="en-US" sz="1914" dirty="0"/>
+          </a:p>
+        </p:txBody>
+      </p:sp>
+      <p:sp>
+        <p:nvSpPr>
+          <p:cNvPr id="9" name="Shape 7"/>
+          <p:cNvSpPr/>
+          <p:nvPr/>
+        </p:nvSpPr>
+        <p:spPr>
+          <a:xfrm>
+            <a:off x="4504792" y="5153284"/>
+            <a:ext cx="3182386" cy="1285555"/>
+          </a:xfrm>
+          <a:prstGeom prst="roundRect">
+            <a:avLst>
+              <a:gd name="adj" fmla="val 8891"/>
+            </a:avLst>
+          </a:prstGeom>
+          <a:solidFill>
+            <a:srgbClr val="111A2E"/>
+          </a:solidFill>
+          <a:ln w="9525">
+            <a:solidFill>
+              <a:srgbClr val="FFFFFF">
+                <a:alpha val="10000"/>
+              </a:srgbClr>
+            </a:solidFill>
+            <a:prstDash val="solid"/>
+          </a:ln>
+        </p:spPr>
+      </p:sp>
+      <p:sp>
+        <p:nvSpPr>
+          <p:cNvPr id="10" name="Text 8"/>
+          <p:cNvSpPr txBox="1"/>
+          <p:nvPr/>
+        </p:nvSpPr>
+        <p:spPr>
+          <a:xfrm>
+            <a:off x="4666640" y="5275082"/>
+            <a:ext cx="3065160" cy="290048"/>
+          </a:xfrm>
+          <a:prstGeom prst="rect">
+            <a:avLst/>
+          </a:prstGeom>
+          <a:noFill/>
+          <a:ln/>
+        </p:spPr>
+        <p:txBody>
+          <a:bodyPr wrap="none" lIns="0" tIns="0" rIns="0" bIns="0" rtlCol="0" anchor="t"/>
+          <a:lstStyle/>
+          <a:p>
+            <a:pPr algn="l" indent="0" marL="0">
+              <a:lnSpc>
+                <a:spcPts val="2284"/>
+              </a:lnSpc>
+              <a:buNone/>
+            </a:pPr>
+            <a:r>
+              <a:rPr lang="en-US" sz="1523" b="1" spc="76" kern="0" dirty="0">
+                <a:solidFill>
+                  <a:srgbClr val="F59E0B"/>
+                </a:solidFill>
+                <a:latin typeface="Malgun Gothic" pitchFamily="34" charset="0"/>
+                <a:ea typeface="Malgun Gothic" pitchFamily="34" charset="-122"/>
+                <a:cs typeface="Malgun Gothic" pitchFamily="34" charset="-120"/>
+              </a:rPr>
+              <a:t>REPORT DATE</a:t>
+            </a:r>
+            <a:endParaRPr lang="en-US" sz="1523" dirty="0"/>
+          </a:p>
+        </p:txBody>
+      </p:sp>
+      <p:sp>
+        <p:nvSpPr>
+          <p:cNvPr id="11" name="Text 9"/>
+          <p:cNvSpPr txBox="1"/>
+          <p:nvPr/>
+        </p:nvSpPr>
+        <p:spPr>
+          <a:xfrm>
+            <a:off x="4666640" y="5584698"/>
+            <a:ext cx="2858506" cy="729234"/>
+          </a:xfrm>
+          <a:prstGeom prst="rect">
+            <a:avLst/>
+          </a:prstGeom>
+          <a:noFill/>
+          <a:ln/>
+        </p:spPr>
+        <p:txBody>
+          <a:bodyPr wrap="square" lIns="0" tIns="0" rIns="0" bIns="0" rtlCol="0" anchor="t"/>
+          <a:lstStyle/>
+          <a:p>
+            <a:pPr algn="l" indent="0" marL="0">
+              <a:lnSpc>
+                <a:spcPts val="2871"/>
+              </a:lnSpc>
+              <a:buNone/>
+            </a:pPr>
+            <a:r>
+              <a:rPr lang="en-US" sz="1914" b="1" spc="-54" kern="0" dirty="0">
+                <a:solidFill>
+                  <a:srgbClr val="FFFFFF"/>
+                </a:solidFill>
+                <a:latin typeface="Malgun Gothic" pitchFamily="34" charset="0"/>
+                <a:ea typeface="Malgun Gothic" pitchFamily="34" charset="-122"/>
+                <a:cs typeface="Malgun Gothic" pitchFamily="34" charset="-120"/>
+              </a:rPr>
+              <a:t>2026.08 • Q3 Executive Review</a:t>
+            </a:r>
+            <a:endParaRPr lang="en-US" sz="1914" dirty="0"/>
+          </a:p>
+        </p:txBody>
+      </p:sp>
+      <p:sp>
+        <p:nvSpPr>
+          <p:cNvPr id="12" name="Shape 10"/>
+          <p:cNvSpPr/>
+          <p:nvPr/>
+        </p:nvSpPr>
+        <p:spPr>
+          <a:xfrm>
+            <a:off x="7820497" y="5153284"/>
+            <a:ext cx="3819083" cy="1285555"/>
+          </a:xfrm>
+          <a:prstGeom prst="roundRect">
+            <a:avLst>
+              <a:gd name="adj" fmla="val 8891"/>
+            </a:avLst>
+          </a:prstGeom>
+          <a:solidFill>
+            <a:srgbClr val="111A2E"/>
+          </a:solidFill>
+          <a:ln w="9525">
+            <a:solidFill>
+              <a:srgbClr val="F59E0B">
+                <a:alpha val="35000"/>
+              </a:srgbClr>
+            </a:solidFill>
+            <a:prstDash val="solid"/>
+          </a:ln>
+        </p:spPr>
+      </p:sp>
+      <p:sp>
+        <p:nvSpPr>
+          <p:cNvPr id="13" name="Text 11"/>
+          <p:cNvSpPr txBox="1"/>
+          <p:nvPr/>
+        </p:nvSpPr>
+        <p:spPr>
+          <a:xfrm>
+            <a:off x="7982438" y="5457139"/>
+            <a:ext cx="3752698" cy="290048"/>
+          </a:xfrm>
+          <a:prstGeom prst="rect">
+            <a:avLst/>
+          </a:prstGeom>
+          <a:noFill/>
+          <a:ln/>
+        </p:spPr>
+        <p:txBody>
+          <a:bodyPr wrap="none" lIns="0" tIns="0" rIns="0" bIns="0" rtlCol="0" anchor="t"/>
+          <a:lstStyle/>
+          <a:p>
+            <a:pPr algn="l" indent="0" marL="0">
+              <a:lnSpc>
+                <a:spcPts val="2284"/>
+              </a:lnSpc>
+              <a:buNone/>
+            </a:pPr>
+            <a:r>
+              <a:rPr lang="en-US" sz="1523" b="1" spc="76" kern="0" dirty="0">
+                <a:solidFill>
+                  <a:srgbClr val="F59E0B"/>
+                </a:solidFill>
+                <a:latin typeface="Malgun Gothic" pitchFamily="34" charset="0"/>
+                <a:ea typeface="Malgun Gothic" pitchFamily="34" charset="-122"/>
+                <a:cs typeface="Malgun Gothic" pitchFamily="34" charset="-120"/>
+              </a:rPr>
+              <a:t>CONFIDENTIALITY</a:t>
+            </a:r>
+            <a:endParaRPr lang="en-US" sz="1523" dirty="0"/>
+          </a:p>
+        </p:txBody>
+      </p:sp>
+      <p:sp>
+        <p:nvSpPr>
+          <p:cNvPr id="14" name="Text 12"/>
+          <p:cNvSpPr txBox="1"/>
+          <p:nvPr/>
+        </p:nvSpPr>
+        <p:spPr>
+          <a:xfrm>
+            <a:off x="7982438" y="5766938"/>
+            <a:ext cx="3752698" cy="364663"/>
+          </a:xfrm>
+          <a:prstGeom prst="rect">
+            <a:avLst/>
+          </a:prstGeom>
+          <a:noFill/>
+          <a:ln/>
+        </p:spPr>
+        <p:txBody>
+          <a:bodyPr wrap="none" lIns="0" tIns="0" rIns="0" bIns="0" rtlCol="0" anchor="t"/>
+          <a:lstStyle/>
+          <a:p>
+            <a:pPr algn="l" indent="0" marL="0">
+              <a:lnSpc>
+                <a:spcPts val="2871"/>
+              </a:lnSpc>
+              <a:buNone/>
+            </a:pPr>
+            <a:r>
+              <a:rPr lang="en-US" sz="1914" b="1" spc="-54" kern="0" dirty="0">
+                <a:solidFill>
+                  <a:srgbClr val="F59E0B"/>
+                </a:solidFill>
+                <a:latin typeface="Malgun Gothic" pitchFamily="34" charset="0"/>
+                <a:ea typeface="Malgun Gothic" pitchFamily="34" charset="-122"/>
+                <a:cs typeface="Malgun Gothic" pitchFamily="34" charset="-120"/>
+              </a:rPr>
+              <a:t>대외비 (Confidential)</a:t>
+            </a:r>
+            <a:endParaRPr lang="en-US" sz="1914" dirty="0"/>
+          </a:p>
+        </p:txBody>
+      </p:sp>
     </p:spTree>
   </p:cSld>
   <p:clrMapOvr>
@@ -1346,16 +1875,9 @@
   <p:cSld name="Slide 2">
     <p:bg>
       <p:bgPr>
-        <a:blipFill dpi="0" rotWithShape="1">
-          <a:blip r:embed="rId1">
-            <a:lum/>
-          </a:blip>
-          <a:srcRect/>
-          <a:stretch>
-            <a:fillRect/>
-          </a:stretch>
-        </a:blipFill>
-        <a:effectLst/>
+        <a:solidFill>
+          <a:srgbClr val="38BDF8"/>
+        </a:solidFill>
       </p:bgPr>
     </p:bg>
     <p:spTree>
@@ -1372,6 +1894,1219 @@
           <a:chExt cx="0" cy="0"/>
         </a:xfrm>
       </p:grpSpPr>
+      <p:sp>
+        <p:nvSpPr>
+          <p:cNvPr id="2" name="Shape 0"/>
+          <p:cNvSpPr/>
+          <p:nvPr/>
+        </p:nvSpPr>
+        <p:spPr>
+          <a:xfrm>
+            <a:off x="552480" y="1638330"/>
+            <a:ext cx="2428555" cy="418521"/>
+          </a:xfrm>
+          <a:prstGeom prst="roundRect">
+            <a:avLst>
+              <a:gd name="adj" fmla="val 50011"/>
+            </a:avLst>
+          </a:prstGeom>
+          <a:solidFill>
+            <a:srgbClr val="F59E0B">
+              <a:alpha val="15000"/>
+            </a:srgbClr>
+          </a:solidFill>
+          <a:ln w="9525">
+            <a:solidFill>
+              <a:srgbClr val="F59E0B">
+                <a:alpha val="35000"/>
+              </a:srgbClr>
+            </a:solidFill>
+            <a:prstDash val="solid"/>
+          </a:ln>
+        </p:spPr>
+      </p:sp>
+      <p:sp>
+        <p:nvSpPr>
+          <p:cNvPr id="3" name="Text 1"/>
+          <p:cNvSpPr txBox="1"/>
+          <p:nvPr/>
+        </p:nvSpPr>
+        <p:spPr>
+          <a:xfrm>
+            <a:off x="676290" y="1681490"/>
+            <a:ext cx="2333274" cy="323149"/>
+          </a:xfrm>
+          <a:prstGeom prst="rect">
+            <a:avLst/>
+          </a:prstGeom>
+          <a:noFill/>
+          <a:ln/>
+        </p:spPr>
+        <p:txBody>
+          <a:bodyPr wrap="none" lIns="0" tIns="0" rIns="0" bIns="0" rtlCol="0" anchor="t"/>
+          <a:lstStyle/>
+          <a:p>
+            <a:pPr algn="l" indent="0" marL="0">
+              <a:lnSpc>
+                <a:spcPts val="2545"/>
+              </a:lnSpc>
+              <a:buNone/>
+            </a:pPr>
+            <a:r>
+              <a:rPr lang="en-US" sz="1697" b="1" spc="34" kern="0" dirty="0">
+                <a:solidFill>
+                  <a:srgbClr val="F59E0B"/>
+                </a:solidFill>
+                <a:latin typeface="Malgun Gothic" pitchFamily="34" charset="0"/>
+                <a:ea typeface="Malgun Gothic" pitchFamily="34" charset="-122"/>
+                <a:cs typeface="Malgun Gothic" pitchFamily="34" charset="-120"/>
+              </a:rPr>
+              <a:t>STRATEGY AGENDA</a:t>
+            </a:r>
+            <a:endParaRPr lang="en-US" sz="1697" dirty="0"/>
+          </a:p>
+        </p:txBody>
+      </p:sp>
+      <p:sp>
+        <p:nvSpPr>
+          <p:cNvPr id="4" name="Text 2"/>
+          <p:cNvSpPr txBox="1"/>
+          <p:nvPr/>
+        </p:nvSpPr>
+        <p:spPr>
+          <a:xfrm>
+            <a:off x="533370" y="2188982"/>
+            <a:ext cx="2693640" cy="621518"/>
+          </a:xfrm>
+          <a:prstGeom prst="rect">
+            <a:avLst/>
+          </a:prstGeom>
+          <a:noFill/>
+          <a:ln/>
+        </p:spPr>
+        <p:txBody>
+          <a:bodyPr wrap="none" lIns="0" tIns="0" rIns="0" bIns="0" rtlCol="0" anchor="t"/>
+          <a:lstStyle/>
+          <a:p>
+            <a:pPr algn="l" indent="0" marL="0">
+              <a:lnSpc>
+                <a:spcPts val="4894"/>
+              </a:lnSpc>
+              <a:buNone/>
+            </a:pPr>
+            <a:r>
+              <a:rPr lang="en-US" sz="3263" b="1" spc="261" kern="0" dirty="0">
+                <a:solidFill>
+                  <a:srgbClr val="FFFFFF"/>
+                </a:solidFill>
+                <a:latin typeface="Malgun Gothic" pitchFamily="34" charset="0"/>
+                <a:ea typeface="Malgun Gothic" pitchFamily="34" charset="-122"/>
+                <a:cs typeface="Malgun Gothic" pitchFamily="34" charset="-120"/>
+              </a:rPr>
+              <a:t>ROADMAP</a:t>
+            </a:r>
+            <a:endParaRPr lang="en-US" sz="3263" dirty="0"/>
+          </a:p>
+        </p:txBody>
+      </p:sp>
+      <p:sp>
+        <p:nvSpPr>
+          <p:cNvPr id="5" name="Text 3"/>
+          <p:cNvSpPr txBox="1"/>
+          <p:nvPr/>
+        </p:nvSpPr>
+        <p:spPr>
+          <a:xfrm>
+            <a:off x="533370" y="2882463"/>
+            <a:ext cx="2514600" cy="402336"/>
+          </a:xfrm>
+          <a:prstGeom prst="rect">
+            <a:avLst/>
+          </a:prstGeom>
+          <a:noFill/>
+          <a:ln/>
+        </p:spPr>
+        <p:txBody>
+          <a:bodyPr wrap="square" lIns="0" tIns="0" rIns="0" bIns="0" rtlCol="0" anchor="t"/>
+          <a:lstStyle/>
+          <a:p>
+            <a:pPr algn="l" indent="0" marL="0">
+              <a:lnSpc>
+                <a:spcPts val="1584"/>
+              </a:lnSpc>
+              <a:buNone/>
+            </a:pPr>
+            <a:r>
+              <a:rPr lang="en-US" sz="1056" spc="-54" kern="0" dirty="0">
+                <a:solidFill>
+                  <a:srgbClr val="94A3B8"/>
+                </a:solidFill>
+                <a:latin typeface="Malgun Gothic" pitchFamily="34" charset="0"/>
+                <a:ea typeface="Malgun Gothic" pitchFamily="34" charset="-122"/>
+                <a:cs typeface="Malgun Gothic" pitchFamily="34" charset="-120"/>
+              </a:rPr>
+              <a:t>시장 진입부터</a:t>
+            </a:r>
+            <a:endParaRPr lang="en-US" sz="1056" dirty="0"/>
+          </a:p>
+          <a:p>
+            <a:pPr algn="l" indent="0" marL="0">
+              <a:lnSpc>
+                <a:spcPts val="1584"/>
+              </a:lnSpc>
+              <a:buNone/>
+            </a:pPr>
+            <a:r>
+              <a:rPr lang="en-US" sz="1056" spc="-54" kern="0" dirty="0">
+                <a:solidFill>
+                  <a:srgbClr val="94A3B8"/>
+                </a:solidFill>
+                <a:latin typeface="Malgun Gothic" pitchFamily="34" charset="0"/>
+                <a:ea typeface="Malgun Gothic" pitchFamily="34" charset="-122"/>
+                <a:cs typeface="Malgun Gothic" pitchFamily="34" charset="-120"/>
+              </a:rPr>
+              <a:t>수익성 가속화까지 4단계</a:t>
+            </a:r>
+            <a:endParaRPr lang="en-US" sz="1056" dirty="0"/>
+          </a:p>
+        </p:txBody>
+      </p:sp>
+      <p:sp>
+        <p:nvSpPr>
+          <p:cNvPr id="6" name="Shape 4"/>
+          <p:cNvSpPr/>
+          <p:nvPr/>
+        </p:nvSpPr>
+        <p:spPr>
+          <a:xfrm>
+            <a:off x="552480" y="4686300"/>
+            <a:ext cx="95280" cy="95280"/>
+          </a:xfrm>
+          <a:prstGeom prst="roundRect">
+            <a:avLst>
+              <a:gd name="adj" fmla="val 50000"/>
+            </a:avLst>
+          </a:prstGeom>
+          <a:solidFill>
+            <a:srgbClr val="F59E0B"/>
+          </a:solidFill>
+          <a:ln/>
+        </p:spPr>
+      </p:sp>
+      <p:sp>
+        <p:nvSpPr>
+          <p:cNvPr id="7" name="Shape 5"/>
+          <p:cNvSpPr/>
+          <p:nvPr/>
+        </p:nvSpPr>
+        <p:spPr>
+          <a:xfrm>
+            <a:off x="761970" y="4724430"/>
+            <a:ext cx="571500" cy="19020"/>
+          </a:xfrm>
+          <a:prstGeom prst="rect">
+            <a:avLst/>
+          </a:prstGeom>
+          <a:solidFill>
+            <a:srgbClr val="F59E0B">
+              <a:alpha val="50000"/>
+            </a:srgbClr>
+          </a:solidFill>
+          <a:ln/>
+        </p:spPr>
+      </p:sp>
+      <p:sp>
+        <p:nvSpPr>
+          <p:cNvPr id="8" name="Shape 6"/>
+          <p:cNvSpPr/>
+          <p:nvPr/>
+        </p:nvSpPr>
+        <p:spPr>
+          <a:xfrm>
+            <a:off x="552480" y="4914900"/>
+            <a:ext cx="95280" cy="95280"/>
+          </a:xfrm>
+          <a:prstGeom prst="roundRect">
+            <a:avLst>
+              <a:gd name="adj" fmla="val 50000"/>
+            </a:avLst>
+          </a:prstGeom>
+          <a:solidFill>
+            <a:srgbClr val="38BDF8"/>
+          </a:solidFill>
+          <a:ln/>
+        </p:spPr>
+      </p:sp>
+      <p:sp>
+        <p:nvSpPr>
+          <p:cNvPr id="9" name="Shape 7"/>
+          <p:cNvSpPr/>
+          <p:nvPr/>
+        </p:nvSpPr>
+        <p:spPr>
+          <a:xfrm>
+            <a:off x="761970" y="4953030"/>
+            <a:ext cx="952530" cy="19020"/>
+          </a:xfrm>
+          <a:prstGeom prst="rect">
+            <a:avLst/>
+          </a:prstGeom>
+          <a:solidFill>
+            <a:srgbClr val="38BDF8">
+              <a:alpha val="60000"/>
+            </a:srgbClr>
+          </a:solidFill>
+          <a:ln/>
+        </p:spPr>
+      </p:sp>
+      <p:sp>
+        <p:nvSpPr>
+          <p:cNvPr id="10" name="Shape 8"/>
+          <p:cNvSpPr/>
+          <p:nvPr/>
+        </p:nvSpPr>
+        <p:spPr>
+          <a:xfrm>
+            <a:off x="552480" y="5143500"/>
+            <a:ext cx="95280" cy="95280"/>
+          </a:xfrm>
+          <a:prstGeom prst="roundRect">
+            <a:avLst>
+              <a:gd name="adj" fmla="val 50000"/>
+            </a:avLst>
+          </a:prstGeom>
+          <a:solidFill>
+            <a:srgbClr val="F59E0B"/>
+          </a:solidFill>
+          <a:ln/>
+        </p:spPr>
+      </p:sp>
+      <p:sp>
+        <p:nvSpPr>
+          <p:cNvPr id="11" name="Shape 9"/>
+          <p:cNvSpPr/>
+          <p:nvPr/>
+        </p:nvSpPr>
+        <p:spPr>
+          <a:xfrm>
+            <a:off x="761970" y="5181630"/>
+            <a:ext cx="428671" cy="19020"/>
+          </a:xfrm>
+          <a:prstGeom prst="rect">
+            <a:avLst/>
+          </a:prstGeom>
+          <a:solidFill>
+            <a:srgbClr val="F59E0B">
+              <a:alpha val="50000"/>
+            </a:srgbClr>
+          </a:solidFill>
+          <a:ln/>
+        </p:spPr>
+      </p:sp>
+      <p:sp>
+        <p:nvSpPr>
+          <p:cNvPr id="12" name="Shape 10"/>
+          <p:cNvSpPr/>
+          <p:nvPr/>
+        </p:nvSpPr>
+        <p:spPr>
+          <a:xfrm>
+            <a:off x="3486150" y="764347"/>
+            <a:ext cx="4000500" cy="2795595"/>
+          </a:xfrm>
+          <a:prstGeom prst="roundRect">
+            <a:avLst>
+              <a:gd name="adj" fmla="val 4769"/>
+            </a:avLst>
+          </a:prstGeom>
+          <a:solidFill>
+            <a:srgbClr val="111A2E"/>
+          </a:solidFill>
+          <a:ln w="9525">
+            <a:solidFill>
+              <a:srgbClr val="FFFFFF">
+                <a:alpha val="10000"/>
+              </a:srgbClr>
+            </a:solidFill>
+            <a:prstDash val="solid"/>
+          </a:ln>
+        </p:spPr>
+      </p:sp>
+      <p:sp>
+        <p:nvSpPr>
+          <p:cNvPr id="13" name="Shape 11"/>
+          <p:cNvSpPr/>
+          <p:nvPr/>
+        </p:nvSpPr>
+        <p:spPr>
+          <a:xfrm>
+            <a:off x="3705240" y="964418"/>
+            <a:ext cx="247620" cy="247620"/>
+          </a:xfrm>
+          <a:prstGeom prst="roundRect">
+            <a:avLst>
+              <a:gd name="adj" fmla="val 50000"/>
+            </a:avLst>
+          </a:prstGeom>
+          <a:solidFill>
+            <a:srgbClr val="F59E0B">
+              <a:alpha val="15000"/>
+            </a:srgbClr>
+          </a:solidFill>
+          <a:ln w="9525">
+            <a:solidFill>
+              <a:srgbClr val="F59E0B">
+                <a:alpha val="40000"/>
+              </a:srgbClr>
+            </a:solidFill>
+            <a:prstDash val="solid"/>
+          </a:ln>
+        </p:spPr>
+      </p:sp>
+      <p:sp>
+        <p:nvSpPr>
+          <p:cNvPr id="14" name="Text 12"/>
+          <p:cNvSpPr txBox="1"/>
+          <p:nvPr/>
+        </p:nvSpPr>
+        <p:spPr>
+          <a:xfrm>
+            <a:off x="3695730" y="929945"/>
+            <a:ext cx="304770" cy="310805"/>
+          </a:xfrm>
+          <a:prstGeom prst="rect">
+            <a:avLst/>
+          </a:prstGeom>
+          <a:noFill/>
+          <a:ln/>
+        </p:spPr>
+        <p:txBody>
+          <a:bodyPr wrap="none" lIns="0" tIns="0" rIns="0" bIns="0" rtlCol="0" anchor="t"/>
+          <a:lstStyle/>
+          <a:p>
+            <a:pPr algn="l" indent="0" marL="0">
+              <a:lnSpc>
+                <a:spcPts val="2447"/>
+              </a:lnSpc>
+              <a:buNone/>
+            </a:pPr>
+            <a:r>
+              <a:rPr lang="en-US" sz="1631" b="1" spc="-54" kern="0" dirty="0">
+                <a:solidFill>
+                  <a:srgbClr val="F59E0B"/>
+                </a:solidFill>
+                <a:latin typeface="Malgun Gothic" pitchFamily="34" charset="0"/>
+                <a:ea typeface="Malgun Gothic" pitchFamily="34" charset="-122"/>
+                <a:cs typeface="Malgun Gothic" pitchFamily="34" charset="-120"/>
+              </a:rPr>
+              <a:t>01</a:t>
+            </a:r>
+            <a:endParaRPr lang="en-US" sz="1631" dirty="0"/>
+          </a:p>
+        </p:txBody>
+      </p:sp>
+      <p:sp>
+        <p:nvSpPr>
+          <p:cNvPr id="15" name="Text 13"/>
+          <p:cNvSpPr txBox="1"/>
+          <p:nvPr/>
+        </p:nvSpPr>
+        <p:spPr>
+          <a:xfrm>
+            <a:off x="3686221" y="1285921"/>
+            <a:ext cx="3866358" cy="414315"/>
+          </a:xfrm>
+          <a:prstGeom prst="rect">
+            <a:avLst/>
+          </a:prstGeom>
+          <a:noFill/>
+          <a:ln/>
+        </p:spPr>
+        <p:txBody>
+          <a:bodyPr wrap="none" lIns="0" tIns="0" rIns="0" bIns="0" rtlCol="0" anchor="t"/>
+          <a:lstStyle/>
+          <a:p>
+            <a:pPr algn="l" indent="0" marL="0">
+              <a:lnSpc>
+                <a:spcPts val="3263"/>
+              </a:lnSpc>
+              <a:buNone/>
+            </a:pPr>
+            <a:r>
+              <a:rPr lang="en-US" sz="2175" spc="-54" kern="0" dirty="0">
+                <a:solidFill>
+                  <a:srgbClr val="FFFFFF"/>
+                </a:solidFill>
+                <a:latin typeface="Malgun Gothic" pitchFamily="34" charset="0"/>
+                <a:ea typeface="Malgun Gothic" pitchFamily="34" charset="-122"/>
+                <a:cs typeface="Malgun Gothic" pitchFamily="34" charset="-120"/>
+              </a:rPr>
+              <a:t>시장 기회 및 목표 KPI</a:t>
+            </a:r>
+            <a:endParaRPr lang="en-US" sz="2175" dirty="0"/>
+          </a:p>
+        </p:txBody>
+      </p:sp>
+      <p:sp>
+        <p:nvSpPr>
+          <p:cNvPr id="16" name="Text 14"/>
+          <p:cNvSpPr txBox="1"/>
+          <p:nvPr/>
+        </p:nvSpPr>
+        <p:spPr>
+          <a:xfrm>
+            <a:off x="3686221" y="1700235"/>
+            <a:ext cx="3600450" cy="1657350"/>
+          </a:xfrm>
+          <a:prstGeom prst="rect">
+            <a:avLst/>
+          </a:prstGeom>
+          <a:noFill/>
+          <a:ln/>
+        </p:spPr>
+        <p:txBody>
+          <a:bodyPr wrap="square" lIns="0" tIns="0" rIns="0" bIns="0" rtlCol="0" anchor="t"/>
+          <a:lstStyle/>
+          <a:p>
+            <a:pPr algn="l" indent="0" marL="0">
+              <a:lnSpc>
+                <a:spcPts val="3263"/>
+              </a:lnSpc>
+              <a:buNone/>
+            </a:pPr>
+            <a:r>
+              <a:rPr lang="en-US" sz="2175" spc="-54" kern="0" dirty="0">
+                <a:solidFill>
+                  <a:srgbClr val="FFFFFF"/>
+                </a:solidFill>
+                <a:latin typeface="Malgun Gothic" pitchFamily="34" charset="0"/>
+                <a:ea typeface="Malgun Gothic" pitchFamily="34" charset="-122"/>
+                <a:cs typeface="Malgun Gothic" pitchFamily="34" charset="-120"/>
+              </a:rPr>
+              <a:t>• 글로벌 AI 솔루션 시장 동향</a:t>
+            </a:r>
+            <a:endParaRPr lang="en-US" sz="2175" dirty="0"/>
+          </a:p>
+          <a:p>
+            <a:pPr algn="l" indent="0" marL="0">
+              <a:lnSpc>
+                <a:spcPts val="3263"/>
+              </a:lnSpc>
+              <a:buNone/>
+            </a:pPr>
+            <a:r>
+              <a:rPr lang="en-US" sz="2175" spc="-54" kern="0" dirty="0">
+                <a:solidFill>
+                  <a:srgbClr val="FFFFFF"/>
+                </a:solidFill>
+                <a:latin typeface="Malgun Gothic" pitchFamily="34" charset="0"/>
+                <a:ea typeface="Malgun Gothic" pitchFamily="34" charset="-122"/>
+                <a:cs typeface="Malgun Gothic" pitchFamily="34" charset="-120"/>
+              </a:rPr>
+              <a:t>• 2026 연간 반복 매출(ARR) 목표</a:t>
+            </a:r>
+            <a:endParaRPr lang="en-US" sz="2175" dirty="0"/>
+          </a:p>
+          <a:p>
+            <a:pPr algn="l" indent="0" marL="0">
+              <a:lnSpc>
+                <a:spcPts val="3263"/>
+              </a:lnSpc>
+              <a:buNone/>
+            </a:pPr>
+            <a:r>
+              <a:rPr lang="en-US" sz="2175" spc="-54" kern="0" dirty="0">
+                <a:solidFill>
+                  <a:srgbClr val="FFFFFF"/>
+                </a:solidFill>
+                <a:latin typeface="Malgun Gothic" pitchFamily="34" charset="0"/>
+                <a:ea typeface="Malgun Gothic" pitchFamily="34" charset="-122"/>
+                <a:cs typeface="Malgun Gothic" pitchFamily="34" charset="-120"/>
+              </a:rPr>
+              <a:t>• 고객 유지율(NRR) 극대화 모델</a:t>
+            </a:r>
+            <a:endParaRPr lang="en-US" sz="2175" dirty="0"/>
+          </a:p>
+        </p:txBody>
+      </p:sp>
+      <p:sp>
+        <p:nvSpPr>
+          <p:cNvPr id="17" name="Shape 15"/>
+          <p:cNvSpPr/>
+          <p:nvPr/>
+        </p:nvSpPr>
+        <p:spPr>
+          <a:xfrm>
+            <a:off x="7639080" y="764347"/>
+            <a:ext cx="4000500" cy="2795595"/>
+          </a:xfrm>
+          <a:prstGeom prst="roundRect">
+            <a:avLst>
+              <a:gd name="adj" fmla="val 4769"/>
+            </a:avLst>
+          </a:prstGeom>
+          <a:solidFill>
+            <a:srgbClr val="111A2E"/>
+          </a:solidFill>
+          <a:ln w="9525">
+            <a:solidFill>
+              <a:srgbClr val="FFFFFF">
+                <a:alpha val="10000"/>
+              </a:srgbClr>
+            </a:solidFill>
+            <a:prstDash val="solid"/>
+          </a:ln>
+        </p:spPr>
+      </p:sp>
+      <p:sp>
+        <p:nvSpPr>
+          <p:cNvPr id="18" name="Shape 16"/>
+          <p:cNvSpPr/>
+          <p:nvPr/>
+        </p:nvSpPr>
+        <p:spPr>
+          <a:xfrm>
+            <a:off x="7858171" y="964418"/>
+            <a:ext cx="247620" cy="247620"/>
+          </a:xfrm>
+          <a:prstGeom prst="roundRect">
+            <a:avLst>
+              <a:gd name="adj" fmla="val 50000"/>
+            </a:avLst>
+          </a:prstGeom>
+          <a:solidFill>
+            <a:srgbClr val="38BDF8">
+              <a:alpha val="15000"/>
+            </a:srgbClr>
+          </a:solidFill>
+          <a:ln w="9525">
+            <a:solidFill>
+              <a:srgbClr val="38BDF8">
+                <a:alpha val="40000"/>
+              </a:srgbClr>
+            </a:solidFill>
+            <a:prstDash val="solid"/>
+          </a:ln>
+        </p:spPr>
+      </p:sp>
+      <p:sp>
+        <p:nvSpPr>
+          <p:cNvPr id="19" name="Text 17"/>
+          <p:cNvSpPr txBox="1"/>
+          <p:nvPr/>
+        </p:nvSpPr>
+        <p:spPr>
+          <a:xfrm>
+            <a:off x="7848570" y="929945"/>
+            <a:ext cx="304770" cy="310805"/>
+          </a:xfrm>
+          <a:prstGeom prst="rect">
+            <a:avLst/>
+          </a:prstGeom>
+          <a:noFill/>
+          <a:ln/>
+        </p:spPr>
+        <p:txBody>
+          <a:bodyPr wrap="none" lIns="0" tIns="0" rIns="0" bIns="0" rtlCol="0" anchor="t"/>
+          <a:lstStyle/>
+          <a:p>
+            <a:pPr algn="l" indent="0" marL="0">
+              <a:lnSpc>
+                <a:spcPts val="2447"/>
+              </a:lnSpc>
+              <a:buNone/>
+            </a:pPr>
+            <a:r>
+              <a:rPr lang="en-US" sz="1631" b="1" spc="-54" kern="0" dirty="0">
+                <a:solidFill>
+                  <a:srgbClr val="38BDF8"/>
+                </a:solidFill>
+                <a:latin typeface="Malgun Gothic" pitchFamily="34" charset="0"/>
+                <a:ea typeface="Malgun Gothic" pitchFamily="34" charset="-122"/>
+                <a:cs typeface="Malgun Gothic" pitchFamily="34" charset="-120"/>
+              </a:rPr>
+              <a:t>02</a:t>
+            </a:r>
+            <a:endParaRPr lang="en-US" sz="1631" dirty="0"/>
+          </a:p>
+        </p:txBody>
+      </p:sp>
+      <p:sp>
+        <p:nvSpPr>
+          <p:cNvPr id="20" name="Text 18"/>
+          <p:cNvSpPr txBox="1"/>
+          <p:nvPr/>
+        </p:nvSpPr>
+        <p:spPr>
+          <a:xfrm>
+            <a:off x="7839060" y="1285921"/>
+            <a:ext cx="3866358" cy="414315"/>
+          </a:xfrm>
+          <a:prstGeom prst="rect">
+            <a:avLst/>
+          </a:prstGeom>
+          <a:noFill/>
+          <a:ln/>
+        </p:spPr>
+        <p:txBody>
+          <a:bodyPr wrap="none" lIns="0" tIns="0" rIns="0" bIns="0" rtlCol="0" anchor="t"/>
+          <a:lstStyle/>
+          <a:p>
+            <a:pPr algn="l" indent="0" marL="0">
+              <a:lnSpc>
+                <a:spcPts val="3263"/>
+              </a:lnSpc>
+              <a:buNone/>
+            </a:pPr>
+            <a:r>
+              <a:rPr lang="en-US" sz="2175" spc="-54" kern="0" dirty="0">
+                <a:solidFill>
+                  <a:srgbClr val="FFFFFF"/>
+                </a:solidFill>
+                <a:latin typeface="Malgun Gothic" pitchFamily="34" charset="0"/>
+                <a:ea typeface="Malgun Gothic" pitchFamily="34" charset="-122"/>
+                <a:cs typeface="Malgun Gothic" pitchFamily="34" charset="-120"/>
+              </a:rPr>
+              <a:t>GTM 및 파트너십 전략</a:t>
+            </a:r>
+            <a:endParaRPr lang="en-US" sz="2175" dirty="0"/>
+          </a:p>
+        </p:txBody>
+      </p:sp>
+      <p:sp>
+        <p:nvSpPr>
+          <p:cNvPr id="21" name="Text 19"/>
+          <p:cNvSpPr txBox="1"/>
+          <p:nvPr/>
+        </p:nvSpPr>
+        <p:spPr>
+          <a:xfrm>
+            <a:off x="7839060" y="1700235"/>
+            <a:ext cx="3600450" cy="1657350"/>
+          </a:xfrm>
+          <a:prstGeom prst="rect">
+            <a:avLst/>
+          </a:prstGeom>
+          <a:noFill/>
+          <a:ln/>
+        </p:spPr>
+        <p:txBody>
+          <a:bodyPr wrap="square" lIns="0" tIns="0" rIns="0" bIns="0" rtlCol="0" anchor="t"/>
+          <a:lstStyle/>
+          <a:p>
+            <a:pPr algn="l" indent="0" marL="0">
+              <a:lnSpc>
+                <a:spcPts val="3263"/>
+              </a:lnSpc>
+              <a:buNone/>
+            </a:pPr>
+            <a:r>
+              <a:rPr lang="en-US" sz="2175" spc="-54" kern="0" dirty="0">
+                <a:solidFill>
+                  <a:srgbClr val="FFFFFF"/>
+                </a:solidFill>
+                <a:latin typeface="Malgun Gothic" pitchFamily="34" charset="0"/>
+                <a:ea typeface="Malgun Gothic" pitchFamily="34" charset="-122"/>
+                <a:cs typeface="Malgun Gothic" pitchFamily="34" charset="-120"/>
+              </a:rPr>
+              <a:t>• 북미/일본 거점 엔터프라이즈 침투</a:t>
+            </a:r>
+            <a:endParaRPr lang="en-US" sz="2175" dirty="0"/>
+          </a:p>
+          <a:p>
+            <a:pPr algn="l" indent="0" marL="0">
+              <a:lnSpc>
+                <a:spcPts val="3263"/>
+              </a:lnSpc>
+              <a:buNone/>
+            </a:pPr>
+            <a:r>
+              <a:rPr lang="en-US" sz="2175" spc="-54" kern="0" dirty="0">
+                <a:solidFill>
+                  <a:srgbClr val="FFFFFF"/>
+                </a:solidFill>
+                <a:latin typeface="Malgun Gothic" pitchFamily="34" charset="0"/>
+                <a:ea typeface="Malgun Gothic" pitchFamily="34" charset="-122"/>
+                <a:cs typeface="Malgun Gothic" pitchFamily="34" charset="-120"/>
+              </a:rPr>
+              <a:t>• 탑티어 클라우드 MSP 협력 체계</a:t>
+            </a:r>
+            <a:endParaRPr lang="en-US" sz="2175" dirty="0"/>
+          </a:p>
+          <a:p>
+            <a:pPr algn="l" indent="0" marL="0">
+              <a:lnSpc>
+                <a:spcPts val="3263"/>
+              </a:lnSpc>
+              <a:buNone/>
+            </a:pPr>
+            <a:r>
+              <a:rPr lang="en-US" sz="2175" spc="-54" kern="0" dirty="0">
+                <a:solidFill>
+                  <a:srgbClr val="FFFFFF"/>
+                </a:solidFill>
+                <a:latin typeface="Malgun Gothic" pitchFamily="34" charset="0"/>
+                <a:ea typeface="Malgun Gothic" pitchFamily="34" charset="-122"/>
+                <a:cs typeface="Malgun Gothic" pitchFamily="34" charset="-120"/>
+              </a:rPr>
+              <a:t>• PoC 전환율 65% 달성 방안</a:t>
+            </a:r>
+            <a:endParaRPr lang="en-US" sz="2175" dirty="0"/>
+          </a:p>
+        </p:txBody>
+      </p:sp>
+      <p:sp>
+        <p:nvSpPr>
+          <p:cNvPr id="22" name="Shape 20"/>
+          <p:cNvSpPr/>
+          <p:nvPr/>
+        </p:nvSpPr>
+        <p:spPr>
+          <a:xfrm>
+            <a:off x="3486150" y="3712373"/>
+            <a:ext cx="4000500" cy="2381280"/>
+          </a:xfrm>
+          <a:prstGeom prst="roundRect">
+            <a:avLst>
+              <a:gd name="adj" fmla="val 5599"/>
+            </a:avLst>
+          </a:prstGeom>
+          <a:solidFill>
+            <a:srgbClr val="111A2E"/>
+          </a:solidFill>
+          <a:ln w="9525">
+            <a:solidFill>
+              <a:srgbClr val="FFFFFF">
+                <a:alpha val="10000"/>
+              </a:srgbClr>
+            </a:solidFill>
+            <a:prstDash val="solid"/>
+          </a:ln>
+        </p:spPr>
+      </p:sp>
+      <p:sp>
+        <p:nvSpPr>
+          <p:cNvPr id="23" name="Shape 21"/>
+          <p:cNvSpPr/>
+          <p:nvPr/>
+        </p:nvSpPr>
+        <p:spPr>
+          <a:xfrm>
+            <a:off x="3705240" y="3912352"/>
+            <a:ext cx="247620" cy="247620"/>
+          </a:xfrm>
+          <a:prstGeom prst="roundRect">
+            <a:avLst>
+              <a:gd name="adj" fmla="val 50000"/>
+            </a:avLst>
+          </a:prstGeom>
+          <a:solidFill>
+            <a:srgbClr val="10B981">
+              <a:alpha val="15000"/>
+            </a:srgbClr>
+          </a:solidFill>
+          <a:ln w="9525">
+            <a:solidFill>
+              <a:srgbClr val="10B981">
+                <a:alpha val="40000"/>
+              </a:srgbClr>
+            </a:solidFill>
+            <a:prstDash val="solid"/>
+          </a:ln>
+        </p:spPr>
+      </p:sp>
+      <p:sp>
+        <p:nvSpPr>
+          <p:cNvPr id="24" name="Text 22"/>
+          <p:cNvSpPr txBox="1"/>
+          <p:nvPr/>
+        </p:nvSpPr>
+        <p:spPr>
+          <a:xfrm>
+            <a:off x="3695730" y="3877879"/>
+            <a:ext cx="304770" cy="310805"/>
+          </a:xfrm>
+          <a:prstGeom prst="rect">
+            <a:avLst/>
+          </a:prstGeom>
+          <a:noFill/>
+          <a:ln/>
+        </p:spPr>
+        <p:txBody>
+          <a:bodyPr wrap="none" lIns="0" tIns="0" rIns="0" bIns="0" rtlCol="0" anchor="t"/>
+          <a:lstStyle/>
+          <a:p>
+            <a:pPr algn="l" indent="0" marL="0">
+              <a:lnSpc>
+                <a:spcPts val="2447"/>
+              </a:lnSpc>
+              <a:buNone/>
+            </a:pPr>
+            <a:r>
+              <a:rPr lang="en-US" sz="1631" b="1" spc="-54" kern="0" dirty="0">
+                <a:solidFill>
+                  <a:srgbClr val="10B981"/>
+                </a:solidFill>
+                <a:latin typeface="Malgun Gothic" pitchFamily="34" charset="0"/>
+                <a:ea typeface="Malgun Gothic" pitchFamily="34" charset="-122"/>
+                <a:cs typeface="Malgun Gothic" pitchFamily="34" charset="-120"/>
+              </a:rPr>
+              <a:t>03</a:t>
+            </a:r>
+            <a:endParaRPr lang="en-US" sz="1631" dirty="0"/>
+          </a:p>
+        </p:txBody>
+      </p:sp>
+      <p:sp>
+        <p:nvSpPr>
+          <p:cNvPr id="25" name="Text 23"/>
+          <p:cNvSpPr txBox="1"/>
+          <p:nvPr/>
+        </p:nvSpPr>
+        <p:spPr>
+          <a:xfrm>
+            <a:off x="3686221" y="4233855"/>
+            <a:ext cx="3866358" cy="414315"/>
+          </a:xfrm>
+          <a:prstGeom prst="rect">
+            <a:avLst/>
+          </a:prstGeom>
+          <a:noFill/>
+          <a:ln/>
+        </p:spPr>
+        <p:txBody>
+          <a:bodyPr wrap="none" lIns="0" tIns="0" rIns="0" bIns="0" rtlCol="0" anchor="t"/>
+          <a:lstStyle/>
+          <a:p>
+            <a:pPr algn="l" indent="0" marL="0">
+              <a:lnSpc>
+                <a:spcPts val="3263"/>
+              </a:lnSpc>
+              <a:buNone/>
+            </a:pPr>
+            <a:r>
+              <a:rPr lang="en-US" sz="2175" spc="-54" kern="0" dirty="0">
+                <a:solidFill>
+                  <a:srgbClr val="FFFFFF"/>
+                </a:solidFill>
+                <a:latin typeface="Malgun Gothic" pitchFamily="34" charset="0"/>
+                <a:ea typeface="Malgun Gothic" pitchFamily="34" charset="-122"/>
+                <a:cs typeface="Malgun Gothic" pitchFamily="34" charset="-120"/>
+              </a:rPr>
+              <a:t>유닛 이코노믹스 최적화</a:t>
+            </a:r>
+            <a:endParaRPr lang="en-US" sz="2175" dirty="0"/>
+          </a:p>
+        </p:txBody>
+      </p:sp>
+      <p:sp>
+        <p:nvSpPr>
+          <p:cNvPr id="26" name="Text 24"/>
+          <p:cNvSpPr txBox="1"/>
+          <p:nvPr/>
+        </p:nvSpPr>
+        <p:spPr>
+          <a:xfrm>
+            <a:off x="3686221" y="4648170"/>
+            <a:ext cx="3600450" cy="1243035"/>
+          </a:xfrm>
+          <a:prstGeom prst="rect">
+            <a:avLst/>
+          </a:prstGeom>
+          <a:noFill/>
+          <a:ln/>
+        </p:spPr>
+        <p:txBody>
+          <a:bodyPr wrap="square" lIns="0" tIns="0" rIns="0" bIns="0" rtlCol="0" anchor="t"/>
+          <a:lstStyle/>
+          <a:p>
+            <a:pPr algn="l" indent="0" marL="0">
+              <a:lnSpc>
+                <a:spcPts val="3263"/>
+              </a:lnSpc>
+              <a:buNone/>
+            </a:pPr>
+            <a:r>
+              <a:rPr lang="en-US" sz="2175" spc="-54" kern="0" dirty="0">
+                <a:solidFill>
+                  <a:srgbClr val="FFFFFF"/>
+                </a:solidFill>
+                <a:latin typeface="Malgun Gothic" pitchFamily="34" charset="0"/>
+                <a:ea typeface="Malgun Gothic" pitchFamily="34" charset="-122"/>
+                <a:cs typeface="Malgun Gothic" pitchFamily="34" charset="-120"/>
+              </a:rPr>
+              <a:t>• 고객 획득 비용(CAC) 45% 절감</a:t>
+            </a:r>
+            <a:endParaRPr lang="en-US" sz="2175" dirty="0"/>
+          </a:p>
+          <a:p>
+            <a:pPr algn="l" indent="0" marL="0">
+              <a:lnSpc>
+                <a:spcPts val="3263"/>
+              </a:lnSpc>
+              <a:buNone/>
+            </a:pPr>
+            <a:r>
+              <a:rPr lang="en-US" sz="2175" spc="-54" kern="0" dirty="0">
+                <a:solidFill>
+                  <a:srgbClr val="FFFFFF"/>
+                </a:solidFill>
+                <a:latin typeface="Malgun Gothic" pitchFamily="34" charset="0"/>
+                <a:ea typeface="Malgun Gothic" pitchFamily="34" charset="-122"/>
+                <a:cs typeface="Malgun Gothic" pitchFamily="34" charset="-120"/>
+              </a:rPr>
+              <a:t>• LTV/CAC 비율 4.5x 달성</a:t>
+            </a:r>
+            <a:endParaRPr lang="en-US" sz="2175" dirty="0"/>
+          </a:p>
+          <a:p>
+            <a:pPr algn="l" indent="0" marL="0">
+              <a:lnSpc>
+                <a:spcPts val="3263"/>
+              </a:lnSpc>
+              <a:buNone/>
+            </a:pPr>
+            <a:r>
+              <a:rPr lang="en-US" sz="2175" spc="-54" kern="0" dirty="0">
+                <a:solidFill>
+                  <a:srgbClr val="FFFFFF"/>
+                </a:solidFill>
+                <a:latin typeface="Malgun Gothic" pitchFamily="34" charset="0"/>
+                <a:ea typeface="Malgun Gothic" pitchFamily="34" charset="-122"/>
+                <a:cs typeface="Malgun Gothic" pitchFamily="34" charset="-120"/>
+              </a:rPr>
+              <a:t>• 세일즈 사이클 90일 단축</a:t>
+            </a:r>
+            <a:endParaRPr lang="en-US" sz="2175" dirty="0"/>
+          </a:p>
+        </p:txBody>
+      </p:sp>
+      <p:sp>
+        <p:nvSpPr>
+          <p:cNvPr id="27" name="Shape 25"/>
+          <p:cNvSpPr/>
+          <p:nvPr/>
+        </p:nvSpPr>
+        <p:spPr>
+          <a:xfrm>
+            <a:off x="7639080" y="3712373"/>
+            <a:ext cx="4000500" cy="2381280"/>
+          </a:xfrm>
+          <a:prstGeom prst="roundRect">
+            <a:avLst>
+              <a:gd name="adj" fmla="val 5599"/>
+            </a:avLst>
+          </a:prstGeom>
+          <a:solidFill>
+            <a:srgbClr val="111A2E"/>
+          </a:solidFill>
+          <a:ln w="9525">
+            <a:solidFill>
+              <a:srgbClr val="FFFFFF">
+                <a:alpha val="10000"/>
+              </a:srgbClr>
+            </a:solidFill>
+            <a:prstDash val="solid"/>
+          </a:ln>
+        </p:spPr>
+      </p:sp>
+      <p:sp>
+        <p:nvSpPr>
+          <p:cNvPr id="28" name="Shape 26"/>
+          <p:cNvSpPr/>
+          <p:nvPr/>
+        </p:nvSpPr>
+        <p:spPr>
+          <a:xfrm>
+            <a:off x="7858171" y="3912352"/>
+            <a:ext cx="247620" cy="247620"/>
+          </a:xfrm>
+          <a:prstGeom prst="roundRect">
+            <a:avLst>
+              <a:gd name="adj" fmla="val 50000"/>
+            </a:avLst>
+          </a:prstGeom>
+          <a:solidFill>
+            <a:srgbClr val="F59E0B">
+              <a:alpha val="15000"/>
+            </a:srgbClr>
+          </a:solidFill>
+          <a:ln w="9525">
+            <a:solidFill>
+              <a:srgbClr val="F59E0B">
+                <a:alpha val="40000"/>
+              </a:srgbClr>
+            </a:solidFill>
+            <a:prstDash val="solid"/>
+          </a:ln>
+        </p:spPr>
+      </p:sp>
+      <p:sp>
+        <p:nvSpPr>
+          <p:cNvPr id="29" name="Text 27"/>
+          <p:cNvSpPr txBox="1"/>
+          <p:nvPr/>
+        </p:nvSpPr>
+        <p:spPr>
+          <a:xfrm>
+            <a:off x="7848570" y="3877879"/>
+            <a:ext cx="304770" cy="310805"/>
+          </a:xfrm>
+          <a:prstGeom prst="rect">
+            <a:avLst/>
+          </a:prstGeom>
+          <a:noFill/>
+          <a:ln/>
+        </p:spPr>
+        <p:txBody>
+          <a:bodyPr wrap="none" lIns="0" tIns="0" rIns="0" bIns="0" rtlCol="0" anchor="t"/>
+          <a:lstStyle/>
+          <a:p>
+            <a:pPr algn="l" indent="0" marL="0">
+              <a:lnSpc>
+                <a:spcPts val="2447"/>
+              </a:lnSpc>
+              <a:buNone/>
+            </a:pPr>
+            <a:r>
+              <a:rPr lang="en-US" sz="1631" b="1" spc="-54" kern="0" dirty="0">
+                <a:solidFill>
+                  <a:srgbClr val="F59E0B"/>
+                </a:solidFill>
+                <a:latin typeface="Malgun Gothic" pitchFamily="34" charset="0"/>
+                <a:ea typeface="Malgun Gothic" pitchFamily="34" charset="-122"/>
+                <a:cs typeface="Malgun Gothic" pitchFamily="34" charset="-120"/>
+              </a:rPr>
+              <a:t>04</a:t>
+            </a:r>
+            <a:endParaRPr lang="en-US" sz="1631" dirty="0"/>
+          </a:p>
+        </p:txBody>
+      </p:sp>
+      <p:sp>
+        <p:nvSpPr>
+          <p:cNvPr id="30" name="Text 28"/>
+          <p:cNvSpPr txBox="1"/>
+          <p:nvPr/>
+        </p:nvSpPr>
+        <p:spPr>
+          <a:xfrm>
+            <a:off x="7839060" y="4233855"/>
+            <a:ext cx="3866358" cy="414315"/>
+          </a:xfrm>
+          <a:prstGeom prst="rect">
+            <a:avLst/>
+          </a:prstGeom>
+          <a:noFill/>
+          <a:ln/>
+        </p:spPr>
+        <p:txBody>
+          <a:bodyPr wrap="none" lIns="0" tIns="0" rIns="0" bIns="0" rtlCol="0" anchor="t"/>
+          <a:lstStyle/>
+          <a:p>
+            <a:pPr algn="l" indent="0" marL="0">
+              <a:lnSpc>
+                <a:spcPts val="3263"/>
+              </a:lnSpc>
+              <a:buNone/>
+            </a:pPr>
+            <a:r>
+              <a:rPr lang="en-US" sz="2175" spc="-54" kern="0" dirty="0">
+                <a:solidFill>
+                  <a:srgbClr val="FFFFFF"/>
+                </a:solidFill>
+                <a:latin typeface="Malgun Gothic" pitchFamily="34" charset="0"/>
+                <a:ea typeface="Malgun Gothic" pitchFamily="34" charset="-122"/>
+                <a:cs typeface="Malgun Gothic" pitchFamily="34" charset="-120"/>
+              </a:rPr>
+              <a:t>재무 계획 및 실행 과제</a:t>
+            </a:r>
+            <a:endParaRPr lang="en-US" sz="2175" dirty="0"/>
+          </a:p>
+        </p:txBody>
+      </p:sp>
+      <p:sp>
+        <p:nvSpPr>
+          <p:cNvPr id="31" name="Text 29"/>
+          <p:cNvSpPr txBox="1"/>
+          <p:nvPr/>
+        </p:nvSpPr>
+        <p:spPr>
+          <a:xfrm>
+            <a:off x="7839060" y="4648170"/>
+            <a:ext cx="3600450" cy="1243035"/>
+          </a:xfrm>
+          <a:prstGeom prst="rect">
+            <a:avLst/>
+          </a:prstGeom>
+          <a:noFill/>
+          <a:ln/>
+        </p:spPr>
+        <p:txBody>
+          <a:bodyPr wrap="square" lIns="0" tIns="0" rIns="0" bIns="0" rtlCol="0" anchor="t"/>
+          <a:lstStyle/>
+          <a:p>
+            <a:pPr algn="l" indent="0" marL="0">
+              <a:lnSpc>
+                <a:spcPts val="3263"/>
+              </a:lnSpc>
+              <a:buNone/>
+            </a:pPr>
+            <a:r>
+              <a:rPr lang="en-US" sz="2175" spc="-54" kern="0" dirty="0">
+                <a:solidFill>
+                  <a:srgbClr val="FFFFFF"/>
+                </a:solidFill>
+                <a:latin typeface="Malgun Gothic" pitchFamily="34" charset="0"/>
+                <a:ea typeface="Malgun Gothic" pitchFamily="34" charset="-122"/>
+                <a:cs typeface="Malgun Gothic" pitchFamily="34" charset="-120"/>
+              </a:rPr>
+              <a:t>• 분기별 R&amp;D 투자 배분 계획</a:t>
+            </a:r>
+            <a:endParaRPr lang="en-US" sz="2175" dirty="0"/>
+          </a:p>
+          <a:p>
+            <a:pPr algn="l" indent="0" marL="0">
+              <a:lnSpc>
+                <a:spcPts val="3263"/>
+              </a:lnSpc>
+              <a:buNone/>
+            </a:pPr>
+            <a:r>
+              <a:rPr lang="en-US" sz="2175" spc="-54" kern="0" dirty="0">
+                <a:solidFill>
+                  <a:srgbClr val="FFFFFF"/>
+                </a:solidFill>
+                <a:latin typeface="Malgun Gothic" pitchFamily="34" charset="0"/>
+                <a:ea typeface="Malgun Gothic" pitchFamily="34" charset="-122"/>
+                <a:cs typeface="Malgun Gothic" pitchFamily="34" charset="-120"/>
+              </a:rPr>
+              <a:t>• 흑자 전환(BEP) 시점 가속화</a:t>
+            </a:r>
+            <a:endParaRPr lang="en-US" sz="2175" dirty="0"/>
+          </a:p>
+          <a:p>
+            <a:pPr algn="l" indent="0" marL="0">
+              <a:lnSpc>
+                <a:spcPts val="3263"/>
+              </a:lnSpc>
+              <a:buNone/>
+            </a:pPr>
+            <a:r>
+              <a:rPr lang="en-US" sz="2175" spc="-54" kern="0" dirty="0">
+                <a:solidFill>
+                  <a:srgbClr val="FFFFFF"/>
+                </a:solidFill>
+                <a:latin typeface="Malgun Gothic" pitchFamily="34" charset="0"/>
+                <a:ea typeface="Malgun Gothic" pitchFamily="34" charset="-122"/>
+                <a:cs typeface="Malgun Gothic" pitchFamily="34" charset="-120"/>
+              </a:rPr>
+              <a:t>• 조직 확장 및 핵심 인재 영입</a:t>
+            </a:r>
+            <a:endParaRPr lang="en-US" sz="2175" dirty="0"/>
+          </a:p>
+        </p:txBody>
+      </p:sp>
     </p:spTree>
   </p:cSld>
   <p:clrMapOvr>
@@ -1385,16 +3120,9 @@
   <p:cSld name="Slide 3">
     <p:bg>
       <p:bgPr>
-        <a:blipFill dpi="0" rotWithShape="1">
-          <a:blip r:embed="rId1">
-            <a:lum/>
-          </a:blip>
-          <a:srcRect/>
-          <a:stretch>
-            <a:fillRect/>
-          </a:stretch>
-        </a:blipFill>
-        <a:effectLst/>
+        <a:solidFill>
+          <a:srgbClr val="38BDF8"/>
+        </a:solidFill>
       </p:bgPr>
     </p:bg>
     <p:spTree>
@@ -1411,6 +3139,1084 @@
           <a:chExt cx="0" cy="0"/>
         </a:xfrm>
       </p:grpSpPr>
+      <p:sp>
+        <p:nvSpPr>
+          <p:cNvPr id="2" name="Shape 0"/>
+          <p:cNvSpPr/>
+          <p:nvPr/>
+        </p:nvSpPr>
+        <p:spPr>
+          <a:xfrm>
+            <a:off x="4180728" y="1473098"/>
+            <a:ext cx="3830604" cy="418521"/>
+          </a:xfrm>
+          <a:prstGeom prst="roundRect">
+            <a:avLst>
+              <a:gd name="adj" fmla="val 50011"/>
+            </a:avLst>
+          </a:prstGeom>
+          <a:solidFill>
+            <a:srgbClr val="F59E0B">
+              <a:alpha val="15000"/>
+            </a:srgbClr>
+          </a:solidFill>
+          <a:ln w="9525">
+            <a:solidFill>
+              <a:srgbClr val="F59E0B">
+                <a:alpha val="35000"/>
+              </a:srgbClr>
+            </a:solidFill>
+            <a:prstDash val="solid"/>
+          </a:ln>
+        </p:spPr>
+      </p:sp>
+      <p:sp>
+        <p:nvSpPr>
+          <p:cNvPr id="3" name="Text 1"/>
+          <p:cNvSpPr txBox="1"/>
+          <p:nvPr/>
+        </p:nvSpPr>
+        <p:spPr>
+          <a:xfrm>
+            <a:off x="4040002" y="1516258"/>
+            <a:ext cx="4111965" cy="323149"/>
+          </a:xfrm>
+          <a:prstGeom prst="rect">
+            <a:avLst/>
+          </a:prstGeom>
+          <a:noFill/>
+          <a:ln/>
+        </p:spPr>
+        <p:txBody>
+          <a:bodyPr wrap="none" lIns="0" tIns="0" rIns="0" bIns="0" rtlCol="0" anchor="t"/>
+          <a:lstStyle/>
+          <a:p>
+            <a:pPr algn="ctr" indent="0" marL="0">
+              <a:lnSpc>
+                <a:spcPts val="2545"/>
+              </a:lnSpc>
+              <a:buNone/>
+            </a:pPr>
+            <a:r>
+              <a:rPr lang="en-US" sz="1697" b="1" spc="34" kern="0" dirty="0">
+                <a:solidFill>
+                  <a:srgbClr val="F59E0B"/>
+                </a:solidFill>
+                <a:latin typeface="Malgun Gothic" pitchFamily="34" charset="0"/>
+                <a:ea typeface="Malgun Gothic" pitchFamily="34" charset="-122"/>
+                <a:cs typeface="Malgun Gothic" pitchFamily="34" charset="-120"/>
+              </a:rPr>
+              <a:t>KEY PERFORMANCE INDICATORS</a:t>
+            </a:r>
+            <a:endParaRPr lang="en-US" sz="1697" dirty="0"/>
+          </a:p>
+        </p:txBody>
+      </p:sp>
+      <p:sp>
+        <p:nvSpPr>
+          <p:cNvPr id="4" name="Text 2"/>
+          <p:cNvSpPr txBox="1"/>
+          <p:nvPr/>
+        </p:nvSpPr>
+        <p:spPr>
+          <a:xfrm>
+            <a:off x="-334488" y="1967789"/>
+            <a:ext cx="12861036" cy="590611"/>
+          </a:xfrm>
+          <a:prstGeom prst="rect">
+            <a:avLst/>
+          </a:prstGeom>
+          <a:noFill/>
+          <a:ln/>
+        </p:spPr>
+        <p:txBody>
+          <a:bodyPr wrap="none" lIns="0" tIns="0" rIns="0" bIns="0" rtlCol="0" anchor="t"/>
+          <a:lstStyle/>
+          <a:p>
+            <a:pPr algn="ctr" indent="0" marL="0">
+              <a:lnSpc>
+                <a:spcPts val="4651"/>
+              </a:lnSpc>
+              <a:buNone/>
+            </a:pPr>
+            <a:r>
+              <a:rPr lang="en-US" sz="3524" b="1" spc="-88" kern="0" dirty="0">
+                <a:solidFill>
+                  <a:srgbClr val="FFFFFF"/>
+                </a:solidFill>
+                <a:latin typeface="Malgun Gothic" pitchFamily="34" charset="0"/>
+                <a:ea typeface="Malgun Gothic" pitchFamily="34" charset="-122"/>
+                <a:cs typeface="Malgun Gothic" pitchFamily="34" charset="-120"/>
+              </a:rPr>
+              <a:t>2026년 목표 재무 성과 및 핵심 마일스톤</a:t>
+            </a:r>
+            <a:endParaRPr lang="en-US" sz="3524" dirty="0"/>
+          </a:p>
+        </p:txBody>
+      </p:sp>
+      <p:sp>
+        <p:nvSpPr>
+          <p:cNvPr id="5" name="Text 3"/>
+          <p:cNvSpPr txBox="1"/>
+          <p:nvPr/>
+        </p:nvSpPr>
+        <p:spPr>
+          <a:xfrm>
+            <a:off x="-334488" y="2741463"/>
+            <a:ext cx="12861036" cy="397764"/>
+          </a:xfrm>
+          <a:prstGeom prst="rect">
+            <a:avLst/>
+          </a:prstGeom>
+          <a:noFill/>
+          <a:ln/>
+        </p:spPr>
+        <p:txBody>
+          <a:bodyPr wrap="none" lIns="0" tIns="0" rIns="0" bIns="0" rtlCol="0" anchor="t"/>
+          <a:lstStyle/>
+          <a:p>
+            <a:pPr algn="ctr" indent="0" marL="0">
+              <a:lnSpc>
+                <a:spcPts val="3132"/>
+              </a:lnSpc>
+              <a:buNone/>
+            </a:pPr>
+            <a:r>
+              <a:rPr lang="en-US" sz="2088" spc="-54" kern="0" dirty="0">
+                <a:solidFill>
+                  <a:srgbClr val="94A3B8"/>
+                </a:solidFill>
+                <a:latin typeface="Malgun Gothic" pitchFamily="34" charset="0"/>
+                <a:ea typeface="Malgun Gothic" pitchFamily="34" charset="-122"/>
+                <a:cs typeface="Malgun Gothic" pitchFamily="34" charset="-120"/>
+              </a:rPr>
+              <a:t>ARR 3.2배 성장과 고객 획득 비용(CAC) 45% 절감을 통한 영업이익률 28.4% 달성</a:t>
+            </a:r>
+            <a:endParaRPr lang="en-US" sz="2088" dirty="0"/>
+          </a:p>
+        </p:txBody>
+      </p:sp>
+      <p:sp>
+        <p:nvSpPr>
+          <p:cNvPr id="6" name="Shape 4"/>
+          <p:cNvSpPr/>
+          <p:nvPr/>
+        </p:nvSpPr>
+        <p:spPr>
+          <a:xfrm>
+            <a:off x="552480" y="3376331"/>
+            <a:ext cx="3594049" cy="2027499"/>
+          </a:xfrm>
+          <a:prstGeom prst="roundRect">
+            <a:avLst>
+              <a:gd name="adj" fmla="val 6576"/>
+            </a:avLst>
+          </a:prstGeom>
+          <a:solidFill>
+            <a:srgbClr val="111A2E"/>
+          </a:solidFill>
+          <a:ln/>
+        </p:spPr>
+      </p:sp>
+      <p:sp>
+        <p:nvSpPr>
+          <p:cNvPr id="7" name="Shape 5"/>
+          <p:cNvSpPr/>
+          <p:nvPr/>
+        </p:nvSpPr>
+        <p:spPr>
+          <a:xfrm>
+            <a:off x="552480" y="3376331"/>
+            <a:ext cx="3594049" cy="28621"/>
+          </a:xfrm>
+          <a:prstGeom prst="rect">
+            <a:avLst/>
+          </a:prstGeom>
+          <a:solidFill>
+            <a:srgbClr val="F59E0B"/>
+          </a:solidFill>
+          <a:ln/>
+        </p:spPr>
+      </p:sp>
+      <p:sp>
+        <p:nvSpPr>
+          <p:cNvPr id="8" name="Shape 6"/>
+          <p:cNvSpPr/>
+          <p:nvPr/>
+        </p:nvSpPr>
+        <p:spPr>
+          <a:xfrm>
+            <a:off x="4137020" y="3376331"/>
+            <a:ext cx="9510" cy="2027499"/>
+          </a:xfrm>
+          <a:prstGeom prst="rect">
+            <a:avLst/>
+          </a:prstGeom>
+          <a:solidFill>
+            <a:srgbClr val="FFFFFF">
+              <a:alpha val="10000"/>
+            </a:srgbClr>
+          </a:solidFill>
+          <a:ln/>
+        </p:spPr>
+      </p:sp>
+      <p:sp>
+        <p:nvSpPr>
+          <p:cNvPr id="9" name="Shape 7"/>
+          <p:cNvSpPr/>
+          <p:nvPr/>
+        </p:nvSpPr>
+        <p:spPr>
+          <a:xfrm>
+            <a:off x="552480" y="5394320"/>
+            <a:ext cx="3594049" cy="9510"/>
+          </a:xfrm>
+          <a:prstGeom prst="rect">
+            <a:avLst/>
+          </a:prstGeom>
+          <a:solidFill>
+            <a:srgbClr val="FFFFFF">
+              <a:alpha val="10000"/>
+            </a:srgbClr>
+          </a:solidFill>
+          <a:ln/>
+        </p:spPr>
+      </p:sp>
+      <p:sp>
+        <p:nvSpPr>
+          <p:cNvPr id="10" name="Shape 8"/>
+          <p:cNvSpPr/>
+          <p:nvPr/>
+        </p:nvSpPr>
+        <p:spPr>
+          <a:xfrm>
+            <a:off x="552480" y="3376331"/>
+            <a:ext cx="9510" cy="2027499"/>
+          </a:xfrm>
+          <a:prstGeom prst="rect">
+            <a:avLst/>
+          </a:prstGeom>
+          <a:solidFill>
+            <a:srgbClr val="FFFFFF">
+              <a:alpha val="10000"/>
+            </a:srgbClr>
+          </a:solidFill>
+          <a:ln/>
+        </p:spPr>
+      </p:sp>
+      <p:sp>
+        <p:nvSpPr>
+          <p:cNvPr id="11" name="Shape 9"/>
+          <p:cNvSpPr/>
+          <p:nvPr/>
+        </p:nvSpPr>
+        <p:spPr>
+          <a:xfrm>
+            <a:off x="2225650" y="3595421"/>
+            <a:ext cx="247620" cy="247620"/>
+          </a:xfrm>
+          <a:prstGeom prst="roundRect">
+            <a:avLst>
+              <a:gd name="adj" fmla="val 50000"/>
+            </a:avLst>
+          </a:prstGeom>
+          <a:solidFill>
+            <a:srgbClr val="F59E0B">
+              <a:alpha val="15000"/>
+            </a:srgbClr>
+          </a:solidFill>
+          <a:ln w="9525">
+            <a:solidFill>
+              <a:srgbClr val="F59E0B">
+                <a:alpha val="40000"/>
+              </a:srgbClr>
+            </a:solidFill>
+            <a:prstDash val="solid"/>
+          </a:ln>
+        </p:spPr>
+      </p:sp>
+      <p:sp>
+        <p:nvSpPr>
+          <p:cNvPr id="12" name="Text 10"/>
+          <p:cNvSpPr txBox="1"/>
+          <p:nvPr/>
+        </p:nvSpPr>
+        <p:spPr>
+          <a:xfrm>
+            <a:off x="2178009" y="3560856"/>
+            <a:ext cx="342900" cy="310805"/>
+          </a:xfrm>
+          <a:prstGeom prst="rect">
+            <a:avLst/>
+          </a:prstGeom>
+          <a:noFill/>
+          <a:ln/>
+        </p:spPr>
+        <p:txBody>
+          <a:bodyPr wrap="none" lIns="0" tIns="0" rIns="0" bIns="0" rtlCol="0" anchor="t"/>
+          <a:lstStyle/>
+          <a:p>
+            <a:pPr algn="ctr" indent="0" marL="0">
+              <a:lnSpc>
+                <a:spcPts val="2447"/>
+              </a:lnSpc>
+              <a:buNone/>
+            </a:pPr>
+            <a:r>
+              <a:rPr lang="en-US" sz="1631" b="1" spc="-54" kern="0" dirty="0">
+                <a:solidFill>
+                  <a:srgbClr val="F59E0B"/>
+                </a:solidFill>
+                <a:latin typeface="Malgun Gothic" pitchFamily="34" charset="0"/>
+                <a:ea typeface="Malgun Gothic" pitchFamily="34" charset="-122"/>
+                <a:cs typeface="Malgun Gothic" pitchFamily="34" charset="-120"/>
+              </a:rPr>
+              <a:t>01</a:t>
+            </a:r>
+            <a:endParaRPr lang="en-US" sz="1631" dirty="0"/>
+          </a:p>
+        </p:txBody>
+      </p:sp>
+      <p:sp>
+        <p:nvSpPr>
+          <p:cNvPr id="13" name="Text 11"/>
+          <p:cNvSpPr txBox="1"/>
+          <p:nvPr/>
+        </p:nvSpPr>
+        <p:spPr>
+          <a:xfrm>
+            <a:off x="519013" y="3899276"/>
+            <a:ext cx="3660892" cy="773400"/>
+          </a:xfrm>
+          <a:prstGeom prst="rect">
+            <a:avLst/>
+          </a:prstGeom>
+          <a:noFill/>
+          <a:ln/>
+        </p:spPr>
+        <p:txBody>
+          <a:bodyPr wrap="none" lIns="0" tIns="0" rIns="0" bIns="0" rtlCol="0" anchor="t"/>
+          <a:lstStyle/>
+          <a:p>
+            <a:pPr algn="ctr" indent="0" marL="0">
+              <a:lnSpc>
+                <a:spcPts val="6090"/>
+              </a:lnSpc>
+              <a:buNone/>
+            </a:pPr>
+            <a:r>
+              <a:rPr lang="en-US" sz="6090" b="1" spc="-54" kern="0" dirty="0">
+                <a:solidFill>
+                  <a:srgbClr val="F59E0B"/>
+                </a:solidFill>
+                <a:latin typeface="Malgun Gothic" pitchFamily="34" charset="0"/>
+                <a:ea typeface="Malgun Gothic" pitchFamily="34" charset="-122"/>
+                <a:cs typeface="Malgun Gothic" pitchFamily="34" charset="-120"/>
+              </a:rPr>
+              <a:t>$12.5M</a:t>
+            </a:r>
+            <a:endParaRPr lang="en-US" sz="6090" dirty="0"/>
+          </a:p>
+        </p:txBody>
+      </p:sp>
+      <p:sp>
+        <p:nvSpPr>
+          <p:cNvPr id="14" name="Text 12"/>
+          <p:cNvSpPr txBox="1"/>
+          <p:nvPr/>
+        </p:nvSpPr>
+        <p:spPr>
+          <a:xfrm>
+            <a:off x="519013" y="4728454"/>
+            <a:ext cx="3660892" cy="233172"/>
+          </a:xfrm>
+          <a:prstGeom prst="rect">
+            <a:avLst/>
+          </a:prstGeom>
+          <a:noFill/>
+          <a:ln/>
+        </p:spPr>
+        <p:txBody>
+          <a:bodyPr wrap="none" lIns="0" tIns="0" rIns="0" bIns="0" rtlCol="0" anchor="t"/>
+          <a:lstStyle/>
+          <a:p>
+            <a:pPr algn="ctr" indent="0" marL="0">
+              <a:lnSpc>
+                <a:spcPts val="1836"/>
+              </a:lnSpc>
+              <a:buNone/>
+            </a:pPr>
+            <a:r>
+              <a:rPr lang="en-US" sz="1224" b="1" spc="-54" kern="0" dirty="0">
+                <a:solidFill>
+                  <a:srgbClr val="FFFFFF"/>
+                </a:solidFill>
+                <a:latin typeface="Malgun Gothic" pitchFamily="34" charset="0"/>
+                <a:ea typeface="Malgun Gothic" pitchFamily="34" charset="-122"/>
+                <a:cs typeface="Malgun Gothic" pitchFamily="34" charset="-120"/>
+              </a:rPr>
+              <a:t>연간 반복 매출 (ARR)</a:t>
+            </a:r>
+            <a:endParaRPr lang="en-US" sz="1224" dirty="0"/>
+          </a:p>
+        </p:txBody>
+      </p:sp>
+      <p:sp>
+        <p:nvSpPr>
+          <p:cNvPr id="15" name="Text 13"/>
+          <p:cNvSpPr txBox="1"/>
+          <p:nvPr/>
+        </p:nvSpPr>
+        <p:spPr>
+          <a:xfrm>
+            <a:off x="519013" y="5020056"/>
+            <a:ext cx="3660892" cy="182880"/>
+          </a:xfrm>
+          <a:prstGeom prst="rect">
+            <a:avLst/>
+          </a:prstGeom>
+          <a:noFill/>
+          <a:ln/>
+        </p:spPr>
+        <p:txBody>
+          <a:bodyPr wrap="none" lIns="0" tIns="0" rIns="0" bIns="0" rtlCol="0" anchor="t"/>
+          <a:lstStyle/>
+          <a:p>
+            <a:pPr algn="ctr" indent="0" marL="0">
+              <a:lnSpc>
+                <a:spcPts val="1440"/>
+              </a:lnSpc>
+              <a:buNone/>
+            </a:pPr>
+            <a:r>
+              <a:rPr lang="en-US" sz="960" spc="-54" kern="0" dirty="0">
+                <a:solidFill>
+                  <a:srgbClr val="94A3B8"/>
+                </a:solidFill>
+                <a:latin typeface="Malgun Gothic" pitchFamily="34" charset="0"/>
+                <a:ea typeface="Malgun Gothic" pitchFamily="34" charset="-122"/>
+                <a:cs typeface="Malgun Gothic" pitchFamily="34" charset="-120"/>
+              </a:rPr>
+              <a:t>북미 및 일본 엔터프라이즈 고객사 120개사 확보 목표</a:t>
+            </a:r>
+            <a:endParaRPr lang="en-US" sz="960" dirty="0"/>
+          </a:p>
+        </p:txBody>
+      </p:sp>
+      <p:sp>
+        <p:nvSpPr>
+          <p:cNvPr id="16" name="Shape 14"/>
+          <p:cNvSpPr/>
+          <p:nvPr/>
+        </p:nvSpPr>
+        <p:spPr>
+          <a:xfrm>
+            <a:off x="4298960" y="3376331"/>
+            <a:ext cx="3594049" cy="2027499"/>
+          </a:xfrm>
+          <a:prstGeom prst="roundRect">
+            <a:avLst>
+              <a:gd name="adj" fmla="val 6576"/>
+            </a:avLst>
+          </a:prstGeom>
+          <a:solidFill>
+            <a:srgbClr val="111A2E"/>
+          </a:solidFill>
+          <a:ln/>
+        </p:spPr>
+      </p:sp>
+      <p:sp>
+        <p:nvSpPr>
+          <p:cNvPr id="17" name="Shape 15"/>
+          <p:cNvSpPr/>
+          <p:nvPr/>
+        </p:nvSpPr>
+        <p:spPr>
+          <a:xfrm>
+            <a:off x="4298960" y="3376331"/>
+            <a:ext cx="3594049" cy="28621"/>
+          </a:xfrm>
+          <a:prstGeom prst="rect">
+            <a:avLst/>
+          </a:prstGeom>
+          <a:solidFill>
+            <a:srgbClr val="38BDF8"/>
+          </a:solidFill>
+          <a:ln/>
+        </p:spPr>
+      </p:sp>
+      <p:sp>
+        <p:nvSpPr>
+          <p:cNvPr id="18" name="Shape 16"/>
+          <p:cNvSpPr/>
+          <p:nvPr/>
+        </p:nvSpPr>
+        <p:spPr>
+          <a:xfrm>
+            <a:off x="7883500" y="3376331"/>
+            <a:ext cx="9510" cy="2027499"/>
+          </a:xfrm>
+          <a:prstGeom prst="rect">
+            <a:avLst/>
+          </a:prstGeom>
+          <a:solidFill>
+            <a:srgbClr val="FFFFFF">
+              <a:alpha val="10000"/>
+            </a:srgbClr>
+          </a:solidFill>
+          <a:ln/>
+        </p:spPr>
+      </p:sp>
+      <p:sp>
+        <p:nvSpPr>
+          <p:cNvPr id="19" name="Shape 17"/>
+          <p:cNvSpPr/>
+          <p:nvPr/>
+        </p:nvSpPr>
+        <p:spPr>
+          <a:xfrm>
+            <a:off x="4298960" y="5394320"/>
+            <a:ext cx="3594049" cy="9510"/>
+          </a:xfrm>
+          <a:prstGeom prst="rect">
+            <a:avLst/>
+          </a:prstGeom>
+          <a:solidFill>
+            <a:srgbClr val="FFFFFF">
+              <a:alpha val="10000"/>
+            </a:srgbClr>
+          </a:solidFill>
+          <a:ln/>
+        </p:spPr>
+      </p:sp>
+      <p:sp>
+        <p:nvSpPr>
+          <p:cNvPr id="20" name="Shape 18"/>
+          <p:cNvSpPr/>
+          <p:nvPr/>
+        </p:nvSpPr>
+        <p:spPr>
+          <a:xfrm>
+            <a:off x="4298960" y="3376331"/>
+            <a:ext cx="9510" cy="2027499"/>
+          </a:xfrm>
+          <a:prstGeom prst="rect">
+            <a:avLst/>
+          </a:prstGeom>
+          <a:solidFill>
+            <a:srgbClr val="FFFFFF">
+              <a:alpha val="10000"/>
+            </a:srgbClr>
+          </a:solidFill>
+          <a:ln/>
+        </p:spPr>
+      </p:sp>
+      <p:sp>
+        <p:nvSpPr>
+          <p:cNvPr id="21" name="Shape 19"/>
+          <p:cNvSpPr/>
+          <p:nvPr/>
+        </p:nvSpPr>
+        <p:spPr>
+          <a:xfrm>
+            <a:off x="5971946" y="3595421"/>
+            <a:ext cx="247620" cy="247620"/>
+          </a:xfrm>
+          <a:prstGeom prst="roundRect">
+            <a:avLst>
+              <a:gd name="adj" fmla="val 50000"/>
+            </a:avLst>
+          </a:prstGeom>
+          <a:solidFill>
+            <a:srgbClr val="38BDF8">
+              <a:alpha val="15000"/>
+            </a:srgbClr>
+          </a:solidFill>
+          <a:ln w="9525">
+            <a:solidFill>
+              <a:srgbClr val="38BDF8">
+                <a:alpha val="40000"/>
+              </a:srgbClr>
+            </a:solidFill>
+            <a:prstDash val="solid"/>
+          </a:ln>
+        </p:spPr>
+      </p:sp>
+      <p:sp>
+        <p:nvSpPr>
+          <p:cNvPr id="22" name="Text 20"/>
+          <p:cNvSpPr txBox="1"/>
+          <p:nvPr/>
+        </p:nvSpPr>
+        <p:spPr>
+          <a:xfrm>
+            <a:off x="5924398" y="3560856"/>
+            <a:ext cx="342900" cy="310805"/>
+          </a:xfrm>
+          <a:prstGeom prst="rect">
+            <a:avLst/>
+          </a:prstGeom>
+          <a:noFill/>
+          <a:ln/>
+        </p:spPr>
+        <p:txBody>
+          <a:bodyPr wrap="none" lIns="0" tIns="0" rIns="0" bIns="0" rtlCol="0" anchor="t"/>
+          <a:lstStyle/>
+          <a:p>
+            <a:pPr algn="ctr" indent="0" marL="0">
+              <a:lnSpc>
+                <a:spcPts val="2447"/>
+              </a:lnSpc>
+              <a:buNone/>
+            </a:pPr>
+            <a:r>
+              <a:rPr lang="en-US" sz="1631" b="1" spc="-54" kern="0" dirty="0">
+                <a:solidFill>
+                  <a:srgbClr val="38BDF8"/>
+                </a:solidFill>
+                <a:latin typeface="Malgun Gothic" pitchFamily="34" charset="0"/>
+                <a:ea typeface="Malgun Gothic" pitchFamily="34" charset="-122"/>
+                <a:cs typeface="Malgun Gothic" pitchFamily="34" charset="-120"/>
+              </a:rPr>
+              <a:t>02</a:t>
+            </a:r>
+            <a:endParaRPr lang="en-US" sz="1631" dirty="0"/>
+          </a:p>
+        </p:txBody>
+      </p:sp>
+      <p:sp>
+        <p:nvSpPr>
+          <p:cNvPr id="23" name="Text 21"/>
+          <p:cNvSpPr txBox="1"/>
+          <p:nvPr/>
+        </p:nvSpPr>
+        <p:spPr>
+          <a:xfrm>
+            <a:off x="4265493" y="3899276"/>
+            <a:ext cx="3660892" cy="773400"/>
+          </a:xfrm>
+          <a:prstGeom prst="rect">
+            <a:avLst/>
+          </a:prstGeom>
+          <a:noFill/>
+          <a:ln/>
+        </p:spPr>
+        <p:txBody>
+          <a:bodyPr wrap="none" lIns="0" tIns="0" rIns="0" bIns="0" rtlCol="0" anchor="t"/>
+          <a:lstStyle/>
+          <a:p>
+            <a:pPr algn="ctr" indent="0" marL="0">
+              <a:lnSpc>
+                <a:spcPts val="6090"/>
+              </a:lnSpc>
+              <a:buNone/>
+            </a:pPr>
+            <a:r>
+              <a:rPr lang="en-US" sz="6090" b="1" spc="-54" kern="0" dirty="0">
+                <a:solidFill>
+                  <a:srgbClr val="38BDF8"/>
+                </a:solidFill>
+                <a:latin typeface="Malgun Gothic" pitchFamily="34" charset="0"/>
+                <a:ea typeface="Malgun Gothic" pitchFamily="34" charset="-122"/>
+                <a:cs typeface="Malgun Gothic" pitchFamily="34" charset="-120"/>
+              </a:rPr>
+              <a:t>142%</a:t>
+            </a:r>
+            <a:endParaRPr lang="en-US" sz="6090" dirty="0"/>
+          </a:p>
+        </p:txBody>
+      </p:sp>
+      <p:sp>
+        <p:nvSpPr>
+          <p:cNvPr id="24" name="Text 22"/>
+          <p:cNvSpPr txBox="1"/>
+          <p:nvPr/>
+        </p:nvSpPr>
+        <p:spPr>
+          <a:xfrm>
+            <a:off x="4265493" y="4728454"/>
+            <a:ext cx="3660892" cy="233172"/>
+          </a:xfrm>
+          <a:prstGeom prst="rect">
+            <a:avLst/>
+          </a:prstGeom>
+          <a:noFill/>
+          <a:ln/>
+        </p:spPr>
+        <p:txBody>
+          <a:bodyPr wrap="none" lIns="0" tIns="0" rIns="0" bIns="0" rtlCol="0" anchor="t"/>
+          <a:lstStyle/>
+          <a:p>
+            <a:pPr algn="ctr" indent="0" marL="0">
+              <a:lnSpc>
+                <a:spcPts val="1836"/>
+              </a:lnSpc>
+              <a:buNone/>
+            </a:pPr>
+            <a:r>
+              <a:rPr lang="en-US" sz="1224" b="1" spc="-54" kern="0" dirty="0">
+                <a:solidFill>
+                  <a:srgbClr val="FFFFFF"/>
+                </a:solidFill>
+                <a:latin typeface="Malgun Gothic" pitchFamily="34" charset="0"/>
+                <a:ea typeface="Malgun Gothic" pitchFamily="34" charset="-122"/>
+                <a:cs typeface="Malgun Gothic" pitchFamily="34" charset="-120"/>
+              </a:rPr>
+              <a:t>순매출 유지율 (NRR)</a:t>
+            </a:r>
+            <a:endParaRPr lang="en-US" sz="1224" dirty="0"/>
+          </a:p>
+        </p:txBody>
+      </p:sp>
+      <p:sp>
+        <p:nvSpPr>
+          <p:cNvPr id="25" name="Text 23"/>
+          <p:cNvSpPr txBox="1"/>
+          <p:nvPr/>
+        </p:nvSpPr>
+        <p:spPr>
+          <a:xfrm>
+            <a:off x="4265493" y="5020056"/>
+            <a:ext cx="3660892" cy="182880"/>
+          </a:xfrm>
+          <a:prstGeom prst="rect">
+            <a:avLst/>
+          </a:prstGeom>
+          <a:noFill/>
+          <a:ln/>
+        </p:spPr>
+        <p:txBody>
+          <a:bodyPr wrap="none" lIns="0" tIns="0" rIns="0" bIns="0" rtlCol="0" anchor="t"/>
+          <a:lstStyle/>
+          <a:p>
+            <a:pPr algn="ctr" indent="0" marL="0">
+              <a:lnSpc>
+                <a:spcPts val="1440"/>
+              </a:lnSpc>
+              <a:buNone/>
+            </a:pPr>
+            <a:r>
+              <a:rPr lang="en-US" sz="960" spc="-54" kern="0" dirty="0">
+                <a:solidFill>
+                  <a:srgbClr val="94A3B8"/>
+                </a:solidFill>
+                <a:latin typeface="Malgun Gothic" pitchFamily="34" charset="0"/>
+                <a:ea typeface="Malgun Gothic" pitchFamily="34" charset="-122"/>
+                <a:cs typeface="Malgun Gothic" pitchFamily="34" charset="-120"/>
+              </a:rPr>
+              <a:t>계정 확장(Upsell) 및 크로스셀을 통한 LTV 극대화</a:t>
+            </a:r>
+            <a:endParaRPr lang="en-US" sz="960" dirty="0"/>
+          </a:p>
+        </p:txBody>
+      </p:sp>
+      <p:sp>
+        <p:nvSpPr>
+          <p:cNvPr id="26" name="Shape 24"/>
+          <p:cNvSpPr/>
+          <p:nvPr/>
+        </p:nvSpPr>
+        <p:spPr>
+          <a:xfrm>
+            <a:off x="8045348" y="3376331"/>
+            <a:ext cx="3594141" cy="2027499"/>
+          </a:xfrm>
+          <a:prstGeom prst="roundRect">
+            <a:avLst>
+              <a:gd name="adj" fmla="val 6576"/>
+            </a:avLst>
+          </a:prstGeom>
+          <a:solidFill>
+            <a:srgbClr val="111A2E"/>
+          </a:solidFill>
+          <a:ln/>
+        </p:spPr>
+      </p:sp>
+      <p:sp>
+        <p:nvSpPr>
+          <p:cNvPr id="27" name="Shape 25"/>
+          <p:cNvSpPr/>
+          <p:nvPr/>
+        </p:nvSpPr>
+        <p:spPr>
+          <a:xfrm>
+            <a:off x="8045348" y="3376331"/>
+            <a:ext cx="3594141" cy="28621"/>
+          </a:xfrm>
+          <a:prstGeom prst="rect">
+            <a:avLst/>
+          </a:prstGeom>
+          <a:solidFill>
+            <a:srgbClr val="10B981"/>
+          </a:solidFill>
+          <a:ln/>
+        </p:spPr>
+      </p:sp>
+      <p:sp>
+        <p:nvSpPr>
+          <p:cNvPr id="28" name="Shape 26"/>
+          <p:cNvSpPr/>
+          <p:nvPr/>
+        </p:nvSpPr>
+        <p:spPr>
+          <a:xfrm>
+            <a:off x="11630071" y="3376331"/>
+            <a:ext cx="9510" cy="2027499"/>
+          </a:xfrm>
+          <a:prstGeom prst="rect">
+            <a:avLst/>
+          </a:prstGeom>
+          <a:solidFill>
+            <a:srgbClr val="FFFFFF">
+              <a:alpha val="10000"/>
+            </a:srgbClr>
+          </a:solidFill>
+          <a:ln/>
+        </p:spPr>
+      </p:sp>
+      <p:sp>
+        <p:nvSpPr>
+          <p:cNvPr id="29" name="Shape 27"/>
+          <p:cNvSpPr/>
+          <p:nvPr/>
+        </p:nvSpPr>
+        <p:spPr>
+          <a:xfrm>
+            <a:off x="8045348" y="5394320"/>
+            <a:ext cx="3594141" cy="9510"/>
+          </a:xfrm>
+          <a:prstGeom prst="rect">
+            <a:avLst/>
+          </a:prstGeom>
+          <a:solidFill>
+            <a:srgbClr val="FFFFFF">
+              <a:alpha val="10000"/>
+            </a:srgbClr>
+          </a:solidFill>
+          <a:ln/>
+        </p:spPr>
+      </p:sp>
+      <p:sp>
+        <p:nvSpPr>
+          <p:cNvPr id="30" name="Shape 28"/>
+          <p:cNvSpPr/>
+          <p:nvPr/>
+        </p:nvSpPr>
+        <p:spPr>
+          <a:xfrm>
+            <a:off x="8045348" y="3376331"/>
+            <a:ext cx="9510" cy="2027499"/>
+          </a:xfrm>
+          <a:prstGeom prst="rect">
+            <a:avLst/>
+          </a:prstGeom>
+          <a:solidFill>
+            <a:srgbClr val="FFFFFF">
+              <a:alpha val="10000"/>
+            </a:srgbClr>
+          </a:solidFill>
+          <a:ln/>
+        </p:spPr>
+      </p:sp>
+      <p:sp>
+        <p:nvSpPr>
+          <p:cNvPr id="31" name="Shape 29"/>
+          <p:cNvSpPr/>
+          <p:nvPr/>
+        </p:nvSpPr>
+        <p:spPr>
+          <a:xfrm>
+            <a:off x="9718609" y="3595421"/>
+            <a:ext cx="247620" cy="247620"/>
+          </a:xfrm>
+          <a:prstGeom prst="roundRect">
+            <a:avLst>
+              <a:gd name="adj" fmla="val 50000"/>
+            </a:avLst>
+          </a:prstGeom>
+          <a:solidFill>
+            <a:srgbClr val="10B981">
+              <a:alpha val="15000"/>
+            </a:srgbClr>
+          </a:solidFill>
+          <a:ln w="9525">
+            <a:solidFill>
+              <a:srgbClr val="10B981">
+                <a:alpha val="40000"/>
+              </a:srgbClr>
+            </a:solidFill>
+            <a:prstDash val="solid"/>
+          </a:ln>
+        </p:spPr>
+      </p:sp>
+      <p:sp>
+        <p:nvSpPr>
+          <p:cNvPr id="32" name="Text 30"/>
+          <p:cNvSpPr txBox="1"/>
+          <p:nvPr/>
+        </p:nvSpPr>
+        <p:spPr>
+          <a:xfrm>
+            <a:off x="9671060" y="3560856"/>
+            <a:ext cx="342900" cy="310805"/>
+          </a:xfrm>
+          <a:prstGeom prst="rect">
+            <a:avLst/>
+          </a:prstGeom>
+          <a:noFill/>
+          <a:ln/>
+        </p:spPr>
+        <p:txBody>
+          <a:bodyPr wrap="none" lIns="0" tIns="0" rIns="0" bIns="0" rtlCol="0" anchor="t"/>
+          <a:lstStyle/>
+          <a:p>
+            <a:pPr algn="ctr" indent="0" marL="0">
+              <a:lnSpc>
+                <a:spcPts val="2447"/>
+              </a:lnSpc>
+              <a:buNone/>
+            </a:pPr>
+            <a:r>
+              <a:rPr lang="en-US" sz="1631" b="1" spc="-54" kern="0" dirty="0">
+                <a:solidFill>
+                  <a:srgbClr val="10B981"/>
+                </a:solidFill>
+                <a:latin typeface="Malgun Gothic" pitchFamily="34" charset="0"/>
+                <a:ea typeface="Malgun Gothic" pitchFamily="34" charset="-122"/>
+                <a:cs typeface="Malgun Gothic" pitchFamily="34" charset="-120"/>
+              </a:rPr>
+              <a:t>03</a:t>
+            </a:r>
+            <a:endParaRPr lang="en-US" sz="1631" dirty="0"/>
+          </a:p>
+        </p:txBody>
+      </p:sp>
+      <p:sp>
+        <p:nvSpPr>
+          <p:cNvPr id="33" name="Text 31"/>
+          <p:cNvSpPr txBox="1"/>
+          <p:nvPr/>
+        </p:nvSpPr>
+        <p:spPr>
+          <a:xfrm>
+            <a:off x="8011973" y="3899276"/>
+            <a:ext cx="3660983" cy="773400"/>
+          </a:xfrm>
+          <a:prstGeom prst="rect">
+            <a:avLst/>
+          </a:prstGeom>
+          <a:noFill/>
+          <a:ln/>
+        </p:spPr>
+        <p:txBody>
+          <a:bodyPr wrap="none" lIns="0" tIns="0" rIns="0" bIns="0" rtlCol="0" anchor="t"/>
+          <a:lstStyle/>
+          <a:p>
+            <a:pPr algn="ctr" indent="0" marL="0">
+              <a:lnSpc>
+                <a:spcPts val="6090"/>
+              </a:lnSpc>
+              <a:buNone/>
+            </a:pPr>
+            <a:r>
+              <a:rPr lang="en-US" sz="6090" b="1" spc="-54" kern="0" dirty="0">
+                <a:solidFill>
+                  <a:srgbClr val="10B981"/>
+                </a:solidFill>
+                <a:latin typeface="Malgun Gothic" pitchFamily="34" charset="0"/>
+                <a:ea typeface="Malgun Gothic" pitchFamily="34" charset="-122"/>
+                <a:cs typeface="Malgun Gothic" pitchFamily="34" charset="-120"/>
+              </a:rPr>
+              <a:t>28.4%</a:t>
+            </a:r>
+            <a:endParaRPr lang="en-US" sz="6090" dirty="0"/>
+          </a:p>
+        </p:txBody>
+      </p:sp>
+      <p:sp>
+        <p:nvSpPr>
+          <p:cNvPr id="34" name="Text 32"/>
+          <p:cNvSpPr txBox="1"/>
+          <p:nvPr/>
+        </p:nvSpPr>
+        <p:spPr>
+          <a:xfrm>
+            <a:off x="8011973" y="4728454"/>
+            <a:ext cx="3660983" cy="233172"/>
+          </a:xfrm>
+          <a:prstGeom prst="rect">
+            <a:avLst/>
+          </a:prstGeom>
+          <a:noFill/>
+          <a:ln/>
+        </p:spPr>
+        <p:txBody>
+          <a:bodyPr wrap="none" lIns="0" tIns="0" rIns="0" bIns="0" rtlCol="0" anchor="t"/>
+          <a:lstStyle/>
+          <a:p>
+            <a:pPr algn="ctr" indent="0" marL="0">
+              <a:lnSpc>
+                <a:spcPts val="1836"/>
+              </a:lnSpc>
+              <a:buNone/>
+            </a:pPr>
+            <a:r>
+              <a:rPr lang="en-US" sz="1224" b="1" spc="-54" kern="0" dirty="0">
+                <a:solidFill>
+                  <a:srgbClr val="FFFFFF"/>
+                </a:solidFill>
+                <a:latin typeface="Malgun Gothic" pitchFamily="34" charset="0"/>
+                <a:ea typeface="Malgun Gothic" pitchFamily="34" charset="-122"/>
+                <a:cs typeface="Malgun Gothic" pitchFamily="34" charset="-120"/>
+              </a:rPr>
+              <a:t>목표 영업이익률</a:t>
+            </a:r>
+            <a:endParaRPr lang="en-US" sz="1224" dirty="0"/>
+          </a:p>
+        </p:txBody>
+      </p:sp>
+      <p:sp>
+        <p:nvSpPr>
+          <p:cNvPr id="35" name="Text 33"/>
+          <p:cNvSpPr txBox="1"/>
+          <p:nvPr/>
+        </p:nvSpPr>
+        <p:spPr>
+          <a:xfrm>
+            <a:off x="8011973" y="5020056"/>
+            <a:ext cx="3660983" cy="182880"/>
+          </a:xfrm>
+          <a:prstGeom prst="rect">
+            <a:avLst/>
+          </a:prstGeom>
+          <a:noFill/>
+          <a:ln/>
+        </p:spPr>
+        <p:txBody>
+          <a:bodyPr wrap="none" lIns="0" tIns="0" rIns="0" bIns="0" rtlCol="0" anchor="t"/>
+          <a:lstStyle/>
+          <a:p>
+            <a:pPr algn="ctr" indent="0" marL="0">
+              <a:lnSpc>
+                <a:spcPts val="1440"/>
+              </a:lnSpc>
+              <a:buNone/>
+            </a:pPr>
+            <a:r>
+              <a:rPr lang="en-US" sz="960" spc="-54" kern="0" dirty="0">
+                <a:solidFill>
+                  <a:srgbClr val="94A3B8"/>
+                </a:solidFill>
+                <a:latin typeface="Malgun Gothic" pitchFamily="34" charset="0"/>
+                <a:ea typeface="Malgun Gothic" pitchFamily="34" charset="-122"/>
+                <a:cs typeface="Malgun Gothic" pitchFamily="34" charset="-120"/>
+              </a:rPr>
+              <a:t>운영 자동화 파이프라인 도입을 통한 마진 구조 개선</a:t>
+            </a:r>
+            <a:endParaRPr lang="en-US" sz="960" dirty="0"/>
+          </a:p>
+        </p:txBody>
+      </p:sp>
     </p:spTree>
   </p:cSld>
   <p:clrMapOvr>
@@ -1424,16 +4230,9 @@
   <p:cSld name="Slide 4">
     <p:bg>
       <p:bgPr>
-        <a:blipFill dpi="0" rotWithShape="1">
-          <a:blip r:embed="rId1">
-            <a:lum/>
-          </a:blip>
-          <a:srcRect/>
-          <a:stretch>
-            <a:fillRect/>
-          </a:stretch>
-        </a:blipFill>
-        <a:effectLst/>
+        <a:solidFill>
+          <a:srgbClr val="38BDF8"/>
+        </a:solidFill>
       </p:bgPr>
     </p:bg>
     <p:spTree>
@@ -1450,6 +4249,1219 @@
           <a:chExt cx="0" cy="0"/>
         </a:xfrm>
       </p:grpSpPr>
+      <p:sp>
+        <p:nvSpPr>
+          <p:cNvPr id="2" name="Shape 0"/>
+          <p:cNvSpPr/>
+          <p:nvPr/>
+        </p:nvSpPr>
+        <p:spPr>
+          <a:xfrm>
+            <a:off x="552480" y="1353769"/>
+            <a:ext cx="1687982" cy="418521"/>
+          </a:xfrm>
+          <a:prstGeom prst="roundRect">
+            <a:avLst>
+              <a:gd name="adj" fmla="val 50011"/>
+            </a:avLst>
+          </a:prstGeom>
+          <a:solidFill>
+            <a:srgbClr val="F59E0B">
+              <a:alpha val="15000"/>
+            </a:srgbClr>
+          </a:solidFill>
+          <a:ln w="9525">
+            <a:solidFill>
+              <a:srgbClr val="F59E0B">
+                <a:alpha val="35000"/>
+              </a:srgbClr>
+            </a:solidFill>
+            <a:prstDash val="solid"/>
+          </a:ln>
+        </p:spPr>
+      </p:sp>
+      <p:sp>
+        <p:nvSpPr>
+          <p:cNvPr id="3" name="Text 1"/>
+          <p:cNvSpPr txBox="1"/>
+          <p:nvPr/>
+        </p:nvSpPr>
+        <p:spPr>
+          <a:xfrm>
+            <a:off x="676290" y="1396929"/>
+            <a:ext cx="1533540" cy="323149"/>
+          </a:xfrm>
+          <a:prstGeom prst="rect">
+            <a:avLst/>
+          </a:prstGeom>
+          <a:noFill/>
+          <a:ln/>
+        </p:spPr>
+        <p:txBody>
+          <a:bodyPr wrap="none" lIns="0" tIns="0" rIns="0" bIns="0" rtlCol="0" anchor="t"/>
+          <a:lstStyle/>
+          <a:p>
+            <a:pPr algn="l" indent="0" marL="0">
+              <a:lnSpc>
+                <a:spcPts val="2545"/>
+              </a:lnSpc>
+              <a:buNone/>
+            </a:pPr>
+            <a:r>
+              <a:rPr lang="en-US" sz="1697" b="1" spc="34" kern="0" dirty="0">
+                <a:solidFill>
+                  <a:srgbClr val="F59E0B"/>
+                </a:solidFill>
+                <a:latin typeface="Malgun Gothic" pitchFamily="34" charset="0"/>
+                <a:ea typeface="Malgun Gothic" pitchFamily="34" charset="-122"/>
+                <a:cs typeface="Malgun Gothic" pitchFamily="34" charset="-120"/>
+              </a:rPr>
+              <a:t>GTM FUNNEL</a:t>
+            </a:r>
+            <a:endParaRPr lang="en-US" sz="1697" dirty="0"/>
+          </a:p>
+        </p:txBody>
+      </p:sp>
+      <p:sp>
+        <p:nvSpPr>
+          <p:cNvPr id="4" name="Text 2"/>
+          <p:cNvSpPr txBox="1"/>
+          <p:nvPr/>
+        </p:nvSpPr>
+        <p:spPr>
+          <a:xfrm>
+            <a:off x="533370" y="1848460"/>
+            <a:ext cx="11993088" cy="590611"/>
+          </a:xfrm>
+          <a:prstGeom prst="rect">
+            <a:avLst/>
+          </a:prstGeom>
+          <a:noFill/>
+          <a:ln/>
+        </p:spPr>
+        <p:txBody>
+          <a:bodyPr wrap="none" lIns="0" tIns="0" rIns="0" bIns="0" rtlCol="0" anchor="t"/>
+          <a:lstStyle/>
+          <a:p>
+            <a:pPr algn="l" indent="0" marL="0">
+              <a:lnSpc>
+                <a:spcPts val="4651"/>
+              </a:lnSpc>
+              <a:buNone/>
+            </a:pPr>
+            <a:r>
+              <a:rPr lang="en-US" sz="3524" b="1" spc="-88" kern="0" dirty="0">
+                <a:solidFill>
+                  <a:srgbClr val="FFFFFF"/>
+                </a:solidFill>
+                <a:latin typeface="Malgun Gothic" pitchFamily="34" charset="0"/>
+                <a:ea typeface="Malgun Gothic" pitchFamily="34" charset="-122"/>
+                <a:cs typeface="Malgun Gothic" pitchFamily="34" charset="-120"/>
+              </a:rPr>
+              <a:t>엔터프라이즈 시장 공략을 위한 3단계 세일즈 퍼널</a:t>
+            </a:r>
+            <a:endParaRPr lang="en-US" sz="3524" dirty="0"/>
+          </a:p>
+        </p:txBody>
+      </p:sp>
+      <p:sp>
+        <p:nvSpPr>
+          <p:cNvPr id="5" name="Text 3"/>
+          <p:cNvSpPr txBox="1"/>
+          <p:nvPr/>
+        </p:nvSpPr>
+        <p:spPr>
+          <a:xfrm>
+            <a:off x="533370" y="2622133"/>
+            <a:ext cx="11993088" cy="397764"/>
+          </a:xfrm>
+          <a:prstGeom prst="rect">
+            <a:avLst/>
+          </a:prstGeom>
+          <a:noFill/>
+          <a:ln/>
+        </p:spPr>
+        <p:txBody>
+          <a:bodyPr wrap="none" lIns="0" tIns="0" rIns="0" bIns="0" rtlCol="0" anchor="t"/>
+          <a:lstStyle/>
+          <a:p>
+            <a:pPr algn="l" indent="0" marL="0">
+              <a:lnSpc>
+                <a:spcPts val="3132"/>
+              </a:lnSpc>
+              <a:buNone/>
+            </a:pPr>
+            <a:r>
+              <a:rPr lang="en-US" sz="2088" spc="-54" kern="0" dirty="0">
+                <a:solidFill>
+                  <a:srgbClr val="94A3B8"/>
+                </a:solidFill>
+                <a:latin typeface="Malgun Gothic" pitchFamily="34" charset="0"/>
+                <a:ea typeface="Malgun Gothic" pitchFamily="34" charset="-122"/>
+                <a:cs typeface="Malgun Gothic" pitchFamily="34" charset="-120"/>
+              </a:rPr>
+              <a:t>리드 발굴부터 유료 전환, 계정 확장까지 체계화된 B2B 파이프라인을 가동합니다.</a:t>
+            </a:r>
+            <a:endParaRPr lang="en-US" sz="2088" dirty="0"/>
+          </a:p>
+        </p:txBody>
+      </p:sp>
+      <p:sp>
+        <p:nvSpPr>
+          <p:cNvPr id="6" name="Shape 4"/>
+          <p:cNvSpPr/>
+          <p:nvPr/>
+        </p:nvSpPr>
+        <p:spPr>
+          <a:xfrm>
+            <a:off x="552480" y="3257001"/>
+            <a:ext cx="3594049" cy="2266158"/>
+          </a:xfrm>
+          <a:prstGeom prst="roundRect">
+            <a:avLst>
+              <a:gd name="adj" fmla="val 5883"/>
+            </a:avLst>
+          </a:prstGeom>
+          <a:solidFill>
+            <a:srgbClr val="111A2E"/>
+          </a:solidFill>
+          <a:ln/>
+        </p:spPr>
+      </p:sp>
+      <p:sp>
+        <p:nvSpPr>
+          <p:cNvPr id="7" name="Shape 5"/>
+          <p:cNvSpPr/>
+          <p:nvPr/>
+        </p:nvSpPr>
+        <p:spPr>
+          <a:xfrm>
+            <a:off x="552480" y="3257001"/>
+            <a:ext cx="3594049" cy="28621"/>
+          </a:xfrm>
+          <a:prstGeom prst="rect">
+            <a:avLst/>
+          </a:prstGeom>
+          <a:solidFill>
+            <a:srgbClr val="F59E0B"/>
+          </a:solidFill>
+          <a:ln/>
+        </p:spPr>
+      </p:sp>
+      <p:sp>
+        <p:nvSpPr>
+          <p:cNvPr id="8" name="Shape 6"/>
+          <p:cNvSpPr/>
+          <p:nvPr/>
+        </p:nvSpPr>
+        <p:spPr>
+          <a:xfrm>
+            <a:off x="4137020" y="3257001"/>
+            <a:ext cx="9510" cy="2266158"/>
+          </a:xfrm>
+          <a:prstGeom prst="rect">
+            <a:avLst/>
+          </a:prstGeom>
+          <a:solidFill>
+            <a:srgbClr val="FFFFFF">
+              <a:alpha val="10000"/>
+            </a:srgbClr>
+          </a:solidFill>
+          <a:ln/>
+        </p:spPr>
+      </p:sp>
+      <p:sp>
+        <p:nvSpPr>
+          <p:cNvPr id="9" name="Shape 7"/>
+          <p:cNvSpPr/>
+          <p:nvPr/>
+        </p:nvSpPr>
+        <p:spPr>
+          <a:xfrm>
+            <a:off x="552480" y="5513649"/>
+            <a:ext cx="3594049" cy="9510"/>
+          </a:xfrm>
+          <a:prstGeom prst="rect">
+            <a:avLst/>
+          </a:prstGeom>
+          <a:solidFill>
+            <a:srgbClr val="FFFFFF">
+              <a:alpha val="10000"/>
+            </a:srgbClr>
+          </a:solidFill>
+          <a:ln/>
+        </p:spPr>
+      </p:sp>
+      <p:sp>
+        <p:nvSpPr>
+          <p:cNvPr id="10" name="Shape 8"/>
+          <p:cNvSpPr/>
+          <p:nvPr/>
+        </p:nvSpPr>
+        <p:spPr>
+          <a:xfrm>
+            <a:off x="552480" y="3257001"/>
+            <a:ext cx="9510" cy="2266158"/>
+          </a:xfrm>
+          <a:prstGeom prst="rect">
+            <a:avLst/>
+          </a:prstGeom>
+          <a:solidFill>
+            <a:srgbClr val="FFFFFF">
+              <a:alpha val="10000"/>
+            </a:srgbClr>
+          </a:solidFill>
+          <a:ln/>
+        </p:spPr>
+      </p:sp>
+      <p:sp>
+        <p:nvSpPr>
+          <p:cNvPr id="11" name="Shape 9"/>
+          <p:cNvSpPr/>
+          <p:nvPr/>
+        </p:nvSpPr>
+        <p:spPr>
+          <a:xfrm>
+            <a:off x="771571" y="3476092"/>
+            <a:ext cx="247620" cy="247620"/>
+          </a:xfrm>
+          <a:prstGeom prst="roundRect">
+            <a:avLst>
+              <a:gd name="adj" fmla="val 50000"/>
+            </a:avLst>
+          </a:prstGeom>
+          <a:solidFill>
+            <a:srgbClr val="F59E0B">
+              <a:alpha val="15000"/>
+            </a:srgbClr>
+          </a:solidFill>
+          <a:ln w="9525">
+            <a:solidFill>
+              <a:srgbClr val="F59E0B">
+                <a:alpha val="40000"/>
+              </a:srgbClr>
+            </a:solidFill>
+            <a:prstDash val="solid"/>
+          </a:ln>
+        </p:spPr>
+      </p:sp>
+      <p:sp>
+        <p:nvSpPr>
+          <p:cNvPr id="12" name="Text 10"/>
+          <p:cNvSpPr txBox="1"/>
+          <p:nvPr/>
+        </p:nvSpPr>
+        <p:spPr>
+          <a:xfrm>
+            <a:off x="761970" y="3441436"/>
+            <a:ext cx="304770" cy="310805"/>
+          </a:xfrm>
+          <a:prstGeom prst="rect">
+            <a:avLst/>
+          </a:prstGeom>
+          <a:noFill/>
+          <a:ln/>
+        </p:spPr>
+        <p:txBody>
+          <a:bodyPr wrap="none" lIns="0" tIns="0" rIns="0" bIns="0" rtlCol="0" anchor="t"/>
+          <a:lstStyle/>
+          <a:p>
+            <a:pPr algn="l" indent="0" marL="0">
+              <a:lnSpc>
+                <a:spcPts val="2447"/>
+              </a:lnSpc>
+              <a:buNone/>
+            </a:pPr>
+            <a:r>
+              <a:rPr lang="en-US" sz="1631" b="1" spc="-54" kern="0" dirty="0">
+                <a:solidFill>
+                  <a:srgbClr val="F59E0B"/>
+                </a:solidFill>
+                <a:latin typeface="Malgun Gothic" pitchFamily="34" charset="0"/>
+                <a:ea typeface="Malgun Gothic" pitchFamily="34" charset="-122"/>
+                <a:cs typeface="Malgun Gothic" pitchFamily="34" charset="-120"/>
+              </a:rPr>
+              <a:t>01</a:t>
+            </a:r>
+            <a:endParaRPr lang="en-US" sz="1631" dirty="0"/>
+          </a:p>
+        </p:txBody>
+      </p:sp>
+      <p:sp>
+        <p:nvSpPr>
+          <p:cNvPr id="13" name="Text 11"/>
+          <p:cNvSpPr txBox="1"/>
+          <p:nvPr/>
+        </p:nvSpPr>
+        <p:spPr>
+          <a:xfrm>
+            <a:off x="752460" y="3797595"/>
+            <a:ext cx="3427446" cy="233172"/>
+          </a:xfrm>
+          <a:prstGeom prst="rect">
+            <a:avLst/>
+          </a:prstGeom>
+          <a:noFill/>
+          <a:ln/>
+        </p:spPr>
+        <p:txBody>
+          <a:bodyPr wrap="none" lIns="0" tIns="0" rIns="0" bIns="0" rtlCol="0" anchor="t"/>
+          <a:lstStyle/>
+          <a:p>
+            <a:pPr algn="l" indent="0" marL="0">
+              <a:lnSpc>
+                <a:spcPts val="1836"/>
+              </a:lnSpc>
+              <a:buNone/>
+            </a:pPr>
+            <a:r>
+              <a:rPr lang="en-US" sz="1224" b="1" spc="-54" kern="0" dirty="0">
+                <a:solidFill>
+                  <a:srgbClr val="FFFFFF"/>
+                </a:solidFill>
+                <a:latin typeface="Malgun Gothic" pitchFamily="34" charset="0"/>
+                <a:ea typeface="Malgun Gothic" pitchFamily="34" charset="-122"/>
+                <a:cs typeface="Malgun Gothic" pitchFamily="34" charset="-120"/>
+              </a:rPr>
+              <a:t>STAGE 1: Inbound Lead</a:t>
+            </a:r>
+            <a:endParaRPr lang="en-US" sz="1224" dirty="0"/>
+          </a:p>
+        </p:txBody>
+      </p:sp>
+      <p:sp>
+        <p:nvSpPr>
+          <p:cNvPr id="14" name="Text 12"/>
+          <p:cNvSpPr txBox="1"/>
+          <p:nvPr/>
+        </p:nvSpPr>
+        <p:spPr>
+          <a:xfrm>
+            <a:off x="904890" y="4137934"/>
+            <a:ext cx="3262854" cy="342534"/>
+          </a:xfrm>
+          <a:prstGeom prst="rect">
+            <a:avLst/>
+          </a:prstGeom>
+          <a:noFill/>
+          <a:ln/>
+        </p:spPr>
+        <p:txBody>
+          <a:bodyPr wrap="none" lIns="0" tIns="0" rIns="0" bIns="0" rtlCol="0" anchor="t"/>
+          <a:lstStyle/>
+          <a:p>
+            <a:pPr algn="l" marL="342900" indent="-342900">
+              <a:lnSpc>
+                <a:spcPts val="2697"/>
+              </a:lnSpc>
+              <a:buSzPct val="100000"/>
+              <a:buChar char="•"/>
+            </a:pPr>
+            <a:r>
+              <a:rPr lang="en-US" sz="1740" spc="-54" kern="0" dirty="0">
+                <a:solidFill>
+                  <a:srgbClr val="E2E8F0"/>
+                </a:solidFill>
+                <a:latin typeface="Malgun Gothic" pitchFamily="34" charset="0"/>
+                <a:ea typeface="Malgun Gothic" pitchFamily="34" charset="-122"/>
+                <a:cs typeface="Malgun Gothic" pitchFamily="34" charset="-120"/>
+              </a:rPr>
+              <a:t>기술 백서 및 솔루션 데모 배포</a:t>
+            </a:r>
+            <a:endParaRPr lang="en-US" sz="1740" dirty="0"/>
+          </a:p>
+        </p:txBody>
+      </p:sp>
+      <p:sp>
+        <p:nvSpPr>
+          <p:cNvPr id="15" name="Text 13"/>
+          <p:cNvSpPr txBox="1"/>
+          <p:nvPr/>
+        </p:nvSpPr>
+        <p:spPr>
+          <a:xfrm>
+            <a:off x="904890" y="4535607"/>
+            <a:ext cx="3262854" cy="342534"/>
+          </a:xfrm>
+          <a:prstGeom prst="rect">
+            <a:avLst/>
+          </a:prstGeom>
+          <a:noFill/>
+          <a:ln/>
+        </p:spPr>
+        <p:txBody>
+          <a:bodyPr wrap="none" lIns="0" tIns="0" rIns="0" bIns="0" rtlCol="0" anchor="t"/>
+          <a:lstStyle/>
+          <a:p>
+            <a:pPr algn="l" marL="342900" indent="-342900">
+              <a:lnSpc>
+                <a:spcPts val="2697"/>
+              </a:lnSpc>
+              <a:buSzPct val="100000"/>
+              <a:buChar char="•"/>
+            </a:pPr>
+            <a:r>
+              <a:rPr lang="en-US" sz="1740" spc="-54" kern="0" dirty="0">
+                <a:solidFill>
+                  <a:srgbClr val="E2E8F0"/>
+                </a:solidFill>
+                <a:latin typeface="Malgun Gothic" pitchFamily="34" charset="0"/>
+                <a:ea typeface="Malgun Gothic" pitchFamily="34" charset="-122"/>
+                <a:cs typeface="Malgun Gothic" pitchFamily="34" charset="-120"/>
+              </a:rPr>
+              <a:t>빅테크 컨퍼런스 스폰서십 참여</a:t>
+            </a:r>
+            <a:endParaRPr lang="en-US" sz="1740" dirty="0"/>
+          </a:p>
+        </p:txBody>
+      </p:sp>
+      <p:sp>
+        <p:nvSpPr>
+          <p:cNvPr id="16" name="Text 14"/>
+          <p:cNvSpPr txBox="1"/>
+          <p:nvPr/>
+        </p:nvSpPr>
+        <p:spPr>
+          <a:xfrm>
+            <a:off x="904890" y="4933279"/>
+            <a:ext cx="3262854" cy="342534"/>
+          </a:xfrm>
+          <a:prstGeom prst="rect">
+            <a:avLst/>
+          </a:prstGeom>
+          <a:noFill/>
+          <a:ln/>
+        </p:spPr>
+        <p:txBody>
+          <a:bodyPr wrap="none" lIns="0" tIns="0" rIns="0" bIns="0" rtlCol="0" anchor="t"/>
+          <a:lstStyle/>
+          <a:p>
+            <a:pPr algn="l" marL="342900" indent="-342900">
+              <a:lnSpc>
+                <a:spcPts val="2697"/>
+              </a:lnSpc>
+              <a:buSzPct val="100000"/>
+              <a:buChar char="•"/>
+            </a:pPr>
+            <a:r>
+              <a:rPr lang="en-US" sz="1740" spc="-54" kern="0" dirty="0">
+                <a:solidFill>
+                  <a:srgbClr val="E2E8F0"/>
+                </a:solidFill>
+                <a:latin typeface="Malgun Gothic" pitchFamily="34" charset="0"/>
+                <a:ea typeface="Malgun Gothic" pitchFamily="34" charset="-122"/>
+                <a:cs typeface="Malgun Gothic" pitchFamily="34" charset="-120"/>
+              </a:rPr>
+              <a:t>월 450+ 검증된 리드(MQL) 확보</a:t>
+            </a:r>
+            <a:endParaRPr lang="en-US" sz="1740" dirty="0"/>
+          </a:p>
+        </p:txBody>
+      </p:sp>
+      <p:sp>
+        <p:nvSpPr>
+          <p:cNvPr id="17" name="Shape 15"/>
+          <p:cNvSpPr/>
+          <p:nvPr/>
+        </p:nvSpPr>
+        <p:spPr>
+          <a:xfrm>
+            <a:off x="4298960" y="3257001"/>
+            <a:ext cx="3594049" cy="2266158"/>
+          </a:xfrm>
+          <a:prstGeom prst="roundRect">
+            <a:avLst>
+              <a:gd name="adj" fmla="val 5883"/>
+            </a:avLst>
+          </a:prstGeom>
+          <a:solidFill>
+            <a:srgbClr val="111A2E"/>
+          </a:solidFill>
+          <a:ln/>
+        </p:spPr>
+      </p:sp>
+      <p:sp>
+        <p:nvSpPr>
+          <p:cNvPr id="18" name="Shape 16"/>
+          <p:cNvSpPr/>
+          <p:nvPr/>
+        </p:nvSpPr>
+        <p:spPr>
+          <a:xfrm>
+            <a:off x="4298960" y="3257001"/>
+            <a:ext cx="3594049" cy="28621"/>
+          </a:xfrm>
+          <a:prstGeom prst="rect">
+            <a:avLst/>
+          </a:prstGeom>
+          <a:solidFill>
+            <a:srgbClr val="38BDF8"/>
+          </a:solidFill>
+          <a:ln/>
+        </p:spPr>
+      </p:sp>
+      <p:sp>
+        <p:nvSpPr>
+          <p:cNvPr id="19" name="Shape 17"/>
+          <p:cNvSpPr/>
+          <p:nvPr/>
+        </p:nvSpPr>
+        <p:spPr>
+          <a:xfrm>
+            <a:off x="7883500" y="3257001"/>
+            <a:ext cx="9510" cy="2266158"/>
+          </a:xfrm>
+          <a:prstGeom prst="rect">
+            <a:avLst/>
+          </a:prstGeom>
+          <a:solidFill>
+            <a:srgbClr val="FFFFFF">
+              <a:alpha val="10000"/>
+            </a:srgbClr>
+          </a:solidFill>
+          <a:ln/>
+        </p:spPr>
+      </p:sp>
+      <p:sp>
+        <p:nvSpPr>
+          <p:cNvPr id="20" name="Shape 18"/>
+          <p:cNvSpPr/>
+          <p:nvPr/>
+        </p:nvSpPr>
+        <p:spPr>
+          <a:xfrm>
+            <a:off x="4298960" y="5513649"/>
+            <a:ext cx="3594049" cy="9510"/>
+          </a:xfrm>
+          <a:prstGeom prst="rect">
+            <a:avLst/>
+          </a:prstGeom>
+          <a:solidFill>
+            <a:srgbClr val="FFFFFF">
+              <a:alpha val="10000"/>
+            </a:srgbClr>
+          </a:solidFill>
+          <a:ln/>
+        </p:spPr>
+      </p:sp>
+      <p:sp>
+        <p:nvSpPr>
+          <p:cNvPr id="21" name="Shape 19"/>
+          <p:cNvSpPr/>
+          <p:nvPr/>
+        </p:nvSpPr>
+        <p:spPr>
+          <a:xfrm>
+            <a:off x="4298960" y="3257001"/>
+            <a:ext cx="9510" cy="2266158"/>
+          </a:xfrm>
+          <a:prstGeom prst="rect">
+            <a:avLst/>
+          </a:prstGeom>
+          <a:solidFill>
+            <a:srgbClr val="FFFFFF">
+              <a:alpha val="10000"/>
+            </a:srgbClr>
+          </a:solidFill>
+          <a:ln/>
+        </p:spPr>
+      </p:sp>
+      <p:sp>
+        <p:nvSpPr>
+          <p:cNvPr id="22" name="Shape 20"/>
+          <p:cNvSpPr/>
+          <p:nvPr/>
+        </p:nvSpPr>
+        <p:spPr>
+          <a:xfrm>
+            <a:off x="4517959" y="3476092"/>
+            <a:ext cx="247620" cy="247620"/>
+          </a:xfrm>
+          <a:prstGeom prst="roundRect">
+            <a:avLst>
+              <a:gd name="adj" fmla="val 50000"/>
+            </a:avLst>
+          </a:prstGeom>
+          <a:solidFill>
+            <a:srgbClr val="38BDF8">
+              <a:alpha val="15000"/>
+            </a:srgbClr>
+          </a:solidFill>
+          <a:ln w="9525">
+            <a:solidFill>
+              <a:srgbClr val="38BDF8">
+                <a:alpha val="40000"/>
+              </a:srgbClr>
+            </a:solidFill>
+            <a:prstDash val="solid"/>
+          </a:ln>
+        </p:spPr>
+      </p:sp>
+      <p:sp>
+        <p:nvSpPr>
+          <p:cNvPr id="23" name="Text 21"/>
+          <p:cNvSpPr txBox="1"/>
+          <p:nvPr/>
+        </p:nvSpPr>
+        <p:spPr>
+          <a:xfrm>
+            <a:off x="4508449" y="3441436"/>
+            <a:ext cx="304770" cy="310805"/>
+          </a:xfrm>
+          <a:prstGeom prst="rect">
+            <a:avLst/>
+          </a:prstGeom>
+          <a:noFill/>
+          <a:ln/>
+        </p:spPr>
+        <p:txBody>
+          <a:bodyPr wrap="none" lIns="0" tIns="0" rIns="0" bIns="0" rtlCol="0" anchor="t"/>
+          <a:lstStyle/>
+          <a:p>
+            <a:pPr algn="l" indent="0" marL="0">
+              <a:lnSpc>
+                <a:spcPts val="2447"/>
+              </a:lnSpc>
+              <a:buNone/>
+            </a:pPr>
+            <a:r>
+              <a:rPr lang="en-US" sz="1631" b="1" spc="-54" kern="0" dirty="0">
+                <a:solidFill>
+                  <a:srgbClr val="38BDF8"/>
+                </a:solidFill>
+                <a:latin typeface="Malgun Gothic" pitchFamily="34" charset="0"/>
+                <a:ea typeface="Malgun Gothic" pitchFamily="34" charset="-122"/>
+                <a:cs typeface="Malgun Gothic" pitchFamily="34" charset="-120"/>
+              </a:rPr>
+              <a:t>02</a:t>
+            </a:r>
+            <a:endParaRPr lang="en-US" sz="1631" dirty="0"/>
+          </a:p>
+        </p:txBody>
+      </p:sp>
+      <p:sp>
+        <p:nvSpPr>
+          <p:cNvPr id="24" name="Text 22"/>
+          <p:cNvSpPr txBox="1"/>
+          <p:nvPr/>
+        </p:nvSpPr>
+        <p:spPr>
+          <a:xfrm>
+            <a:off x="4498939" y="3797595"/>
+            <a:ext cx="3427446" cy="233172"/>
+          </a:xfrm>
+          <a:prstGeom prst="rect">
+            <a:avLst/>
+          </a:prstGeom>
+          <a:noFill/>
+          <a:ln/>
+        </p:spPr>
+        <p:txBody>
+          <a:bodyPr wrap="none" lIns="0" tIns="0" rIns="0" bIns="0" rtlCol="0" anchor="t"/>
+          <a:lstStyle/>
+          <a:p>
+            <a:pPr algn="l" indent="0" marL="0">
+              <a:lnSpc>
+                <a:spcPts val="1836"/>
+              </a:lnSpc>
+              <a:buNone/>
+            </a:pPr>
+            <a:r>
+              <a:rPr lang="en-US" sz="1224" b="1" spc="-54" kern="0" dirty="0">
+                <a:solidFill>
+                  <a:srgbClr val="FFFFFF"/>
+                </a:solidFill>
+                <a:latin typeface="Malgun Gothic" pitchFamily="34" charset="0"/>
+                <a:ea typeface="Malgun Gothic" pitchFamily="34" charset="-122"/>
+                <a:cs typeface="Malgun Gothic" pitchFamily="34" charset="-120"/>
+              </a:rPr>
+              <a:t>STAGE 2: Fast-Track PoC</a:t>
+            </a:r>
+            <a:endParaRPr lang="en-US" sz="1224" dirty="0"/>
+          </a:p>
+        </p:txBody>
+      </p:sp>
+      <p:sp>
+        <p:nvSpPr>
+          <p:cNvPr id="25" name="Text 23"/>
+          <p:cNvSpPr txBox="1"/>
+          <p:nvPr/>
+        </p:nvSpPr>
+        <p:spPr>
+          <a:xfrm>
+            <a:off x="4651370" y="4137934"/>
+            <a:ext cx="3262854" cy="342534"/>
+          </a:xfrm>
+          <a:prstGeom prst="rect">
+            <a:avLst/>
+          </a:prstGeom>
+          <a:noFill/>
+          <a:ln/>
+        </p:spPr>
+        <p:txBody>
+          <a:bodyPr wrap="none" lIns="0" tIns="0" rIns="0" bIns="0" rtlCol="0" anchor="t"/>
+          <a:lstStyle/>
+          <a:p>
+            <a:pPr algn="l" marL="342900" indent="-342900">
+              <a:lnSpc>
+                <a:spcPts val="2697"/>
+              </a:lnSpc>
+              <a:buSzPct val="100000"/>
+              <a:buChar char="•"/>
+            </a:pPr>
+            <a:r>
+              <a:rPr lang="en-US" sz="1740" spc="-54" kern="0" dirty="0">
+                <a:solidFill>
+                  <a:srgbClr val="E2E8F0"/>
+                </a:solidFill>
+                <a:latin typeface="Malgun Gothic" pitchFamily="34" charset="0"/>
+                <a:ea typeface="Malgun Gothic" pitchFamily="34" charset="-122"/>
+                <a:cs typeface="Malgun Gothic" pitchFamily="34" charset="-120"/>
+              </a:rPr>
+              <a:t>2주 완성 맞춤형 프로토타입 검증</a:t>
+            </a:r>
+            <a:endParaRPr lang="en-US" sz="1740" dirty="0"/>
+          </a:p>
+        </p:txBody>
+      </p:sp>
+      <p:sp>
+        <p:nvSpPr>
+          <p:cNvPr id="26" name="Text 24"/>
+          <p:cNvSpPr txBox="1"/>
+          <p:nvPr/>
+        </p:nvSpPr>
+        <p:spPr>
+          <a:xfrm>
+            <a:off x="4651370" y="4535607"/>
+            <a:ext cx="3262854" cy="342534"/>
+          </a:xfrm>
+          <a:prstGeom prst="rect">
+            <a:avLst/>
+          </a:prstGeom>
+          <a:noFill/>
+          <a:ln/>
+        </p:spPr>
+        <p:txBody>
+          <a:bodyPr wrap="none" lIns="0" tIns="0" rIns="0" bIns="0" rtlCol="0" anchor="t"/>
+          <a:lstStyle/>
+          <a:p>
+            <a:pPr algn="l" marL="342900" indent="-342900">
+              <a:lnSpc>
+                <a:spcPts val="2697"/>
+              </a:lnSpc>
+              <a:buSzPct val="100000"/>
+              <a:buChar char="•"/>
+            </a:pPr>
+            <a:r>
+              <a:rPr lang="en-US" sz="1740" spc="-54" kern="0" dirty="0">
+                <a:solidFill>
+                  <a:srgbClr val="E2E8F0"/>
+                </a:solidFill>
+                <a:latin typeface="Malgun Gothic" pitchFamily="34" charset="0"/>
+                <a:ea typeface="Malgun Gothic" pitchFamily="34" charset="-122"/>
+                <a:cs typeface="Malgun Gothic" pitchFamily="34" charset="-120"/>
+              </a:rPr>
+              <a:t>전담 솔루션 아키텍트 밀착 기술지원</a:t>
+            </a:r>
+            <a:endParaRPr lang="en-US" sz="1740" dirty="0"/>
+          </a:p>
+        </p:txBody>
+      </p:sp>
+      <p:sp>
+        <p:nvSpPr>
+          <p:cNvPr id="27" name="Text 25"/>
+          <p:cNvSpPr txBox="1"/>
+          <p:nvPr/>
+        </p:nvSpPr>
+        <p:spPr>
+          <a:xfrm>
+            <a:off x="4651370" y="4933279"/>
+            <a:ext cx="3262854" cy="342534"/>
+          </a:xfrm>
+          <a:prstGeom prst="rect">
+            <a:avLst/>
+          </a:prstGeom>
+          <a:noFill/>
+          <a:ln/>
+        </p:spPr>
+        <p:txBody>
+          <a:bodyPr wrap="none" lIns="0" tIns="0" rIns="0" bIns="0" rtlCol="0" anchor="t"/>
+          <a:lstStyle/>
+          <a:p>
+            <a:pPr algn="l" marL="342900" indent="-342900">
+              <a:lnSpc>
+                <a:spcPts val="2697"/>
+              </a:lnSpc>
+              <a:buSzPct val="100000"/>
+              <a:buChar char="•"/>
+            </a:pPr>
+            <a:r>
+              <a:rPr lang="en-US" sz="1740" spc="-54" kern="0" dirty="0">
+                <a:solidFill>
+                  <a:srgbClr val="E2E8F0"/>
+                </a:solidFill>
+                <a:latin typeface="Malgun Gothic" pitchFamily="34" charset="0"/>
+                <a:ea typeface="Malgun Gothic" pitchFamily="34" charset="-122"/>
+                <a:cs typeface="Malgun Gothic" pitchFamily="34" charset="-120"/>
+              </a:rPr>
+              <a:t>PoC 완료 후 본 계약 전환율 65%</a:t>
+            </a:r>
+            <a:endParaRPr lang="en-US" sz="1740" dirty="0"/>
+          </a:p>
+        </p:txBody>
+      </p:sp>
+      <p:sp>
+        <p:nvSpPr>
+          <p:cNvPr id="28" name="Shape 26"/>
+          <p:cNvSpPr/>
+          <p:nvPr/>
+        </p:nvSpPr>
+        <p:spPr>
+          <a:xfrm>
+            <a:off x="8045348" y="3257001"/>
+            <a:ext cx="3594141" cy="2266158"/>
+          </a:xfrm>
+          <a:prstGeom prst="roundRect">
+            <a:avLst>
+              <a:gd name="adj" fmla="val 5883"/>
+            </a:avLst>
+          </a:prstGeom>
+          <a:solidFill>
+            <a:srgbClr val="111A2E"/>
+          </a:solidFill>
+          <a:ln/>
+        </p:spPr>
+      </p:sp>
+      <p:sp>
+        <p:nvSpPr>
+          <p:cNvPr id="29" name="Shape 27"/>
+          <p:cNvSpPr/>
+          <p:nvPr/>
+        </p:nvSpPr>
+        <p:spPr>
+          <a:xfrm>
+            <a:off x="8045348" y="3257001"/>
+            <a:ext cx="3594141" cy="28621"/>
+          </a:xfrm>
+          <a:prstGeom prst="rect">
+            <a:avLst/>
+          </a:prstGeom>
+          <a:solidFill>
+            <a:srgbClr val="10B981"/>
+          </a:solidFill>
+          <a:ln/>
+        </p:spPr>
+      </p:sp>
+      <p:sp>
+        <p:nvSpPr>
+          <p:cNvPr id="30" name="Shape 28"/>
+          <p:cNvSpPr/>
+          <p:nvPr/>
+        </p:nvSpPr>
+        <p:spPr>
+          <a:xfrm>
+            <a:off x="11630071" y="3257001"/>
+            <a:ext cx="9510" cy="2266158"/>
+          </a:xfrm>
+          <a:prstGeom prst="rect">
+            <a:avLst/>
+          </a:prstGeom>
+          <a:solidFill>
+            <a:srgbClr val="FFFFFF">
+              <a:alpha val="10000"/>
+            </a:srgbClr>
+          </a:solidFill>
+          <a:ln/>
+        </p:spPr>
+      </p:sp>
+      <p:sp>
+        <p:nvSpPr>
+          <p:cNvPr id="31" name="Shape 29"/>
+          <p:cNvSpPr/>
+          <p:nvPr/>
+        </p:nvSpPr>
+        <p:spPr>
+          <a:xfrm>
+            <a:off x="8045348" y="5513649"/>
+            <a:ext cx="3594141" cy="9510"/>
+          </a:xfrm>
+          <a:prstGeom prst="rect">
+            <a:avLst/>
+          </a:prstGeom>
+          <a:solidFill>
+            <a:srgbClr val="FFFFFF">
+              <a:alpha val="10000"/>
+            </a:srgbClr>
+          </a:solidFill>
+          <a:ln/>
+        </p:spPr>
+      </p:sp>
+      <p:sp>
+        <p:nvSpPr>
+          <p:cNvPr id="32" name="Shape 30"/>
+          <p:cNvSpPr/>
+          <p:nvPr/>
+        </p:nvSpPr>
+        <p:spPr>
+          <a:xfrm>
+            <a:off x="8045348" y="3257001"/>
+            <a:ext cx="9510" cy="2266158"/>
+          </a:xfrm>
+          <a:prstGeom prst="rect">
+            <a:avLst/>
+          </a:prstGeom>
+          <a:solidFill>
+            <a:srgbClr val="FFFFFF">
+              <a:alpha val="10000"/>
+            </a:srgbClr>
+          </a:solidFill>
+          <a:ln/>
+        </p:spPr>
+      </p:sp>
+      <p:sp>
+        <p:nvSpPr>
+          <p:cNvPr id="33" name="Shape 31"/>
+          <p:cNvSpPr/>
+          <p:nvPr/>
+        </p:nvSpPr>
+        <p:spPr>
+          <a:xfrm>
+            <a:off x="8264439" y="3476092"/>
+            <a:ext cx="247620" cy="247620"/>
+          </a:xfrm>
+          <a:prstGeom prst="roundRect">
+            <a:avLst>
+              <a:gd name="adj" fmla="val 50000"/>
+            </a:avLst>
+          </a:prstGeom>
+          <a:solidFill>
+            <a:srgbClr val="10B981">
+              <a:alpha val="15000"/>
+            </a:srgbClr>
+          </a:solidFill>
+          <a:ln w="9525">
+            <a:solidFill>
+              <a:srgbClr val="10B981">
+                <a:alpha val="40000"/>
+              </a:srgbClr>
+            </a:solidFill>
+            <a:prstDash val="solid"/>
+          </a:ln>
+        </p:spPr>
+      </p:sp>
+      <p:sp>
+        <p:nvSpPr>
+          <p:cNvPr id="34" name="Text 32"/>
+          <p:cNvSpPr txBox="1"/>
+          <p:nvPr/>
+        </p:nvSpPr>
+        <p:spPr>
+          <a:xfrm>
+            <a:off x="8254929" y="3441436"/>
+            <a:ext cx="304770" cy="310805"/>
+          </a:xfrm>
+          <a:prstGeom prst="rect">
+            <a:avLst/>
+          </a:prstGeom>
+          <a:noFill/>
+          <a:ln/>
+        </p:spPr>
+        <p:txBody>
+          <a:bodyPr wrap="none" lIns="0" tIns="0" rIns="0" bIns="0" rtlCol="0" anchor="t"/>
+          <a:lstStyle/>
+          <a:p>
+            <a:pPr algn="l" indent="0" marL="0">
+              <a:lnSpc>
+                <a:spcPts val="2447"/>
+              </a:lnSpc>
+              <a:buNone/>
+            </a:pPr>
+            <a:r>
+              <a:rPr lang="en-US" sz="1631" b="1" spc="-54" kern="0" dirty="0">
+                <a:solidFill>
+                  <a:srgbClr val="10B981"/>
+                </a:solidFill>
+                <a:latin typeface="Malgun Gothic" pitchFamily="34" charset="0"/>
+                <a:ea typeface="Malgun Gothic" pitchFamily="34" charset="-122"/>
+                <a:cs typeface="Malgun Gothic" pitchFamily="34" charset="-120"/>
+              </a:rPr>
+              <a:t>03</a:t>
+            </a:r>
+            <a:endParaRPr lang="en-US" sz="1631" dirty="0"/>
+          </a:p>
+        </p:txBody>
+      </p:sp>
+      <p:sp>
+        <p:nvSpPr>
+          <p:cNvPr id="35" name="Text 33"/>
+          <p:cNvSpPr txBox="1"/>
+          <p:nvPr/>
+        </p:nvSpPr>
+        <p:spPr>
+          <a:xfrm>
+            <a:off x="8245419" y="3797595"/>
+            <a:ext cx="3427537" cy="233172"/>
+          </a:xfrm>
+          <a:prstGeom prst="rect">
+            <a:avLst/>
+          </a:prstGeom>
+          <a:noFill/>
+          <a:ln/>
+        </p:spPr>
+        <p:txBody>
+          <a:bodyPr wrap="none" lIns="0" tIns="0" rIns="0" bIns="0" rtlCol="0" anchor="t"/>
+          <a:lstStyle/>
+          <a:p>
+            <a:pPr algn="l" indent="0" marL="0">
+              <a:lnSpc>
+                <a:spcPts val="1836"/>
+              </a:lnSpc>
+              <a:buNone/>
+            </a:pPr>
+            <a:r>
+              <a:rPr lang="en-US" sz="1224" b="1" spc="-54" kern="0" dirty="0">
+                <a:solidFill>
+                  <a:srgbClr val="FFFFFF"/>
+                </a:solidFill>
+                <a:latin typeface="Malgun Gothic" pitchFamily="34" charset="0"/>
+                <a:ea typeface="Malgun Gothic" pitchFamily="34" charset="-122"/>
+                <a:cs typeface="Malgun Gothic" pitchFamily="34" charset="-120"/>
+              </a:rPr>
+              <a:t>STAGE 3: Land &amp; Expand</a:t>
+            </a:r>
+            <a:endParaRPr lang="en-US" sz="1224" dirty="0"/>
+          </a:p>
+        </p:txBody>
+      </p:sp>
+      <p:sp>
+        <p:nvSpPr>
+          <p:cNvPr id="36" name="Text 34"/>
+          <p:cNvSpPr txBox="1"/>
+          <p:nvPr/>
+        </p:nvSpPr>
+        <p:spPr>
+          <a:xfrm>
+            <a:off x="8397850" y="4137934"/>
+            <a:ext cx="3262945" cy="342534"/>
+          </a:xfrm>
+          <a:prstGeom prst="rect">
+            <a:avLst/>
+          </a:prstGeom>
+          <a:noFill/>
+          <a:ln/>
+        </p:spPr>
+        <p:txBody>
+          <a:bodyPr wrap="none" lIns="0" tIns="0" rIns="0" bIns="0" rtlCol="0" anchor="t"/>
+          <a:lstStyle/>
+          <a:p>
+            <a:pPr algn="l" marL="342900" indent="-342900">
+              <a:lnSpc>
+                <a:spcPts val="2697"/>
+              </a:lnSpc>
+              <a:buSzPct val="100000"/>
+              <a:buChar char="•"/>
+            </a:pPr>
+            <a:r>
+              <a:rPr lang="en-US" sz="1740" spc="-54" kern="0" dirty="0">
+                <a:solidFill>
+                  <a:srgbClr val="E2E8F0"/>
+                </a:solidFill>
+                <a:latin typeface="Malgun Gothic" pitchFamily="34" charset="0"/>
+                <a:ea typeface="Malgun Gothic" pitchFamily="34" charset="-122"/>
+                <a:cs typeface="Malgun Gothic" pitchFamily="34" charset="-120"/>
+              </a:rPr>
+              <a:t>전사 부서 단위 라이선스 확장</a:t>
+            </a:r>
+            <a:endParaRPr lang="en-US" sz="1740" dirty="0"/>
+          </a:p>
+        </p:txBody>
+      </p:sp>
+      <p:sp>
+        <p:nvSpPr>
+          <p:cNvPr id="37" name="Text 35"/>
+          <p:cNvSpPr txBox="1"/>
+          <p:nvPr/>
+        </p:nvSpPr>
+        <p:spPr>
+          <a:xfrm>
+            <a:off x="8397850" y="4535607"/>
+            <a:ext cx="3262945" cy="342534"/>
+          </a:xfrm>
+          <a:prstGeom prst="rect">
+            <a:avLst/>
+          </a:prstGeom>
+          <a:noFill/>
+          <a:ln/>
+        </p:spPr>
+        <p:txBody>
+          <a:bodyPr wrap="none" lIns="0" tIns="0" rIns="0" bIns="0" rtlCol="0" anchor="t"/>
+          <a:lstStyle/>
+          <a:p>
+            <a:pPr algn="l" marL="342900" indent="-342900">
+              <a:lnSpc>
+                <a:spcPts val="2697"/>
+              </a:lnSpc>
+              <a:buSzPct val="100000"/>
+              <a:buChar char="•"/>
+            </a:pPr>
+            <a:r>
+              <a:rPr lang="en-US" sz="1740" spc="-54" kern="0" dirty="0">
+                <a:solidFill>
+                  <a:srgbClr val="E2E8F0"/>
+                </a:solidFill>
+                <a:latin typeface="Malgun Gothic" pitchFamily="34" charset="0"/>
+                <a:ea typeface="Malgun Gothic" pitchFamily="34" charset="-122"/>
+                <a:cs typeface="Malgun Gothic" pitchFamily="34" charset="-120"/>
+              </a:rPr>
+              <a:t>연간 계약 전환 시 다년 할인 제공</a:t>
+            </a:r>
+            <a:endParaRPr lang="en-US" sz="1740" dirty="0"/>
+          </a:p>
+        </p:txBody>
+      </p:sp>
+      <p:sp>
+        <p:nvSpPr>
+          <p:cNvPr id="38" name="Text 36"/>
+          <p:cNvSpPr txBox="1"/>
+          <p:nvPr/>
+        </p:nvSpPr>
+        <p:spPr>
+          <a:xfrm>
+            <a:off x="8397850" y="4933279"/>
+            <a:ext cx="3262945" cy="342534"/>
+          </a:xfrm>
+          <a:prstGeom prst="rect">
+            <a:avLst/>
+          </a:prstGeom>
+          <a:noFill/>
+          <a:ln/>
+        </p:spPr>
+        <p:txBody>
+          <a:bodyPr wrap="none" lIns="0" tIns="0" rIns="0" bIns="0" rtlCol="0" anchor="t"/>
+          <a:lstStyle/>
+          <a:p>
+            <a:pPr algn="l" marL="342900" indent="-342900">
+              <a:lnSpc>
+                <a:spcPts val="2697"/>
+              </a:lnSpc>
+              <a:buSzPct val="100000"/>
+              <a:buChar char="•"/>
+            </a:pPr>
+            <a:r>
+              <a:rPr lang="en-US" sz="1740" spc="-54" kern="0" dirty="0">
+                <a:solidFill>
+                  <a:srgbClr val="E2E8F0"/>
+                </a:solidFill>
+                <a:latin typeface="Malgun Gothic" pitchFamily="34" charset="0"/>
+                <a:ea typeface="Malgun Gothic" pitchFamily="34" charset="-122"/>
+                <a:cs typeface="Malgun Gothic" pitchFamily="34" charset="-120"/>
+              </a:rPr>
+              <a:t>평균 계약 규모(ACV) 2.4배 증대</a:t>
+            </a:r>
+            <a:endParaRPr lang="en-US" sz="1740" dirty="0"/>
+          </a:p>
+        </p:txBody>
+      </p:sp>
     </p:spTree>
   </p:cSld>
   <p:clrMapOvr>
@@ -1463,16 +5475,9 @@
   <p:cSld name="Slide 5">
     <p:bg>
       <p:bgPr>
-        <a:blipFill dpi="0" rotWithShape="1">
-          <a:blip r:embed="rId1">
-            <a:lum/>
-          </a:blip>
-          <a:srcRect/>
-          <a:stretch>
-            <a:fillRect/>
-          </a:stretch>
-        </a:blipFill>
-        <a:effectLst/>
+        <a:solidFill>
+          <a:srgbClr val="38BDF8"/>
+        </a:solidFill>
       </p:bgPr>
     </p:bg>
     <p:spTree>
@@ -1489,6 +5494,665 @@
           <a:chExt cx="0" cy="0"/>
         </a:xfrm>
       </p:grpSpPr>
+      <p:sp>
+        <p:nvSpPr>
+          <p:cNvPr id="2" name="Shape 0"/>
+          <p:cNvSpPr/>
+          <p:nvPr/>
+        </p:nvSpPr>
+        <p:spPr>
+          <a:xfrm>
+            <a:off x="4990064" y="1787561"/>
+            <a:ext cx="2211934" cy="418521"/>
+          </a:xfrm>
+          <a:prstGeom prst="roundRect">
+            <a:avLst>
+              <a:gd name="adj" fmla="val 50011"/>
+            </a:avLst>
+          </a:prstGeom>
+          <a:solidFill>
+            <a:srgbClr val="F59E0B">
+              <a:alpha val="15000"/>
+            </a:srgbClr>
+          </a:solidFill>
+          <a:ln w="9525">
+            <a:solidFill>
+              <a:srgbClr val="F59E0B">
+                <a:alpha val="35000"/>
+              </a:srgbClr>
+            </a:solidFill>
+            <a:prstDash val="solid"/>
+          </a:ln>
+        </p:spPr>
+      </p:sp>
+      <p:sp>
+        <p:nvSpPr>
+          <p:cNvPr id="3" name="Text 1"/>
+          <p:cNvSpPr txBox="1"/>
+          <p:nvPr/>
+        </p:nvSpPr>
+        <p:spPr>
+          <a:xfrm>
+            <a:off x="4978817" y="1830812"/>
+            <a:ext cx="2234336" cy="323149"/>
+          </a:xfrm>
+          <a:prstGeom prst="rect">
+            <a:avLst/>
+          </a:prstGeom>
+          <a:noFill/>
+          <a:ln/>
+        </p:spPr>
+        <p:txBody>
+          <a:bodyPr wrap="none" lIns="0" tIns="0" rIns="0" bIns="0" rtlCol="0" anchor="t"/>
+          <a:lstStyle/>
+          <a:p>
+            <a:pPr algn="ctr" indent="0" marL="0">
+              <a:lnSpc>
+                <a:spcPts val="2545"/>
+              </a:lnSpc>
+              <a:buNone/>
+            </a:pPr>
+            <a:r>
+              <a:rPr lang="en-US" sz="1697" b="1" spc="34" kern="0" dirty="0">
+                <a:solidFill>
+                  <a:srgbClr val="F59E0B"/>
+                </a:solidFill>
+                <a:latin typeface="Malgun Gothic" pitchFamily="34" charset="0"/>
+                <a:ea typeface="Malgun Gothic" pitchFamily="34" charset="-122"/>
+                <a:cs typeface="Malgun Gothic" pitchFamily="34" charset="-120"/>
+              </a:rPr>
+              <a:t>UNIT ECONOMICS</a:t>
+            </a:r>
+            <a:endParaRPr lang="en-US" sz="1697" dirty="0"/>
+          </a:p>
+        </p:txBody>
+      </p:sp>
+      <p:sp>
+        <p:nvSpPr>
+          <p:cNvPr id="4" name="Text 2"/>
+          <p:cNvSpPr txBox="1"/>
+          <p:nvPr/>
+        </p:nvSpPr>
+        <p:spPr>
+          <a:xfrm>
+            <a:off x="-334488" y="2282160"/>
+            <a:ext cx="12861036" cy="590611"/>
+          </a:xfrm>
+          <a:prstGeom prst="rect">
+            <a:avLst/>
+          </a:prstGeom>
+          <a:noFill/>
+          <a:ln/>
+        </p:spPr>
+        <p:txBody>
+          <a:bodyPr wrap="none" lIns="0" tIns="0" rIns="0" bIns="0" rtlCol="0" anchor="t"/>
+          <a:lstStyle/>
+          <a:p>
+            <a:pPr algn="ctr" indent="0" marL="0">
+              <a:lnSpc>
+                <a:spcPts val="4651"/>
+              </a:lnSpc>
+              <a:buNone/>
+            </a:pPr>
+            <a:r>
+              <a:rPr lang="en-US" sz="3524" b="1" spc="-88" kern="0" dirty="0">
+                <a:solidFill>
+                  <a:srgbClr val="FFFFFF"/>
+                </a:solidFill>
+                <a:latin typeface="Malgun Gothic" pitchFamily="34" charset="0"/>
+                <a:ea typeface="Malgun Gothic" pitchFamily="34" charset="-122"/>
+                <a:cs typeface="Malgun Gothic" pitchFamily="34" charset="-120"/>
+              </a:rPr>
+              <a:t>수익성 지표 개선 및 투자 대비 성과 (ROI)</a:t>
+            </a:r>
+            <a:endParaRPr lang="en-US" sz="3524" dirty="0"/>
+          </a:p>
+        </p:txBody>
+      </p:sp>
+      <p:sp>
+        <p:nvSpPr>
+          <p:cNvPr id="5" name="Text 3"/>
+          <p:cNvSpPr txBox="1"/>
+          <p:nvPr/>
+        </p:nvSpPr>
+        <p:spPr>
+          <a:xfrm>
+            <a:off x="-334488" y="3056016"/>
+            <a:ext cx="12861036" cy="397764"/>
+          </a:xfrm>
+          <a:prstGeom prst="rect">
+            <a:avLst/>
+          </a:prstGeom>
+          <a:noFill/>
+          <a:ln/>
+        </p:spPr>
+        <p:txBody>
+          <a:bodyPr wrap="none" lIns="0" tIns="0" rIns="0" bIns="0" rtlCol="0" anchor="t"/>
+          <a:lstStyle/>
+          <a:p>
+            <a:pPr algn="ctr" indent="0" marL="0">
+              <a:lnSpc>
+                <a:spcPts val="3132"/>
+              </a:lnSpc>
+              <a:buNone/>
+            </a:pPr>
+            <a:r>
+              <a:rPr lang="en-US" sz="2088" spc="-54" kern="0" dirty="0">
+                <a:solidFill>
+                  <a:srgbClr val="94A3B8"/>
+                </a:solidFill>
+                <a:latin typeface="Malgun Gothic" pitchFamily="34" charset="0"/>
+                <a:ea typeface="Malgun Gothic" pitchFamily="34" charset="-122"/>
+                <a:cs typeface="Malgun Gothic" pitchFamily="34" charset="-120"/>
+              </a:rPr>
+              <a:t>세일즈 자동화 및 고객 성공(CS) 프로세스 내재화로 고수익성 비즈니스 모델 완성</a:t>
+            </a:r>
+            <a:endParaRPr lang="en-US" sz="2088" dirty="0"/>
+          </a:p>
+        </p:txBody>
+      </p:sp>
+      <p:sp>
+        <p:nvSpPr>
+          <p:cNvPr id="6" name="Shape 4"/>
+          <p:cNvSpPr/>
+          <p:nvPr/>
+        </p:nvSpPr>
+        <p:spPr>
+          <a:xfrm>
+            <a:off x="552480" y="3690793"/>
+            <a:ext cx="5467380" cy="1398575"/>
+          </a:xfrm>
+          <a:prstGeom prst="roundRect">
+            <a:avLst>
+              <a:gd name="adj" fmla="val 9533"/>
+            </a:avLst>
+          </a:prstGeom>
+          <a:solidFill>
+            <a:srgbClr val="111A2E"/>
+          </a:solidFill>
+          <a:ln w="9525">
+            <a:solidFill>
+              <a:srgbClr val="FFFFFF">
+                <a:alpha val="10000"/>
+              </a:srgbClr>
+            </a:solidFill>
+            <a:prstDash val="solid"/>
+          </a:ln>
+        </p:spPr>
+      </p:sp>
+      <p:sp>
+        <p:nvSpPr>
+          <p:cNvPr id="7" name="Text 5"/>
+          <p:cNvSpPr txBox="1"/>
+          <p:nvPr/>
+        </p:nvSpPr>
+        <p:spPr>
+          <a:xfrm>
+            <a:off x="752460" y="3886932"/>
+            <a:ext cx="5450556" cy="217170"/>
+          </a:xfrm>
+          <a:prstGeom prst="rect">
+            <a:avLst/>
+          </a:prstGeom>
+          <a:noFill/>
+          <a:ln/>
+        </p:spPr>
+        <p:txBody>
+          <a:bodyPr wrap="none" lIns="0" tIns="0" rIns="0" bIns="0" rtlCol="0" anchor="t"/>
+          <a:lstStyle/>
+          <a:p>
+            <a:pPr algn="l" indent="0" marL="0">
+              <a:lnSpc>
+                <a:spcPts val="1710"/>
+              </a:lnSpc>
+              <a:buNone/>
+            </a:pPr>
+            <a:r>
+              <a:rPr lang="en-US" sz="1140" b="1" spc="-54" kern="0" dirty="0">
+                <a:solidFill>
+                  <a:srgbClr val="F59E0B"/>
+                </a:solidFill>
+                <a:latin typeface="Malgun Gothic" pitchFamily="34" charset="0"/>
+                <a:ea typeface="Malgun Gothic" pitchFamily="34" charset="-122"/>
+                <a:cs typeface="Malgun Gothic" pitchFamily="34" charset="-120"/>
+              </a:rPr>
+              <a:t>✓ 고객 획득 및 회수 기간 (Payback)</a:t>
+            </a:r>
+            <a:endParaRPr lang="en-US" sz="1140" dirty="0"/>
+          </a:p>
+        </p:txBody>
+      </p:sp>
+      <p:sp>
+        <p:nvSpPr>
+          <p:cNvPr id="8" name="Text 6"/>
+          <p:cNvSpPr txBox="1"/>
+          <p:nvPr/>
+        </p:nvSpPr>
+        <p:spPr>
+          <a:xfrm>
+            <a:off x="904890" y="4220596"/>
+            <a:ext cx="5285964" cy="184252"/>
+          </a:xfrm>
+          <a:prstGeom prst="rect">
+            <a:avLst/>
+          </a:prstGeom>
+          <a:noFill/>
+          <a:ln/>
+        </p:spPr>
+        <p:txBody>
+          <a:bodyPr wrap="none" lIns="0" tIns="0" rIns="0" bIns="0" rtlCol="0" anchor="t"/>
+          <a:lstStyle/>
+          <a:p>
+            <a:pPr algn="l" marL="342900" indent="-342900">
+              <a:lnSpc>
+                <a:spcPts val="1451"/>
+              </a:lnSpc>
+              <a:buSzPct val="100000"/>
+              <a:buChar char="•"/>
+            </a:pPr>
+            <a:r>
+              <a:rPr lang="en-US" sz="936" spc="-54" kern="0" dirty="0">
+                <a:solidFill>
+                  <a:srgbClr val="E2E8F0"/>
+                </a:solidFill>
+                <a:latin typeface="Malgun Gothic" pitchFamily="34" charset="0"/>
+                <a:ea typeface="Malgun Gothic" pitchFamily="34" charset="-122"/>
+                <a:cs typeface="Malgun Gothic" pitchFamily="34" charset="-120"/>
+              </a:rPr>
+              <a:t>고객 획득 비용(CAC): </a:t>
+            </a:r>
+            <a:pPr algn="l" indent="0" marL="0">
+              <a:lnSpc>
+                <a:spcPts val="1451"/>
+              </a:lnSpc>
+              <a:buNone/>
+            </a:pPr>
+            <a:r>
+              <a:rPr lang="en-US" sz="936" b="1" spc="-54" kern="0" dirty="0">
+                <a:solidFill>
+                  <a:srgbClr val="E2E8F0"/>
+                </a:solidFill>
+                <a:latin typeface="Malgun Gothic" pitchFamily="34" charset="0"/>
+                <a:ea typeface="Malgun Gothic" pitchFamily="34" charset="-122"/>
+                <a:cs typeface="Malgun Gothic" pitchFamily="34" charset="-120"/>
+              </a:rPr>
+              <a:t>$14.5K ➔ $7.9K (45% 절감)</a:t>
+            </a:r>
+            <a:endParaRPr lang="en-US" sz="936" dirty="0"/>
+          </a:p>
+        </p:txBody>
+      </p:sp>
+      <p:sp>
+        <p:nvSpPr>
+          <p:cNvPr id="9" name="Text 7"/>
+          <p:cNvSpPr txBox="1"/>
+          <p:nvPr/>
+        </p:nvSpPr>
+        <p:spPr>
+          <a:xfrm>
+            <a:off x="904890" y="4442978"/>
+            <a:ext cx="5285964" cy="184252"/>
+          </a:xfrm>
+          <a:prstGeom prst="rect">
+            <a:avLst/>
+          </a:prstGeom>
+          <a:noFill/>
+          <a:ln/>
+        </p:spPr>
+        <p:txBody>
+          <a:bodyPr wrap="none" lIns="0" tIns="0" rIns="0" bIns="0" rtlCol="0" anchor="t"/>
+          <a:lstStyle/>
+          <a:p>
+            <a:pPr algn="l" marL="342900" indent="-342900">
+              <a:lnSpc>
+                <a:spcPts val="1451"/>
+              </a:lnSpc>
+              <a:buSzPct val="100000"/>
+              <a:buChar char="•"/>
+            </a:pPr>
+            <a:r>
+              <a:rPr lang="en-US" sz="936" spc="-54" kern="0" dirty="0">
+                <a:solidFill>
+                  <a:srgbClr val="E2E8F0"/>
+                </a:solidFill>
+                <a:latin typeface="Malgun Gothic" pitchFamily="34" charset="0"/>
+                <a:ea typeface="Malgun Gothic" pitchFamily="34" charset="-122"/>
+                <a:cs typeface="Malgun Gothic" pitchFamily="34" charset="-120"/>
+              </a:rPr>
+              <a:t>CAC 투자금 회수 기간: </a:t>
+            </a:r>
+            <a:pPr algn="l" indent="0" marL="0">
+              <a:lnSpc>
+                <a:spcPts val="1451"/>
+              </a:lnSpc>
+              <a:buNone/>
+            </a:pPr>
+            <a:r>
+              <a:rPr lang="en-US" sz="936" b="1" spc="-54" kern="0" dirty="0">
+                <a:solidFill>
+                  <a:srgbClr val="E2E8F0"/>
+                </a:solidFill>
+                <a:latin typeface="Malgun Gothic" pitchFamily="34" charset="0"/>
+                <a:ea typeface="Malgun Gothic" pitchFamily="34" charset="-122"/>
+                <a:cs typeface="Malgun Gothic" pitchFamily="34" charset="-120"/>
+              </a:rPr>
+              <a:t>14개월 ➔ 6.5개월 단축</a:t>
+            </a:r>
+            <a:endParaRPr lang="en-US" sz="936" dirty="0"/>
+          </a:p>
+        </p:txBody>
+      </p:sp>
+      <p:sp>
+        <p:nvSpPr>
+          <p:cNvPr id="10" name="Text 8"/>
+          <p:cNvSpPr txBox="1"/>
+          <p:nvPr/>
+        </p:nvSpPr>
+        <p:spPr>
+          <a:xfrm>
+            <a:off x="904890" y="4665360"/>
+            <a:ext cx="5285964" cy="184252"/>
+          </a:xfrm>
+          <a:prstGeom prst="rect">
+            <a:avLst/>
+          </a:prstGeom>
+          <a:noFill/>
+          <a:ln/>
+        </p:spPr>
+        <p:txBody>
+          <a:bodyPr wrap="none" lIns="0" tIns="0" rIns="0" bIns="0" rtlCol="0" anchor="t"/>
+          <a:lstStyle/>
+          <a:p>
+            <a:pPr algn="l" marL="342900" indent="-342900">
+              <a:lnSpc>
+                <a:spcPts val="1451"/>
+              </a:lnSpc>
+              <a:buSzPct val="100000"/>
+              <a:buChar char="•"/>
+            </a:pPr>
+            <a:r>
+              <a:rPr lang="en-US" sz="936" spc="-54" kern="0" dirty="0">
+                <a:solidFill>
+                  <a:srgbClr val="E2E8F0"/>
+                </a:solidFill>
+                <a:latin typeface="Malgun Gothic" pitchFamily="34" charset="0"/>
+                <a:ea typeface="Malgun Gothic" pitchFamily="34" charset="-122"/>
+                <a:cs typeface="Malgun Gothic" pitchFamily="34" charset="-120"/>
+              </a:rPr>
+              <a:t>세일즈 리드 타임: </a:t>
+            </a:r>
+            <a:pPr algn="l" indent="0" marL="0">
+              <a:lnSpc>
+                <a:spcPts val="1451"/>
+              </a:lnSpc>
+              <a:buNone/>
+            </a:pPr>
+            <a:r>
+              <a:rPr lang="en-US" sz="936" b="1" spc="-54" kern="0" dirty="0">
+                <a:solidFill>
+                  <a:srgbClr val="E2E8F0"/>
+                </a:solidFill>
+                <a:latin typeface="Malgun Gothic" pitchFamily="34" charset="0"/>
+                <a:ea typeface="Malgun Gothic" pitchFamily="34" charset="-122"/>
+                <a:cs typeface="Malgun Gothic" pitchFamily="34" charset="-120"/>
+              </a:rPr>
+              <a:t>평균 45일 내 본 계약 체결</a:t>
+            </a:r>
+            <a:endParaRPr lang="en-US" sz="936" dirty="0"/>
+          </a:p>
+        </p:txBody>
+      </p:sp>
+      <p:sp>
+        <p:nvSpPr>
+          <p:cNvPr id="11" name="Shape 9"/>
+          <p:cNvSpPr/>
+          <p:nvPr/>
+        </p:nvSpPr>
+        <p:spPr>
+          <a:xfrm>
+            <a:off x="6172200" y="3690793"/>
+            <a:ext cx="5467380" cy="1398575"/>
+          </a:xfrm>
+          <a:prstGeom prst="roundRect">
+            <a:avLst>
+              <a:gd name="adj" fmla="val 9533"/>
+            </a:avLst>
+          </a:prstGeom>
+          <a:solidFill>
+            <a:srgbClr val="111A2E"/>
+          </a:solidFill>
+          <a:ln w="9525">
+            <a:solidFill>
+              <a:srgbClr val="FFFFFF">
+                <a:alpha val="10000"/>
+              </a:srgbClr>
+            </a:solidFill>
+            <a:prstDash val="solid"/>
+          </a:ln>
+        </p:spPr>
+      </p:sp>
+      <p:sp>
+        <p:nvSpPr>
+          <p:cNvPr id="12" name="Text 10"/>
+          <p:cNvSpPr txBox="1"/>
+          <p:nvPr/>
+        </p:nvSpPr>
+        <p:spPr>
+          <a:xfrm>
+            <a:off x="6372271" y="3886932"/>
+            <a:ext cx="5450556" cy="217170"/>
+          </a:xfrm>
+          <a:prstGeom prst="rect">
+            <a:avLst/>
+          </a:prstGeom>
+          <a:noFill/>
+          <a:ln/>
+        </p:spPr>
+        <p:txBody>
+          <a:bodyPr wrap="none" lIns="0" tIns="0" rIns="0" bIns="0" rtlCol="0" anchor="t"/>
+          <a:lstStyle/>
+          <a:p>
+            <a:pPr algn="l" indent="0" marL="0">
+              <a:lnSpc>
+                <a:spcPts val="1710"/>
+              </a:lnSpc>
+              <a:buNone/>
+            </a:pPr>
+            <a:r>
+              <a:rPr lang="en-US" sz="1140" b="1" spc="-54" kern="0" dirty="0">
+                <a:solidFill>
+                  <a:srgbClr val="10B981"/>
+                </a:solidFill>
+                <a:latin typeface="Malgun Gothic" pitchFamily="34" charset="0"/>
+                <a:ea typeface="Malgun Gothic" pitchFamily="34" charset="-122"/>
+                <a:cs typeface="Malgun Gothic" pitchFamily="34" charset="-120"/>
+              </a:rPr>
+              <a:t>✓ 고객 생애 가치 (LTV / CAC Ratio)</a:t>
+            </a:r>
+            <a:endParaRPr lang="en-US" sz="1140" dirty="0"/>
+          </a:p>
+        </p:txBody>
+      </p:sp>
+      <p:sp>
+        <p:nvSpPr>
+          <p:cNvPr id="13" name="Text 11"/>
+          <p:cNvSpPr txBox="1"/>
+          <p:nvPr/>
+        </p:nvSpPr>
+        <p:spPr>
+          <a:xfrm>
+            <a:off x="6524610" y="4220596"/>
+            <a:ext cx="5285964" cy="184252"/>
+          </a:xfrm>
+          <a:prstGeom prst="rect">
+            <a:avLst/>
+          </a:prstGeom>
+          <a:noFill/>
+          <a:ln/>
+        </p:spPr>
+        <p:txBody>
+          <a:bodyPr wrap="none" lIns="0" tIns="0" rIns="0" bIns="0" rtlCol="0" anchor="t"/>
+          <a:lstStyle/>
+          <a:p>
+            <a:pPr algn="l" marL="342900" indent="-342900">
+              <a:lnSpc>
+                <a:spcPts val="1451"/>
+              </a:lnSpc>
+              <a:buSzPct val="100000"/>
+              <a:buChar char="•"/>
+            </a:pPr>
+            <a:r>
+              <a:rPr lang="en-US" sz="936" spc="-54" kern="0" dirty="0">
+                <a:solidFill>
+                  <a:srgbClr val="E2E8F0"/>
+                </a:solidFill>
+                <a:latin typeface="Malgun Gothic" pitchFamily="34" charset="0"/>
+                <a:ea typeface="Malgun Gothic" pitchFamily="34" charset="-122"/>
+                <a:cs typeface="Malgun Gothic" pitchFamily="34" charset="-120"/>
+              </a:rPr>
+              <a:t>고객 생애 가치(LTV): </a:t>
+            </a:r>
+            <a:pPr algn="l" indent="0" marL="0">
+              <a:lnSpc>
+                <a:spcPts val="1451"/>
+              </a:lnSpc>
+              <a:buNone/>
+            </a:pPr>
+            <a:r>
+              <a:rPr lang="en-US" sz="936" b="1" spc="-54" kern="0" dirty="0">
+                <a:solidFill>
+                  <a:srgbClr val="E2E8F0"/>
+                </a:solidFill>
+                <a:latin typeface="Malgun Gothic" pitchFamily="34" charset="0"/>
+                <a:ea typeface="Malgun Gothic" pitchFamily="34" charset="-122"/>
+                <a:cs typeface="Malgun Gothic" pitchFamily="34" charset="-120"/>
+              </a:rPr>
+              <a:t>평균 $38,000 달성</a:t>
+            </a:r>
+            <a:endParaRPr lang="en-US" sz="936" dirty="0"/>
+          </a:p>
+        </p:txBody>
+      </p:sp>
+      <p:sp>
+        <p:nvSpPr>
+          <p:cNvPr id="14" name="Text 12"/>
+          <p:cNvSpPr txBox="1"/>
+          <p:nvPr/>
+        </p:nvSpPr>
+        <p:spPr>
+          <a:xfrm>
+            <a:off x="6524610" y="4442978"/>
+            <a:ext cx="5285964" cy="184252"/>
+          </a:xfrm>
+          <a:prstGeom prst="rect">
+            <a:avLst/>
+          </a:prstGeom>
+          <a:noFill/>
+          <a:ln/>
+        </p:spPr>
+        <p:txBody>
+          <a:bodyPr wrap="none" lIns="0" tIns="0" rIns="0" bIns="0" rtlCol="0" anchor="t"/>
+          <a:lstStyle/>
+          <a:p>
+            <a:pPr algn="l" marL="342900" indent="-342900">
+              <a:lnSpc>
+                <a:spcPts val="1451"/>
+              </a:lnSpc>
+              <a:buSzPct val="100000"/>
+              <a:buChar char="•"/>
+            </a:pPr>
+            <a:r>
+              <a:rPr lang="en-US" sz="936" spc="-54" kern="0" dirty="0">
+                <a:solidFill>
+                  <a:srgbClr val="E2E8F0"/>
+                </a:solidFill>
+                <a:latin typeface="Malgun Gothic" pitchFamily="34" charset="0"/>
+                <a:ea typeface="Malgun Gothic" pitchFamily="34" charset="-122"/>
+                <a:cs typeface="Malgun Gothic" pitchFamily="34" charset="-120"/>
+              </a:rPr>
+              <a:t>LTV / CAC 비율: </a:t>
+            </a:r>
+            <a:pPr algn="l" indent="0" marL="0">
+              <a:lnSpc>
+                <a:spcPts val="1451"/>
+              </a:lnSpc>
+              <a:buNone/>
+            </a:pPr>
+            <a:r>
+              <a:rPr lang="en-US" sz="936" b="1" spc="-54" kern="0" dirty="0">
+                <a:solidFill>
+                  <a:srgbClr val="E2E8F0"/>
+                </a:solidFill>
+                <a:latin typeface="Malgun Gothic" pitchFamily="34" charset="0"/>
+                <a:ea typeface="Malgun Gothic" pitchFamily="34" charset="-122"/>
+                <a:cs typeface="Malgun Gothic" pitchFamily="34" charset="-120"/>
+              </a:rPr>
+              <a:t>4.8x (SaaS 벤치마크 3.0x 상회)</a:t>
+            </a:r>
+            <a:endParaRPr lang="en-US" sz="936" dirty="0"/>
+          </a:p>
+        </p:txBody>
+      </p:sp>
+      <p:sp>
+        <p:nvSpPr>
+          <p:cNvPr id="15" name="Text 13"/>
+          <p:cNvSpPr txBox="1"/>
+          <p:nvPr/>
+        </p:nvSpPr>
+        <p:spPr>
+          <a:xfrm>
+            <a:off x="6524610" y="4665360"/>
+            <a:ext cx="5285964" cy="184252"/>
+          </a:xfrm>
+          <a:prstGeom prst="rect">
+            <a:avLst/>
+          </a:prstGeom>
+          <a:noFill/>
+          <a:ln/>
+        </p:spPr>
+        <p:txBody>
+          <a:bodyPr wrap="none" lIns="0" tIns="0" rIns="0" bIns="0" rtlCol="0" anchor="t"/>
+          <a:lstStyle/>
+          <a:p>
+            <a:pPr algn="l" marL="342900" indent="-342900">
+              <a:lnSpc>
+                <a:spcPts val="1451"/>
+              </a:lnSpc>
+              <a:buSzPct val="100000"/>
+              <a:buChar char="•"/>
+            </a:pPr>
+            <a:r>
+              <a:rPr lang="en-US" sz="936" spc="-54" kern="0" dirty="0">
+                <a:solidFill>
+                  <a:srgbClr val="E2E8F0"/>
+                </a:solidFill>
+                <a:latin typeface="Malgun Gothic" pitchFamily="34" charset="0"/>
+                <a:ea typeface="Malgun Gothic" pitchFamily="34" charset="-122"/>
+                <a:cs typeface="Malgun Gothic" pitchFamily="34" charset="-120"/>
+              </a:rPr>
+              <a:t>연간 로고 이탈률(Churn): </a:t>
+            </a:r>
+            <a:pPr algn="l" indent="0" marL="0">
+              <a:lnSpc>
+                <a:spcPts val="1451"/>
+              </a:lnSpc>
+              <a:buNone/>
+            </a:pPr>
+            <a:r>
+              <a:rPr lang="en-US" sz="936" b="1" spc="-54" kern="0" dirty="0">
+                <a:solidFill>
+                  <a:srgbClr val="E2E8F0"/>
+                </a:solidFill>
+                <a:latin typeface="Malgun Gothic" pitchFamily="34" charset="0"/>
+                <a:ea typeface="Malgun Gothic" pitchFamily="34" charset="-122"/>
+                <a:cs typeface="Malgun Gothic" pitchFamily="34" charset="-120"/>
+              </a:rPr>
+              <a:t>1.8% 미만 극저치 유지</a:t>
+            </a:r>
+            <a:endParaRPr lang="en-US" sz="936" dirty="0"/>
+          </a:p>
+        </p:txBody>
+      </p:sp>
     </p:spTree>
   </p:cSld>
   <p:clrMapOvr>
@@ -1502,16 +6166,9 @@
   <p:cSld name="Slide 6">
     <p:bg>
       <p:bgPr>
-        <a:blipFill dpi="0" rotWithShape="1">
-          <a:blip r:embed="rId1">
-            <a:lum/>
-          </a:blip>
-          <a:srcRect/>
-          <a:stretch>
-            <a:fillRect/>
-          </a:stretch>
-        </a:blipFill>
-        <a:effectLst/>
+        <a:solidFill>
+          <a:srgbClr val="38BDF8"/>
+        </a:solidFill>
       </p:bgPr>
     </p:bg>
     <p:spTree>
@@ -1528,6 +6185,1084 @@
           <a:chExt cx="0" cy="0"/>
         </a:xfrm>
       </p:grpSpPr>
+      <p:sp>
+        <p:nvSpPr>
+          <p:cNvPr id="2" name="Shape 0"/>
+          <p:cNvSpPr/>
+          <p:nvPr/>
+        </p:nvSpPr>
+        <p:spPr>
+          <a:xfrm>
+            <a:off x="552480" y="804306"/>
+            <a:ext cx="2733690" cy="418521"/>
+          </a:xfrm>
+          <a:prstGeom prst="roundRect">
+            <a:avLst>
+              <a:gd name="adj" fmla="val 50011"/>
+            </a:avLst>
+          </a:prstGeom>
+          <a:solidFill>
+            <a:srgbClr val="F59E0B">
+              <a:alpha val="15000"/>
+            </a:srgbClr>
+          </a:solidFill>
+          <a:ln w="9525">
+            <a:solidFill>
+              <a:srgbClr val="F59E0B">
+                <a:alpha val="35000"/>
+              </a:srgbClr>
+            </a:solidFill>
+            <a:prstDash val="solid"/>
+          </a:ln>
+        </p:spPr>
+      </p:sp>
+      <p:sp>
+        <p:nvSpPr>
+          <p:cNvPr id="3" name="Text 1"/>
+          <p:cNvSpPr txBox="1"/>
+          <p:nvPr/>
+        </p:nvSpPr>
+        <p:spPr>
+          <a:xfrm>
+            <a:off x="676290" y="847466"/>
+            <a:ext cx="2662824" cy="323149"/>
+          </a:xfrm>
+          <a:prstGeom prst="rect">
+            <a:avLst/>
+          </a:prstGeom>
+          <a:noFill/>
+          <a:ln/>
+        </p:spPr>
+        <p:txBody>
+          <a:bodyPr wrap="none" lIns="0" tIns="0" rIns="0" bIns="0" rtlCol="0" anchor="t"/>
+          <a:lstStyle/>
+          <a:p>
+            <a:pPr algn="l" indent="0" marL="0">
+              <a:lnSpc>
+                <a:spcPts val="2545"/>
+              </a:lnSpc>
+              <a:buNone/>
+            </a:pPr>
+            <a:r>
+              <a:rPr lang="en-US" sz="1697" b="1" spc="34" kern="0" dirty="0">
+                <a:solidFill>
+                  <a:srgbClr val="F59E0B"/>
+                </a:solidFill>
+                <a:latin typeface="Malgun Gothic" pitchFamily="34" charset="0"/>
+                <a:ea typeface="Malgun Gothic" pitchFamily="34" charset="-122"/>
+                <a:cs typeface="Malgun Gothic" pitchFamily="34" charset="-120"/>
+              </a:rPr>
+              <a:t>EXECUTIVE SUMMARY</a:t>
+            </a:r>
+            <a:endParaRPr lang="en-US" sz="1697" dirty="0"/>
+          </a:p>
+        </p:txBody>
+      </p:sp>
+      <p:sp>
+        <p:nvSpPr>
+          <p:cNvPr id="4" name="Text 2"/>
+          <p:cNvSpPr txBox="1"/>
+          <p:nvPr/>
+        </p:nvSpPr>
+        <p:spPr>
+          <a:xfrm>
+            <a:off x="533370" y="1298905"/>
+            <a:ext cx="11993088" cy="590611"/>
+          </a:xfrm>
+          <a:prstGeom prst="rect">
+            <a:avLst/>
+          </a:prstGeom>
+          <a:noFill/>
+          <a:ln/>
+        </p:spPr>
+        <p:txBody>
+          <a:bodyPr wrap="none" lIns="0" tIns="0" rIns="0" bIns="0" rtlCol="0" anchor="t"/>
+          <a:lstStyle/>
+          <a:p>
+            <a:pPr algn="l" indent="0" marL="0">
+              <a:lnSpc>
+                <a:spcPts val="4651"/>
+              </a:lnSpc>
+              <a:buNone/>
+            </a:pPr>
+            <a:r>
+              <a:rPr lang="en-US" sz="3524" b="1" spc="-88" kern="0" dirty="0">
+                <a:solidFill>
+                  <a:srgbClr val="FFFFFF"/>
+                </a:solidFill>
+                <a:latin typeface="Malgun Gothic" pitchFamily="34" charset="0"/>
+                <a:ea typeface="Malgun Gothic" pitchFamily="34" charset="-122"/>
+                <a:cs typeface="Malgun Gothic" pitchFamily="34" charset="-120"/>
+              </a:rPr>
+              <a:t>핵심 결론 및 질의응답 (Q&amp;A)</a:t>
+            </a:r>
+            <a:endParaRPr lang="en-US" sz="3524" dirty="0"/>
+          </a:p>
+        </p:txBody>
+      </p:sp>
+      <p:sp>
+        <p:nvSpPr>
+          <p:cNvPr id="5" name="Text 3"/>
+          <p:cNvSpPr txBox="1"/>
+          <p:nvPr/>
+        </p:nvSpPr>
+        <p:spPr>
+          <a:xfrm>
+            <a:off x="533370" y="2072670"/>
+            <a:ext cx="11993088" cy="397764"/>
+          </a:xfrm>
+          <a:prstGeom prst="rect">
+            <a:avLst/>
+          </a:prstGeom>
+          <a:noFill/>
+          <a:ln/>
+        </p:spPr>
+        <p:txBody>
+          <a:bodyPr wrap="none" lIns="0" tIns="0" rIns="0" bIns="0" rtlCol="0" anchor="t"/>
+          <a:lstStyle/>
+          <a:p>
+            <a:pPr algn="l" indent="0" marL="0">
+              <a:lnSpc>
+                <a:spcPts val="3132"/>
+              </a:lnSpc>
+              <a:buNone/>
+            </a:pPr>
+            <a:r>
+              <a:rPr lang="en-US" sz="2088" spc="-54" kern="0" dirty="0">
+                <a:solidFill>
+                  <a:srgbClr val="94A3B8"/>
+                </a:solidFill>
+                <a:latin typeface="Malgun Gothic" pitchFamily="34" charset="0"/>
+                <a:ea typeface="Malgun Gothic" pitchFamily="34" charset="-122"/>
+                <a:cs typeface="Malgun Gothic" pitchFamily="34" charset="-120"/>
+              </a:rPr>
+              <a:t>차별화된 제품 경쟁력과 실행력을 바탕으로 2026년 목표 ARR $12.5M을 달성하겠습니다.</a:t>
+            </a:r>
+            <a:endParaRPr lang="en-US" sz="2088" dirty="0"/>
+          </a:p>
+        </p:txBody>
+      </p:sp>
+      <p:sp>
+        <p:nvSpPr>
+          <p:cNvPr id="6" name="Shape 4"/>
+          <p:cNvSpPr/>
+          <p:nvPr/>
+        </p:nvSpPr>
+        <p:spPr>
+          <a:xfrm>
+            <a:off x="552480" y="2631277"/>
+            <a:ext cx="6029919" cy="669707"/>
+          </a:xfrm>
+          <a:prstGeom prst="roundRect">
+            <a:avLst>
+              <a:gd name="adj" fmla="val 19907"/>
+            </a:avLst>
+          </a:prstGeom>
+          <a:solidFill>
+            <a:srgbClr val="111A2E"/>
+          </a:solidFill>
+          <a:ln/>
+        </p:spPr>
+      </p:sp>
+      <p:sp>
+        <p:nvSpPr>
+          <p:cNvPr id="7" name="Shape 5"/>
+          <p:cNvSpPr/>
+          <p:nvPr/>
+        </p:nvSpPr>
+        <p:spPr>
+          <a:xfrm>
+            <a:off x="552480" y="2631277"/>
+            <a:ext cx="6029919" cy="9510"/>
+          </a:xfrm>
+          <a:prstGeom prst="rect">
+            <a:avLst/>
+          </a:prstGeom>
+          <a:solidFill>
+            <a:srgbClr val="FFFFFF">
+              <a:alpha val="10000"/>
+            </a:srgbClr>
+          </a:solidFill>
+          <a:ln/>
+        </p:spPr>
+      </p:sp>
+      <p:sp>
+        <p:nvSpPr>
+          <p:cNvPr id="8" name="Shape 6"/>
+          <p:cNvSpPr/>
+          <p:nvPr/>
+        </p:nvSpPr>
+        <p:spPr>
+          <a:xfrm>
+            <a:off x="6572799" y="2631277"/>
+            <a:ext cx="9510" cy="669707"/>
+          </a:xfrm>
+          <a:prstGeom prst="rect">
+            <a:avLst/>
+          </a:prstGeom>
+          <a:solidFill>
+            <a:srgbClr val="FFFFFF">
+              <a:alpha val="10000"/>
+            </a:srgbClr>
+          </a:solidFill>
+          <a:ln/>
+        </p:spPr>
+      </p:sp>
+      <p:sp>
+        <p:nvSpPr>
+          <p:cNvPr id="9" name="Shape 7"/>
+          <p:cNvSpPr/>
+          <p:nvPr/>
+        </p:nvSpPr>
+        <p:spPr>
+          <a:xfrm>
+            <a:off x="552480" y="3291474"/>
+            <a:ext cx="6029919" cy="9510"/>
+          </a:xfrm>
+          <a:prstGeom prst="rect">
+            <a:avLst/>
+          </a:prstGeom>
+          <a:solidFill>
+            <a:srgbClr val="FFFFFF">
+              <a:alpha val="10000"/>
+            </a:srgbClr>
+          </a:solidFill>
+          <a:ln/>
+        </p:spPr>
+      </p:sp>
+      <p:sp>
+        <p:nvSpPr>
+          <p:cNvPr id="10" name="Shape 8"/>
+          <p:cNvSpPr/>
+          <p:nvPr/>
+        </p:nvSpPr>
+        <p:spPr>
+          <a:xfrm>
+            <a:off x="552480" y="2631277"/>
+            <a:ext cx="28621" cy="669707"/>
+          </a:xfrm>
+          <a:prstGeom prst="rect">
+            <a:avLst/>
+          </a:prstGeom>
+          <a:solidFill>
+            <a:srgbClr val="F59E0B"/>
+          </a:solidFill>
+          <a:ln/>
+        </p:spPr>
+      </p:sp>
+      <p:sp>
+        <p:nvSpPr>
+          <p:cNvPr id="11" name="Text 9"/>
+          <p:cNvSpPr txBox="1"/>
+          <p:nvPr/>
+        </p:nvSpPr>
+        <p:spPr>
+          <a:xfrm>
+            <a:off x="714421" y="2754721"/>
+            <a:ext cx="6161044" cy="210312"/>
+          </a:xfrm>
+          <a:prstGeom prst="rect">
+            <a:avLst/>
+          </a:prstGeom>
+          <a:noFill/>
+          <a:ln/>
+        </p:spPr>
+        <p:txBody>
+          <a:bodyPr wrap="none" lIns="0" tIns="0" rIns="0" bIns="0" rtlCol="0" anchor="t"/>
+          <a:lstStyle/>
+          <a:p>
+            <a:pPr algn="l" indent="0" marL="0">
+              <a:lnSpc>
+                <a:spcPts val="1656"/>
+              </a:lnSpc>
+              <a:buNone/>
+            </a:pPr>
+            <a:r>
+              <a:rPr lang="en-US" sz="1104" b="1" spc="-54" kern="0" dirty="0">
+                <a:solidFill>
+                  <a:srgbClr val="FFFFFF"/>
+                </a:solidFill>
+                <a:latin typeface="Malgun Gothic" pitchFamily="34" charset="0"/>
+                <a:ea typeface="Malgun Gothic" pitchFamily="34" charset="-122"/>
+                <a:cs typeface="Malgun Gothic" pitchFamily="34" charset="-120"/>
+              </a:rPr>
+              <a:t>01. 글로벌 엔터프라이즈 GTM 선점</a:t>
+            </a:r>
+            <a:endParaRPr lang="en-US" sz="1104" dirty="0"/>
+          </a:p>
+        </p:txBody>
+      </p:sp>
+      <p:sp>
+        <p:nvSpPr>
+          <p:cNvPr id="12" name="Text 10"/>
+          <p:cNvSpPr txBox="1"/>
+          <p:nvPr/>
+        </p:nvSpPr>
+        <p:spPr>
+          <a:xfrm>
+            <a:off x="714421" y="2997586"/>
+            <a:ext cx="6161044" cy="173736"/>
+          </a:xfrm>
+          <a:prstGeom prst="rect">
+            <a:avLst/>
+          </a:prstGeom>
+          <a:noFill/>
+          <a:ln/>
+        </p:spPr>
+        <p:txBody>
+          <a:bodyPr wrap="none" lIns="0" tIns="0" rIns="0" bIns="0" rtlCol="0" anchor="t"/>
+          <a:lstStyle/>
+          <a:p>
+            <a:pPr algn="l" indent="0" marL="0">
+              <a:lnSpc>
+                <a:spcPts val="1368"/>
+              </a:lnSpc>
+              <a:buNone/>
+            </a:pPr>
+            <a:r>
+              <a:rPr lang="en-US" sz="912" spc="-54" kern="0" dirty="0">
+                <a:solidFill>
+                  <a:srgbClr val="94A3B8"/>
+                </a:solidFill>
+                <a:latin typeface="Malgun Gothic" pitchFamily="34" charset="0"/>
+                <a:ea typeface="Malgun Gothic" pitchFamily="34" charset="-122"/>
+                <a:cs typeface="Malgun Gothic" pitchFamily="34" charset="-120"/>
+              </a:rPr>
+              <a:t>북미 및 일본 거점 120개 고객사 확보로 ARR 3.2배 견인</a:t>
+            </a:r>
+            <a:endParaRPr lang="en-US" sz="912" dirty="0"/>
+          </a:p>
+        </p:txBody>
+      </p:sp>
+      <p:sp>
+        <p:nvSpPr>
+          <p:cNvPr id="13" name="Shape 11"/>
+          <p:cNvSpPr/>
+          <p:nvPr/>
+        </p:nvSpPr>
+        <p:spPr>
+          <a:xfrm>
+            <a:off x="552480" y="3396264"/>
+            <a:ext cx="6029919" cy="669707"/>
+          </a:xfrm>
+          <a:prstGeom prst="roundRect">
+            <a:avLst>
+              <a:gd name="adj" fmla="val 19907"/>
+            </a:avLst>
+          </a:prstGeom>
+          <a:solidFill>
+            <a:srgbClr val="111A2E"/>
+          </a:solidFill>
+          <a:ln/>
+        </p:spPr>
+      </p:sp>
+      <p:sp>
+        <p:nvSpPr>
+          <p:cNvPr id="14" name="Shape 12"/>
+          <p:cNvSpPr/>
+          <p:nvPr/>
+        </p:nvSpPr>
+        <p:spPr>
+          <a:xfrm>
+            <a:off x="552480" y="3396264"/>
+            <a:ext cx="6029919" cy="9510"/>
+          </a:xfrm>
+          <a:prstGeom prst="rect">
+            <a:avLst/>
+          </a:prstGeom>
+          <a:solidFill>
+            <a:srgbClr val="FFFFFF">
+              <a:alpha val="10000"/>
+            </a:srgbClr>
+          </a:solidFill>
+          <a:ln/>
+        </p:spPr>
+      </p:sp>
+      <p:sp>
+        <p:nvSpPr>
+          <p:cNvPr id="15" name="Shape 13"/>
+          <p:cNvSpPr/>
+          <p:nvPr/>
+        </p:nvSpPr>
+        <p:spPr>
+          <a:xfrm>
+            <a:off x="6572799" y="3396264"/>
+            <a:ext cx="9510" cy="669707"/>
+          </a:xfrm>
+          <a:prstGeom prst="rect">
+            <a:avLst/>
+          </a:prstGeom>
+          <a:solidFill>
+            <a:srgbClr val="FFFFFF">
+              <a:alpha val="10000"/>
+            </a:srgbClr>
+          </a:solidFill>
+          <a:ln/>
+        </p:spPr>
+      </p:sp>
+      <p:sp>
+        <p:nvSpPr>
+          <p:cNvPr id="16" name="Shape 14"/>
+          <p:cNvSpPr/>
+          <p:nvPr/>
+        </p:nvSpPr>
+        <p:spPr>
+          <a:xfrm>
+            <a:off x="552480" y="4056370"/>
+            <a:ext cx="6029919" cy="9510"/>
+          </a:xfrm>
+          <a:prstGeom prst="rect">
+            <a:avLst/>
+          </a:prstGeom>
+          <a:solidFill>
+            <a:srgbClr val="FFFFFF">
+              <a:alpha val="10000"/>
+            </a:srgbClr>
+          </a:solidFill>
+          <a:ln/>
+        </p:spPr>
+      </p:sp>
+      <p:sp>
+        <p:nvSpPr>
+          <p:cNvPr id="17" name="Shape 15"/>
+          <p:cNvSpPr/>
+          <p:nvPr/>
+        </p:nvSpPr>
+        <p:spPr>
+          <a:xfrm>
+            <a:off x="552480" y="3396264"/>
+            <a:ext cx="28621" cy="669707"/>
+          </a:xfrm>
+          <a:prstGeom prst="rect">
+            <a:avLst/>
+          </a:prstGeom>
+          <a:solidFill>
+            <a:srgbClr val="38BDF8"/>
+          </a:solidFill>
+          <a:ln/>
+        </p:spPr>
+      </p:sp>
+      <p:sp>
+        <p:nvSpPr>
+          <p:cNvPr id="18" name="Text 16"/>
+          <p:cNvSpPr txBox="1"/>
+          <p:nvPr/>
+        </p:nvSpPr>
+        <p:spPr>
+          <a:xfrm>
+            <a:off x="714421" y="3519708"/>
+            <a:ext cx="6161044" cy="210312"/>
+          </a:xfrm>
+          <a:prstGeom prst="rect">
+            <a:avLst/>
+          </a:prstGeom>
+          <a:noFill/>
+          <a:ln/>
+        </p:spPr>
+        <p:txBody>
+          <a:bodyPr wrap="none" lIns="0" tIns="0" rIns="0" bIns="0" rtlCol="0" anchor="t"/>
+          <a:lstStyle/>
+          <a:p>
+            <a:pPr algn="l" indent="0" marL="0">
+              <a:lnSpc>
+                <a:spcPts val="1656"/>
+              </a:lnSpc>
+              <a:buNone/>
+            </a:pPr>
+            <a:r>
+              <a:rPr lang="en-US" sz="1104" b="1" spc="-54" kern="0" dirty="0">
+                <a:solidFill>
+                  <a:srgbClr val="FFFFFF"/>
+                </a:solidFill>
+                <a:latin typeface="Malgun Gothic" pitchFamily="34" charset="0"/>
+                <a:ea typeface="Malgun Gothic" pitchFamily="34" charset="-122"/>
+                <a:cs typeface="Malgun Gothic" pitchFamily="34" charset="-120"/>
+              </a:rPr>
+              <a:t>02. 유닛 이코노믹스 고도화</a:t>
+            </a:r>
+            <a:endParaRPr lang="en-US" sz="1104" dirty="0"/>
+          </a:p>
+        </p:txBody>
+      </p:sp>
+      <p:sp>
+        <p:nvSpPr>
+          <p:cNvPr id="19" name="Text 17"/>
+          <p:cNvSpPr txBox="1"/>
+          <p:nvPr/>
+        </p:nvSpPr>
+        <p:spPr>
+          <a:xfrm>
+            <a:off x="714421" y="3762573"/>
+            <a:ext cx="6161044" cy="173736"/>
+          </a:xfrm>
+          <a:prstGeom prst="rect">
+            <a:avLst/>
+          </a:prstGeom>
+          <a:noFill/>
+          <a:ln/>
+        </p:spPr>
+        <p:txBody>
+          <a:bodyPr wrap="none" lIns="0" tIns="0" rIns="0" bIns="0" rtlCol="0" anchor="t"/>
+          <a:lstStyle/>
+          <a:p>
+            <a:pPr algn="l" indent="0" marL="0">
+              <a:lnSpc>
+                <a:spcPts val="1368"/>
+              </a:lnSpc>
+              <a:buNone/>
+            </a:pPr>
+            <a:r>
+              <a:rPr lang="en-US" sz="912" spc="-54" kern="0" dirty="0">
+                <a:solidFill>
+                  <a:srgbClr val="94A3B8"/>
+                </a:solidFill>
+                <a:latin typeface="Malgun Gothic" pitchFamily="34" charset="0"/>
+                <a:ea typeface="Malgun Gothic" pitchFamily="34" charset="-122"/>
+                <a:cs typeface="Malgun Gothic" pitchFamily="34" charset="-120"/>
+              </a:rPr>
+              <a:t>CAC 45% 절감 및 LTV/CAC 4.8x 달성으로 영업이익률 28.4% 확보</a:t>
+            </a:r>
+            <a:endParaRPr lang="en-US" sz="912" dirty="0"/>
+          </a:p>
+        </p:txBody>
+      </p:sp>
+      <p:sp>
+        <p:nvSpPr>
+          <p:cNvPr id="20" name="Shape 18"/>
+          <p:cNvSpPr/>
+          <p:nvPr/>
+        </p:nvSpPr>
+        <p:spPr>
+          <a:xfrm>
+            <a:off x="552480" y="4161252"/>
+            <a:ext cx="6029919" cy="669707"/>
+          </a:xfrm>
+          <a:prstGeom prst="roundRect">
+            <a:avLst>
+              <a:gd name="adj" fmla="val 19907"/>
+            </a:avLst>
+          </a:prstGeom>
+          <a:solidFill>
+            <a:srgbClr val="111A2E"/>
+          </a:solidFill>
+          <a:ln/>
+        </p:spPr>
+      </p:sp>
+      <p:sp>
+        <p:nvSpPr>
+          <p:cNvPr id="21" name="Shape 19"/>
+          <p:cNvSpPr/>
+          <p:nvPr/>
+        </p:nvSpPr>
+        <p:spPr>
+          <a:xfrm>
+            <a:off x="552480" y="4161252"/>
+            <a:ext cx="6029919" cy="9510"/>
+          </a:xfrm>
+          <a:prstGeom prst="rect">
+            <a:avLst/>
+          </a:prstGeom>
+          <a:solidFill>
+            <a:srgbClr val="FFFFFF">
+              <a:alpha val="10000"/>
+            </a:srgbClr>
+          </a:solidFill>
+          <a:ln/>
+        </p:spPr>
+      </p:sp>
+      <p:sp>
+        <p:nvSpPr>
+          <p:cNvPr id="22" name="Shape 20"/>
+          <p:cNvSpPr/>
+          <p:nvPr/>
+        </p:nvSpPr>
+        <p:spPr>
+          <a:xfrm>
+            <a:off x="6572799" y="4161252"/>
+            <a:ext cx="9510" cy="669707"/>
+          </a:xfrm>
+          <a:prstGeom prst="rect">
+            <a:avLst/>
+          </a:prstGeom>
+          <a:solidFill>
+            <a:srgbClr val="FFFFFF">
+              <a:alpha val="10000"/>
+            </a:srgbClr>
+          </a:solidFill>
+          <a:ln/>
+        </p:spPr>
+      </p:sp>
+      <p:sp>
+        <p:nvSpPr>
+          <p:cNvPr id="23" name="Shape 21"/>
+          <p:cNvSpPr/>
+          <p:nvPr/>
+        </p:nvSpPr>
+        <p:spPr>
+          <a:xfrm>
+            <a:off x="552480" y="4821448"/>
+            <a:ext cx="6029919" cy="9510"/>
+          </a:xfrm>
+          <a:prstGeom prst="rect">
+            <a:avLst/>
+          </a:prstGeom>
+          <a:solidFill>
+            <a:srgbClr val="FFFFFF">
+              <a:alpha val="10000"/>
+            </a:srgbClr>
+          </a:solidFill>
+          <a:ln/>
+        </p:spPr>
+      </p:sp>
+      <p:sp>
+        <p:nvSpPr>
+          <p:cNvPr id="24" name="Shape 22"/>
+          <p:cNvSpPr/>
+          <p:nvPr/>
+        </p:nvSpPr>
+        <p:spPr>
+          <a:xfrm>
+            <a:off x="552480" y="4161252"/>
+            <a:ext cx="28621" cy="669707"/>
+          </a:xfrm>
+          <a:prstGeom prst="rect">
+            <a:avLst/>
+          </a:prstGeom>
+          <a:solidFill>
+            <a:srgbClr val="10B981"/>
+          </a:solidFill>
+          <a:ln/>
+        </p:spPr>
+      </p:sp>
+      <p:sp>
+        <p:nvSpPr>
+          <p:cNvPr id="25" name="Text 23"/>
+          <p:cNvSpPr txBox="1"/>
+          <p:nvPr/>
+        </p:nvSpPr>
+        <p:spPr>
+          <a:xfrm>
+            <a:off x="714421" y="4284696"/>
+            <a:ext cx="6161044" cy="210312"/>
+          </a:xfrm>
+          <a:prstGeom prst="rect">
+            <a:avLst/>
+          </a:prstGeom>
+          <a:noFill/>
+          <a:ln/>
+        </p:spPr>
+        <p:txBody>
+          <a:bodyPr wrap="none" lIns="0" tIns="0" rIns="0" bIns="0" rtlCol="0" anchor="t"/>
+          <a:lstStyle/>
+          <a:p>
+            <a:pPr algn="l" indent="0" marL="0">
+              <a:lnSpc>
+                <a:spcPts val="1656"/>
+              </a:lnSpc>
+              <a:buNone/>
+            </a:pPr>
+            <a:r>
+              <a:rPr lang="en-US" sz="1104" b="1" spc="-54" kern="0" dirty="0">
+                <a:solidFill>
+                  <a:srgbClr val="FFFFFF"/>
+                </a:solidFill>
+                <a:latin typeface="Malgun Gothic" pitchFamily="34" charset="0"/>
+                <a:ea typeface="Malgun Gothic" pitchFamily="34" charset="-122"/>
+                <a:cs typeface="Malgun Gothic" pitchFamily="34" charset="-120"/>
+              </a:rPr>
+              <a:t>03. 지속 가능한 NRR 142% 달성</a:t>
+            </a:r>
+            <a:endParaRPr lang="en-US" sz="1104" dirty="0"/>
+          </a:p>
+        </p:txBody>
+      </p:sp>
+      <p:sp>
+        <p:nvSpPr>
+          <p:cNvPr id="26" name="Text 24"/>
+          <p:cNvSpPr txBox="1"/>
+          <p:nvPr/>
+        </p:nvSpPr>
+        <p:spPr>
+          <a:xfrm>
+            <a:off x="714421" y="4527560"/>
+            <a:ext cx="6161044" cy="173736"/>
+          </a:xfrm>
+          <a:prstGeom prst="rect">
+            <a:avLst/>
+          </a:prstGeom>
+          <a:noFill/>
+          <a:ln/>
+        </p:spPr>
+        <p:txBody>
+          <a:bodyPr wrap="none" lIns="0" tIns="0" rIns="0" bIns="0" rtlCol="0" anchor="t"/>
+          <a:lstStyle/>
+          <a:p>
+            <a:pPr algn="l" indent="0" marL="0">
+              <a:lnSpc>
+                <a:spcPts val="1368"/>
+              </a:lnSpc>
+              <a:buNone/>
+            </a:pPr>
+            <a:r>
+              <a:rPr lang="en-US" sz="912" spc="-54" kern="0" dirty="0">
+                <a:solidFill>
+                  <a:srgbClr val="94A3B8"/>
+                </a:solidFill>
+                <a:latin typeface="Malgun Gothic" pitchFamily="34" charset="0"/>
+                <a:ea typeface="Malgun Gothic" pitchFamily="34" charset="-122"/>
+                <a:cs typeface="Malgun Gothic" pitchFamily="34" charset="-120"/>
+              </a:rPr>
+              <a:t>부서 단위 확장 및 크로스셀 파이프라인으로 장기 락인 효과 극대화</a:t>
+            </a:r>
+            <a:endParaRPr lang="en-US" sz="912" dirty="0"/>
+          </a:p>
+        </p:txBody>
+      </p:sp>
+      <p:sp>
+        <p:nvSpPr>
+          <p:cNvPr id="27" name="Shape 25"/>
+          <p:cNvSpPr/>
+          <p:nvPr/>
+        </p:nvSpPr>
+        <p:spPr>
+          <a:xfrm>
+            <a:off x="6772869" y="2631277"/>
+            <a:ext cx="4866711" cy="3441344"/>
+          </a:xfrm>
+          <a:prstGeom prst="roundRect">
+            <a:avLst>
+              <a:gd name="adj" fmla="val 3874"/>
+            </a:avLst>
+          </a:prstGeom>
+          <a:solidFill>
+            <a:srgbClr val="111A2E"/>
+          </a:solidFill>
+          <a:ln w="9525">
+            <a:solidFill>
+              <a:srgbClr val="F59E0B">
+                <a:alpha val="40000"/>
+              </a:srgbClr>
+            </a:solidFill>
+            <a:prstDash val="solid"/>
+          </a:ln>
+        </p:spPr>
+      </p:sp>
+      <p:sp>
+        <p:nvSpPr>
+          <p:cNvPr id="28" name="Text 26"/>
+          <p:cNvSpPr txBox="1"/>
+          <p:nvPr/>
+        </p:nvSpPr>
+        <p:spPr>
+          <a:xfrm>
+            <a:off x="6953829" y="2810774"/>
+            <a:ext cx="4843028" cy="298369"/>
+          </a:xfrm>
+          <a:prstGeom prst="rect">
+            <a:avLst/>
+          </a:prstGeom>
+          <a:noFill/>
+          <a:ln/>
+        </p:spPr>
+        <p:txBody>
+          <a:bodyPr wrap="none" lIns="0" tIns="0" rIns="0" bIns="0" rtlCol="0" anchor="t"/>
+          <a:lstStyle/>
+          <a:p>
+            <a:pPr algn="l" indent="0" marL="0">
+              <a:lnSpc>
+                <a:spcPts val="2349"/>
+              </a:lnSpc>
+              <a:buNone/>
+            </a:pPr>
+            <a:r>
+              <a:rPr lang="en-US" sz="1566" b="1" spc="125" kern="0" dirty="0">
+                <a:solidFill>
+                  <a:srgbClr val="F59E0B"/>
+                </a:solidFill>
+                <a:latin typeface="Malgun Gothic" pitchFamily="34" charset="0"/>
+                <a:ea typeface="Malgun Gothic" pitchFamily="34" charset="-122"/>
+                <a:cs typeface="Malgun Gothic" pitchFamily="34" charset="-120"/>
+              </a:rPr>
+              <a:t>EXECUTIVE DISCUSSION</a:t>
+            </a:r>
+            <a:endParaRPr lang="en-US" sz="1566" dirty="0"/>
+          </a:p>
+        </p:txBody>
+      </p:sp>
+      <p:sp>
+        <p:nvSpPr>
+          <p:cNvPr id="29" name="Text 27"/>
+          <p:cNvSpPr txBox="1"/>
+          <p:nvPr/>
+        </p:nvSpPr>
+        <p:spPr>
+          <a:xfrm>
+            <a:off x="6953829" y="3127522"/>
+            <a:ext cx="4843028" cy="546903"/>
+          </a:xfrm>
+          <a:prstGeom prst="rect">
+            <a:avLst/>
+          </a:prstGeom>
+          <a:noFill/>
+          <a:ln/>
+        </p:spPr>
+        <p:txBody>
+          <a:bodyPr wrap="none" lIns="0" tIns="0" rIns="0" bIns="0" rtlCol="0" anchor="t"/>
+          <a:lstStyle/>
+          <a:p>
+            <a:pPr algn="l" indent="0" marL="0">
+              <a:lnSpc>
+                <a:spcPts val="4307"/>
+              </a:lnSpc>
+              <a:buNone/>
+            </a:pPr>
+            <a:r>
+              <a:rPr lang="en-US" sz="3915" b="1" spc="-54" kern="0" dirty="0">
+                <a:solidFill>
+                  <a:srgbClr val="FFFFFF"/>
+                </a:solidFill>
+                <a:latin typeface="Malgun Gothic" pitchFamily="34" charset="0"/>
+                <a:ea typeface="Malgun Gothic" pitchFamily="34" charset="-122"/>
+                <a:cs typeface="Malgun Gothic" pitchFamily="34" charset="-120"/>
+              </a:rPr>
+              <a:t>Q &amp; A</a:t>
+            </a:r>
+            <a:endParaRPr lang="en-US" sz="3915" dirty="0"/>
+          </a:p>
+        </p:txBody>
+      </p:sp>
+      <p:sp>
+        <p:nvSpPr>
+          <p:cNvPr id="30" name="Text 28"/>
+          <p:cNvSpPr txBox="1"/>
+          <p:nvPr/>
+        </p:nvSpPr>
+        <p:spPr>
+          <a:xfrm>
+            <a:off x="6953829" y="3730478"/>
+            <a:ext cx="4504792" cy="603321"/>
+          </a:xfrm>
+          <a:prstGeom prst="rect">
+            <a:avLst/>
+          </a:prstGeom>
+          <a:noFill/>
+          <a:ln/>
+        </p:spPr>
+        <p:txBody>
+          <a:bodyPr wrap="square" lIns="0" tIns="0" rIns="0" bIns="0" rtlCol="0" anchor="t"/>
+          <a:lstStyle/>
+          <a:p>
+            <a:pPr algn="l" indent="0" marL="0">
+              <a:lnSpc>
+                <a:spcPts val="2375"/>
+              </a:lnSpc>
+              <a:buNone/>
+            </a:pPr>
+            <a:r>
+              <a:rPr lang="en-US" sz="1697" spc="-54" kern="0" dirty="0">
+                <a:solidFill>
+                  <a:srgbClr val="94A3B8"/>
+                </a:solidFill>
+                <a:latin typeface="Malgun Gothic" pitchFamily="34" charset="0"/>
+                <a:ea typeface="Malgun Gothic" pitchFamily="34" charset="-122"/>
+                <a:cs typeface="Malgun Gothic" pitchFamily="34" charset="-120"/>
+              </a:rPr>
+              <a:t>사업화 전략 및 재무 실행 계획에 대한 질의응답을 진행합니다.</a:t>
+            </a:r>
+            <a:endParaRPr lang="en-US" sz="1697" dirty="0"/>
+          </a:p>
+        </p:txBody>
+      </p:sp>
+      <p:sp>
+        <p:nvSpPr>
+          <p:cNvPr id="31" name="Shape 29"/>
+          <p:cNvSpPr/>
+          <p:nvPr/>
+        </p:nvSpPr>
+        <p:spPr>
+          <a:xfrm>
+            <a:off x="6972849" y="4432280"/>
+            <a:ext cx="4466661" cy="9510"/>
+          </a:xfrm>
+          <a:prstGeom prst="rect">
+            <a:avLst/>
+          </a:prstGeom>
+          <a:solidFill>
+            <a:srgbClr val="FFFFFF">
+              <a:alpha val="8000"/>
+            </a:srgbClr>
+          </a:solidFill>
+          <a:ln/>
+        </p:spPr>
+      </p:sp>
+      <p:sp>
+        <p:nvSpPr>
+          <p:cNvPr id="32" name="Text 30"/>
+          <p:cNvSpPr txBox="1"/>
+          <p:nvPr/>
+        </p:nvSpPr>
+        <p:spPr>
+          <a:xfrm>
+            <a:off x="6953829" y="4529480"/>
+            <a:ext cx="4843028" cy="281727"/>
+          </a:xfrm>
+          <a:prstGeom prst="rect">
+            <a:avLst/>
+          </a:prstGeom>
+          <a:noFill/>
+          <a:ln/>
+        </p:spPr>
+        <p:txBody>
+          <a:bodyPr wrap="none" lIns="0" tIns="0" rIns="0" bIns="0" rtlCol="0" anchor="t"/>
+          <a:lstStyle/>
+          <a:p>
+            <a:pPr algn="l" indent="0" marL="0">
+              <a:lnSpc>
+                <a:spcPts val="2219"/>
+              </a:lnSpc>
+              <a:buNone/>
+            </a:pPr>
+            <a:r>
+              <a:rPr lang="en-US" sz="1479" spc="-54" kern="0" dirty="0">
+                <a:solidFill>
+                  <a:srgbClr val="94A3B8"/>
+                </a:solidFill>
+                <a:latin typeface="Malgun Gothic" pitchFamily="34" charset="0"/>
+                <a:ea typeface="Malgun Gothic" pitchFamily="34" charset="-122"/>
+                <a:cs typeface="Malgun Gothic" pitchFamily="34" charset="-120"/>
+              </a:rPr>
+              <a:t>STRATEGY DIVISION</a:t>
+            </a:r>
+            <a:endParaRPr lang="en-US" sz="1479" dirty="0"/>
+          </a:p>
+        </p:txBody>
+      </p:sp>
+      <p:sp>
+        <p:nvSpPr>
+          <p:cNvPr id="33" name="Text 31"/>
+          <p:cNvSpPr txBox="1"/>
+          <p:nvPr/>
+        </p:nvSpPr>
+        <p:spPr>
+          <a:xfrm>
+            <a:off x="6953829" y="4830501"/>
+            <a:ext cx="4843028" cy="348021"/>
+          </a:xfrm>
+          <a:prstGeom prst="rect">
+            <a:avLst/>
+          </a:prstGeom>
+          <a:noFill/>
+          <a:ln/>
+        </p:spPr>
+        <p:txBody>
+          <a:bodyPr wrap="none" lIns="0" tIns="0" rIns="0" bIns="0" rtlCol="0" anchor="t"/>
+          <a:lstStyle/>
+          <a:p>
+            <a:pPr algn="l" indent="0" marL="0">
+              <a:lnSpc>
+                <a:spcPts val="2741"/>
+              </a:lnSpc>
+              <a:buNone/>
+            </a:pPr>
+            <a:r>
+              <a:rPr lang="en-US" sz="1827" b="1" spc="-54" kern="0" dirty="0">
+                <a:solidFill>
+                  <a:srgbClr val="F59E0B"/>
+                </a:solidFill>
+                <a:latin typeface="Malgun Gothic" pitchFamily="34" charset="0"/>
+                <a:ea typeface="Malgun Gothic" pitchFamily="34" charset="-122"/>
+                <a:cs typeface="Malgun Gothic" pitchFamily="34" charset="-120"/>
+              </a:rPr>
+              <a:t>경영전략본부 / 전략기획실</a:t>
+            </a:r>
+            <a:endParaRPr lang="en-US" sz="1827" dirty="0"/>
+          </a:p>
+        </p:txBody>
+      </p:sp>
+      <p:sp>
+        <p:nvSpPr>
+          <p:cNvPr id="34" name="Text 32"/>
+          <p:cNvSpPr txBox="1"/>
+          <p:nvPr/>
+        </p:nvSpPr>
+        <p:spPr>
+          <a:xfrm>
+            <a:off x="6953829" y="5235397"/>
+            <a:ext cx="4843028" cy="281727"/>
+          </a:xfrm>
+          <a:prstGeom prst="rect">
+            <a:avLst/>
+          </a:prstGeom>
+          <a:noFill/>
+          <a:ln/>
+        </p:spPr>
+        <p:txBody>
+          <a:bodyPr wrap="none" lIns="0" tIns="0" rIns="0" bIns="0" rtlCol="0" anchor="t"/>
+          <a:lstStyle/>
+          <a:p>
+            <a:pPr algn="l" indent="0" marL="0">
+              <a:lnSpc>
+                <a:spcPts val="2219"/>
+              </a:lnSpc>
+              <a:buNone/>
+            </a:pPr>
+            <a:r>
+              <a:rPr lang="en-US" sz="1479" spc="-54" kern="0" dirty="0">
+                <a:solidFill>
+                  <a:srgbClr val="94A3B8"/>
+                </a:solidFill>
+                <a:latin typeface="Malgun Gothic" pitchFamily="34" charset="0"/>
+                <a:ea typeface="Malgun Gothic" pitchFamily="34" charset="-122"/>
+                <a:cs typeface="Malgun Gothic" pitchFamily="34" charset="-120"/>
+              </a:rPr>
+              <a:t>EXECUTIVE CONTACT</a:t>
+            </a:r>
+            <a:endParaRPr lang="en-US" sz="1479" dirty="0"/>
+          </a:p>
+        </p:txBody>
+      </p:sp>
+      <p:sp>
+        <p:nvSpPr>
+          <p:cNvPr id="35" name="Text 33"/>
+          <p:cNvSpPr txBox="1"/>
+          <p:nvPr/>
+        </p:nvSpPr>
+        <p:spPr>
+          <a:xfrm>
+            <a:off x="6953829" y="5536418"/>
+            <a:ext cx="4843028" cy="348021"/>
+          </a:xfrm>
+          <a:prstGeom prst="rect">
+            <a:avLst/>
+          </a:prstGeom>
+          <a:noFill/>
+          <a:ln/>
+        </p:spPr>
+        <p:txBody>
+          <a:bodyPr wrap="none" lIns="0" tIns="0" rIns="0" bIns="0" rtlCol="0" anchor="t"/>
+          <a:lstStyle/>
+          <a:p>
+            <a:pPr algn="l" indent="0" marL="0">
+              <a:lnSpc>
+                <a:spcPts val="2741"/>
+              </a:lnSpc>
+              <a:buNone/>
+            </a:pPr>
+            <a:r>
+              <a:rPr lang="en-US" sz="1827" spc="-54" kern="0" dirty="0">
+                <a:solidFill>
+                  <a:srgbClr val="E2E8F0"/>
+                </a:solidFill>
+                <a:latin typeface="Malgun Gothic" pitchFamily="34" charset="0"/>
+                <a:ea typeface="Malgun Gothic" pitchFamily="34" charset="-122"/>
+                <a:cs typeface="Malgun Gothic" pitchFamily="34" charset="-120"/>
+              </a:rPr>
+              <a:t>strategy@enterprise.com</a:t>
+            </a:r>
+            <a:endParaRPr lang="en-US" sz="1827" dirty="0"/>
+          </a:p>
+        </p:txBody>
+      </p:sp>
     </p:spTree>
   </p:cSld>
   <p:clrMapOvr>
